--- a/pwa/data/latest/slides.pptx
+++ b/pwa/data/latest/slides.pptx
@@ -11,7 +11,6 @@
     <p:sldId id="259" r:id="rId11"/>
     <p:sldId id="260" r:id="rId12"/>
     <p:sldId id="261" r:id="rId13"/>
-    <p:sldId id="262" r:id="rId14"/>
   </p:sldIdLst>
   <p:sldSz cx="5559552" cy="9875520" type="screen4x3"/>
   <p:notesSz cx="6858000" cy="9144000"/>
@@ -593,7 +592,7 @@
           </a:p>
           <a:p>
             <a:r>
-              <a:t>대본: 《Microbiology spectrum》 - Prospective multicenter evaluation of an easy-to-use DNA microarray for the detection of dermatophytes in clinical samples compared with conventional mycological methods</a:t>
+              <a:t>대본: 《Aging cell》 - Shelterin TPP1 Promotes Hair Regeneration Through Activating Bulge Hair Follicle Stem Cells</a:t>
             </a:r>
           </a:p>
           <a:p>
@@ -673,7 +672,7 @@
           </a:p>
           <a:p>
             <a:r>
-              <a:t>대본: Compared with culture, the DP assay showed that the sensitivity to culture was 96.4% [94.3-98.5], while the specificity was 61.2% [54.0-68.4], reflecting additional detections rather than false positives.</a:t>
+              <a:t>대본: Wang L(1), Zhao B(1)(2), Yang J(1)(2), Liang Y(1), Yao Y(1)(2), Xiao X(1)(2), Yang L(1)(2), Xia J(1)(2), Li H(1)(2), Gao L(1)(2), Zhang J(1)(2), Su T(1)(2), Xu H(1)(2), Zhang J(1)(2), Wang H(1), Liu J(1), Hong X(1), Liu JP(1)(3)(4).</a:t>
             </a:r>
           </a:p>
           <a:p>
@@ -748,17 +747,17 @@
           <a:lstStyle/>
           <a:p>
             <a:r>
-              <a:t>[key_finding_2] 약 12초</a:t>
-            </a:r>
-          </a:p>
-          <a:p>
-            <a:r>
-              <a:t>대본: The DP assay detected dermatophytes in 367/487 samples (75.4%), outperforming DE (67.4%) and culture (63.4%).</a:t>
-            </a:r>
-          </a:p>
-          <a:p>
-            <a:r>
-              <a:t>연출 노트: 핵심 포인트 2 (없으면 이 씬 스킵)</a:t>
+              <a:t>[my_take] 약 12초</a:t>
+            </a:r>
+          </a:p>
+          <a:p>
+            <a:r>
+              <a:t>대본: 본인 코멘트를 자유롭게 추가하세요.</a:t>
+            </a:r>
+          </a:p>
+          <a:p>
+            <a:r>
+              <a:t>연출 노트: 본인 사진 + 한마디 코멘트. assets/my-photo/latest.jpg 로 직접 교체.</a:t>
             </a:r>
           </a:p>
         </p:txBody>
@@ -784,86 +783,6 @@
 </file>
 
 <file path=ppt/notesSlides/notesSlide5.xml><?xml version="1.0" encoding="utf-8"?>
-<p:notes xmlns:a="http://schemas.openxmlformats.org/drawingml/2006/main" xmlns:p="http://schemas.openxmlformats.org/presentationml/2006/main" xmlns:r="http://schemas.openxmlformats.org/officeDocument/2006/relationships">
-  <p:cSld>
-    <p:spTree>
-      <p:nvGrpSpPr>
-        <p:cNvPr id="1" name=""/>
-        <p:cNvGrpSpPr/>
-        <p:nvPr/>
-      </p:nvGrpSpPr>
-      <p:grpSpPr>
-        <a:xfrm>
-          <a:off x="0" y="0"/>
-          <a:ext cx="0" cy="0"/>
-          <a:chOff x="0" y="0"/>
-          <a:chExt cx="0" cy="0"/>
-        </a:xfrm>
-      </p:grpSpPr>
-      <p:sp>
-        <p:nvSpPr>
-          <p:cNvPr id="2" name="Slide Image Placeholder 1"/>
-          <p:cNvSpPr>
-            <a:spLocks noGrp="1"/>
-          </p:cNvSpPr>
-          <p:nvPr>
-            <p:ph type="sldImg" idx="2"/>
-          </p:nvPr>
-        </p:nvSpPr>
-        <p:spPr/>
-      </p:sp>
-      <p:sp>
-        <p:nvSpPr>
-          <p:cNvPr id="3" name="Notes Placeholder 2"/>
-          <p:cNvSpPr>
-            <a:spLocks noGrp="1"/>
-          </p:cNvSpPr>
-          <p:nvPr>
-            <p:ph type="body" idx="3" sz="quarter"/>
-          </p:nvPr>
-        </p:nvSpPr>
-        <p:spPr/>
-        <p:txBody>
-          <a:bodyPr/>
-          <a:lstStyle/>
-          <a:p>
-            <a:r>
-              <a:t>[my_take] 약 12초</a:t>
-            </a:r>
-          </a:p>
-          <a:p>
-            <a:r>
-              <a:t>대본: 본인 코멘트를 자유롭게 추가하세요.</a:t>
-            </a:r>
-          </a:p>
-          <a:p>
-            <a:r>
-              <a:t>연출 노트: 본인 사진 + 한마디 코멘트. assets/my-photo/latest.jpg 로 직접 교체.</a:t>
-            </a:r>
-          </a:p>
-        </p:txBody>
-      </p:sp>
-      <p:sp>
-        <p:nvSpPr>
-          <p:cNvPr id="4" name="Slide Number Placeholder 3"/>
-          <p:cNvSpPr>
-            <a:spLocks noGrp="1"/>
-          </p:cNvSpPr>
-          <p:nvPr>
-            <p:ph type="sldNum" idx="5" sz="quarter"/>
-          </p:nvPr>
-        </p:nvSpPr>
-        <p:spPr/>
-      </p:sp>
-    </p:spTree>
-  </p:cSld>
-  <p:clrMapOvr>
-    <a:masterClrMapping/>
-  </p:clrMapOvr>
-</p:notes>
-</file>
-
-<file path=ppt/notesSlides/notesSlide6.xml><?xml version="1.0" encoding="utf-8"?>
 <p:notes xmlns:a="http://schemas.openxmlformats.org/drawingml/2006/main" xmlns:p="http://schemas.openxmlformats.org/presentationml/2006/main" xmlns:r="http://schemas.openxmlformats.org/officeDocument/2006/relationships">
   <p:cSld>
     <p:spTree>
@@ -4052,7 +3971,7 @@
       <p:grpSpPr/>
       <p:pic>
         <p:nvPicPr>
-          <p:cNvPr id="2" name="Picture 1" descr="frame_04_key_finding_2.png"/>
+          <p:cNvPr id="2" name="Picture 1" descr="frame_05_my_take.png"/>
           <p:cNvPicPr>
             <a:picLocks noChangeAspect="1"/>
           </p:cNvPicPr>
@@ -4094,7 +4013,7 @@
       <p:grpSpPr/>
       <p:pic>
         <p:nvPicPr>
-          <p:cNvPr id="2" name="Picture 1" descr="frame_05_my_take.png"/>
+          <p:cNvPr id="2" name="Picture 1" descr="frame_06_cta.png"/>
           <p:cNvPicPr>
             <a:picLocks noChangeAspect="1"/>
           </p:cNvPicPr>
@@ -4134,48 +4053,6 @@
         <p:nvPr/>
       </p:nvGrpSpPr>
       <p:grpSpPr/>
-      <p:pic>
-        <p:nvPicPr>
-          <p:cNvPr id="2" name="Picture 1" descr="frame_06_cta.png"/>
-          <p:cNvPicPr>
-            <a:picLocks noChangeAspect="1"/>
-          </p:cNvPicPr>
-          <p:nvPr/>
-        </p:nvPicPr>
-        <p:blipFill>
-          <a:blip r:embed="rId2"/>
-          <a:stretch>
-            <a:fillRect/>
-          </a:stretch>
-        </p:blipFill>
-        <p:spPr>
-          <a:xfrm>
-            <a:off x="0" y="0"/>
-            <a:ext cx="5559552" cy="9875520"/>
-          </a:xfrm>
-          <a:prstGeom prst="rect">
-            <a:avLst/>
-          </a:prstGeom>
-        </p:spPr>
-      </p:pic>
-    </p:spTree>
-  </p:cSld>
-  <p:clrMapOvr>
-    <a:masterClrMapping/>
-  </p:clrMapOvr>
-</p:sld>
-</file>
-
-<file path=ppt/slides/slide7.xml><?xml version="1.0" encoding="utf-8"?>
-<p:sld xmlns:a="http://schemas.openxmlformats.org/drawingml/2006/main" xmlns:p="http://schemas.openxmlformats.org/presentationml/2006/main" xmlns:r="http://schemas.openxmlformats.org/officeDocument/2006/relationships">
-  <p:cSld>
-    <p:spTree>
-      <p:nvGrpSpPr>
-        <p:cNvPr id="1" name=""/>
-        <p:cNvGrpSpPr/>
-        <p:nvPr/>
-      </p:nvGrpSpPr>
-      <p:grpSpPr/>
       <p:sp>
         <p:nvSpPr>
           <p:cNvPr id="2" name="TextBox 1"/>
@@ -4204,12 +4081,12 @@
           </a:p>
           <a:p>
             <a:r>
-              <a:t>Prospective multicenter evaluation of an easy-to-use DNA microarray for the detection of dermatophytes in clinical samples compared with conventional mycological methods</a:t>
-            </a:r>
-          </a:p>
-          <a:p>
-            <a:r>
-              <a:t>https://pubmed.ncbi.nlm.nih.gov/42663453/</a:t>
+              <a:t>Shelterin TPP1 Promotes Hair Regeneration Through Activating Bulge Hair Follicle Stem Cells</a:t>
+            </a:r>
+          </a:p>
+          <a:p>
+            <a:r>
+              <a:t>https://pubmed.ncbi.nlm.nih.gov/42663085/</a:t>
             </a:r>
           </a:p>
         </p:txBody>

--- a/pwa/data/latest/slides.pptx
+++ b/pwa/data/latest/slides.pptx
@@ -11,6 +11,7 @@
     <p:sldId id="259" r:id="rId11"/>
     <p:sldId id="260" r:id="rId12"/>
     <p:sldId id="261" r:id="rId13"/>
+    <p:sldId id="262" r:id="rId14"/>
   </p:sldIdLst>
   <p:sldSz cx="5559552" cy="9875520" type="screen4x3"/>
   <p:notesSz cx="6858000" cy="9144000"/>
@@ -592,7 +593,7 @@
           </a:p>
           <a:p>
             <a:r>
-              <a:t>대본: 《Aging cell》 - Shelterin TPP1 Promotes Hair Regeneration Through Activating Bulge Hair Follicle Stem Cells</a:t>
+              <a:t>대본: 《The Journal of dermatology》 - RETRACTION: Comparative Efficacy of Janus Kinase Inhibitors Indicated for Severe Alopecia Areata: A Bayesian Network Meta-Analysis and Matching-Adjusted Indirect Comparison</a:t>
             </a:r>
           </a:p>
           <a:p>
@@ -672,7 +673,7 @@
           </a:p>
           <a:p>
             <a:r>
-              <a:t>대본: Wang L(1), Zhao B(1)(2), Yang J(1)(2), Liang Y(1), Yao Y(1)(2), Xiao X(1)(2), Yang L(1)(2), Xia J(1)(2), Li H(1)(2), Gao L(1)(2), Zhang J(1)(2), Su T(1)(2), Xu H(1)(2), Zhang J(1)(2), Wang H(1), Liu J(1), Hong X(1), Liu JP(1)(3)(4).</a:t>
+              <a:t>대본: 6 (2025): 1134-1142, https://doi.org/10.1111/jdv.20372.</a:t>
             </a:r>
           </a:p>
           <a:p>
@@ -747,17 +748,17 @@
           <a:lstStyle/>
           <a:p>
             <a:r>
-              <a:t>[my_take] 약 12초</a:t>
-            </a:r>
-          </a:p>
-          <a:p>
-            <a:r>
-              <a:t>대본: 본인 코멘트를 자유롭게 추가하세요.</a:t>
-            </a:r>
-          </a:p>
-          <a:p>
-            <a:r>
-              <a:t>연출 노트: 본인 사진 + 한마디 코멘트. assets/my-photo/latest.jpg 로 직접 교체.</a:t>
+              <a:t>[key_finding_2] 약 12초</a:t>
+            </a:r>
+          </a:p>
+          <a:p>
+            <a:r>
+              <a:t>대본: Babul, "Comparative Efficacy of Janus Kinase Inhibitors Indicated for Severe Alopecia Areata: A Bayesian Network Meta-Analysis and Matching-Adjusted Indirect Comparison," The Journal of Dermatology (Early View): https://doi.org/10.1111/1346-8138.17959.</a:t>
+            </a:r>
+          </a:p>
+          <a:p>
+            <a:r>
+              <a:t>연출 노트: 핵심 포인트 2 (없으면 이 씬 스킵)</a:t>
             </a:r>
           </a:p>
         </p:txBody>
@@ -783,6 +784,86 @@
 </file>
 
 <file path=ppt/notesSlides/notesSlide5.xml><?xml version="1.0" encoding="utf-8"?>
+<p:notes xmlns:a="http://schemas.openxmlformats.org/drawingml/2006/main" xmlns:p="http://schemas.openxmlformats.org/presentationml/2006/main" xmlns:r="http://schemas.openxmlformats.org/officeDocument/2006/relationships">
+  <p:cSld>
+    <p:spTree>
+      <p:nvGrpSpPr>
+        <p:cNvPr id="1" name=""/>
+        <p:cNvGrpSpPr/>
+        <p:nvPr/>
+      </p:nvGrpSpPr>
+      <p:grpSpPr>
+        <a:xfrm>
+          <a:off x="0" y="0"/>
+          <a:ext cx="0" cy="0"/>
+          <a:chOff x="0" y="0"/>
+          <a:chExt cx="0" cy="0"/>
+        </a:xfrm>
+      </p:grpSpPr>
+      <p:sp>
+        <p:nvSpPr>
+          <p:cNvPr id="2" name="Slide Image Placeholder 1"/>
+          <p:cNvSpPr>
+            <a:spLocks noGrp="1"/>
+          </p:cNvSpPr>
+          <p:nvPr>
+            <p:ph type="sldImg" idx="2"/>
+          </p:nvPr>
+        </p:nvSpPr>
+        <p:spPr/>
+      </p:sp>
+      <p:sp>
+        <p:nvSpPr>
+          <p:cNvPr id="3" name="Notes Placeholder 2"/>
+          <p:cNvSpPr>
+            <a:spLocks noGrp="1"/>
+          </p:cNvSpPr>
+          <p:nvPr>
+            <p:ph type="body" idx="3" sz="quarter"/>
+          </p:nvPr>
+        </p:nvSpPr>
+        <p:spPr/>
+        <p:txBody>
+          <a:bodyPr/>
+          <a:lstStyle/>
+          <a:p>
+            <a:r>
+              <a:t>[my_take] 약 12초</a:t>
+            </a:r>
+          </a:p>
+          <a:p>
+            <a:r>
+              <a:t>대본: 본인 코멘트를 자유롭게 추가하세요.</a:t>
+            </a:r>
+          </a:p>
+          <a:p>
+            <a:r>
+              <a:t>연출 노트: 본인 사진 + 한마디 코멘트. assets/my-photo/latest.jpg 로 직접 교체.</a:t>
+            </a:r>
+          </a:p>
+        </p:txBody>
+      </p:sp>
+      <p:sp>
+        <p:nvSpPr>
+          <p:cNvPr id="4" name="Slide Number Placeholder 3"/>
+          <p:cNvSpPr>
+            <a:spLocks noGrp="1"/>
+          </p:cNvSpPr>
+          <p:nvPr>
+            <p:ph type="sldNum" idx="5" sz="quarter"/>
+          </p:nvPr>
+        </p:nvSpPr>
+        <p:spPr/>
+      </p:sp>
+    </p:spTree>
+  </p:cSld>
+  <p:clrMapOvr>
+    <a:masterClrMapping/>
+  </p:clrMapOvr>
+</p:notes>
+</file>
+
+<file path=ppt/notesSlides/notesSlide6.xml><?xml version="1.0" encoding="utf-8"?>
 <p:notes xmlns:a="http://schemas.openxmlformats.org/drawingml/2006/main" xmlns:p="http://schemas.openxmlformats.org/presentationml/2006/main" xmlns:r="http://schemas.openxmlformats.org/officeDocument/2006/relationships">
   <p:cSld>
     <p:spTree>
@@ -3971,7 +4052,7 @@
       <p:grpSpPr/>
       <p:pic>
         <p:nvPicPr>
-          <p:cNvPr id="2" name="Picture 1" descr="frame_05_my_take.png"/>
+          <p:cNvPr id="2" name="Picture 1" descr="frame_04_key_finding_2.png"/>
           <p:cNvPicPr>
             <a:picLocks noChangeAspect="1"/>
           </p:cNvPicPr>
@@ -4013,7 +4094,7 @@
       <p:grpSpPr/>
       <p:pic>
         <p:nvPicPr>
-          <p:cNvPr id="2" name="Picture 1" descr="frame_06_cta.png"/>
+          <p:cNvPr id="2" name="Picture 1" descr="frame_05_my_take.png"/>
           <p:cNvPicPr>
             <a:picLocks noChangeAspect="1"/>
           </p:cNvPicPr>
@@ -4053,6 +4134,48 @@
         <p:nvPr/>
       </p:nvGrpSpPr>
       <p:grpSpPr/>
+      <p:pic>
+        <p:nvPicPr>
+          <p:cNvPr id="2" name="Picture 1" descr="frame_06_cta.png"/>
+          <p:cNvPicPr>
+            <a:picLocks noChangeAspect="1"/>
+          </p:cNvPicPr>
+          <p:nvPr/>
+        </p:nvPicPr>
+        <p:blipFill>
+          <a:blip r:embed="rId2"/>
+          <a:stretch>
+            <a:fillRect/>
+          </a:stretch>
+        </p:blipFill>
+        <p:spPr>
+          <a:xfrm>
+            <a:off x="0" y="0"/>
+            <a:ext cx="5559552" cy="9875520"/>
+          </a:xfrm>
+          <a:prstGeom prst="rect">
+            <a:avLst/>
+          </a:prstGeom>
+        </p:spPr>
+      </p:pic>
+    </p:spTree>
+  </p:cSld>
+  <p:clrMapOvr>
+    <a:masterClrMapping/>
+  </p:clrMapOvr>
+</p:sld>
+</file>
+
+<file path=ppt/slides/slide7.xml><?xml version="1.0" encoding="utf-8"?>
+<p:sld xmlns:a="http://schemas.openxmlformats.org/drawingml/2006/main" xmlns:p="http://schemas.openxmlformats.org/presentationml/2006/main" xmlns:r="http://schemas.openxmlformats.org/officeDocument/2006/relationships">
+  <p:cSld>
+    <p:spTree>
+      <p:nvGrpSpPr>
+        <p:cNvPr id="1" name=""/>
+        <p:cNvGrpSpPr/>
+        <p:nvPr/>
+      </p:nvGrpSpPr>
+      <p:grpSpPr/>
       <p:sp>
         <p:nvSpPr>
           <p:cNvPr id="2" name="TextBox 1"/>
@@ -4081,12 +4204,12 @@
           </a:p>
           <a:p>
             <a:r>
-              <a:t>Shelterin TPP1 Promotes Hair Regeneration Through Activating Bulge Hair Follicle Stem Cells</a:t>
-            </a:r>
-          </a:p>
-          <a:p>
-            <a:r>
-              <a:t>https://pubmed.ncbi.nlm.nih.gov/42663085/</a:t>
+              <a:t>RETRACTION: Comparative Efficacy of Janus Kinase Inhibitors Indicated for Severe Alopecia Areata: A Bayesian Network Meta-Analysis and Matching-Adjusted Indirect Comparison</a:t>
+            </a:r>
+          </a:p>
+          <a:p>
+            <a:r>
+              <a:t>https://pubmed.ncbi.nlm.nih.gov/42661279/</a:t>
             </a:r>
           </a:p>
         </p:txBody>

--- a/pwa/data/latest/slides.pptx
+++ b/pwa/data/latest/slides.pptx
@@ -11,7 +11,6 @@
     <p:sldId id="259" r:id="rId11"/>
     <p:sldId id="260" r:id="rId12"/>
     <p:sldId id="261" r:id="rId13"/>
-    <p:sldId id="262" r:id="rId14"/>
   </p:sldIdLst>
   <p:sldSz cx="5559552" cy="9875520" type="screen4x3"/>
   <p:notesSz cx="6858000" cy="9144000"/>
@@ -593,7 +592,7 @@
           </a:p>
           <a:p>
             <a:r>
-              <a:t>대본: 《The Journal of dermatology》 - RETRACTION: Comparative Efficacy of Janus Kinase Inhibitors Indicated for Severe Alopecia Areata: A Bayesian Network Meta-Analysis and Matching-Adjusted Indirect Comparison</a:t>
+              <a:t>대본: 《Prostaglandins &amp; other lipid mediators》 - Role of Prostaglandins in Androgenetic Alopecia</a:t>
             </a:r>
           </a:p>
           <a:p>
@@ -673,7 +672,7 @@
           </a:p>
           <a:p>
             <a:r>
-              <a:t>대본: 6 (2025): 1134-1142, https://doi.org/10.1111/jdv.20372.</a:t>
+              <a:t>대본: Several novel agents, including PG analogs, receptor modulators, and 15-hydroxyprostaglandin dehydrogenase inhibitors, have shown potential applications in AGA treatment.</a:t>
             </a:r>
           </a:p>
           <a:p>
@@ -748,17 +747,17 @@
           <a:lstStyle/>
           <a:p>
             <a:r>
-              <a:t>[key_finding_2] 약 12초</a:t>
-            </a:r>
-          </a:p>
-          <a:p>
-            <a:r>
-              <a:t>대본: Babul, "Comparative Efficacy of Janus Kinase Inhibitors Indicated for Severe Alopecia Areata: A Bayesian Network Meta-Analysis and Matching-Adjusted Indirect Comparison," The Journal of Dermatology (Early View): https://doi.org/10.1111/1346-8138.17959.</a:t>
-            </a:r>
-          </a:p>
-          <a:p>
-            <a:r>
-              <a:t>연출 노트: 핵심 포인트 2 (없으면 이 씬 스킵)</a:t>
+              <a:t>[my_take] 약 12초</a:t>
+            </a:r>
+          </a:p>
+          <a:p>
+            <a:r>
+              <a:t>대본: 본인 코멘트를 자유롭게 추가하세요.</a:t>
+            </a:r>
+          </a:p>
+          <a:p>
+            <a:r>
+              <a:t>연출 노트: 본인 사진 + 한마디 코멘트. assets/my-photo/latest.jpg 로 직접 교체.</a:t>
             </a:r>
           </a:p>
         </p:txBody>
@@ -784,86 +783,6 @@
 </file>
 
 <file path=ppt/notesSlides/notesSlide5.xml><?xml version="1.0" encoding="utf-8"?>
-<p:notes xmlns:a="http://schemas.openxmlformats.org/drawingml/2006/main" xmlns:p="http://schemas.openxmlformats.org/presentationml/2006/main" xmlns:r="http://schemas.openxmlformats.org/officeDocument/2006/relationships">
-  <p:cSld>
-    <p:spTree>
-      <p:nvGrpSpPr>
-        <p:cNvPr id="1" name=""/>
-        <p:cNvGrpSpPr/>
-        <p:nvPr/>
-      </p:nvGrpSpPr>
-      <p:grpSpPr>
-        <a:xfrm>
-          <a:off x="0" y="0"/>
-          <a:ext cx="0" cy="0"/>
-          <a:chOff x="0" y="0"/>
-          <a:chExt cx="0" cy="0"/>
-        </a:xfrm>
-      </p:grpSpPr>
-      <p:sp>
-        <p:nvSpPr>
-          <p:cNvPr id="2" name="Slide Image Placeholder 1"/>
-          <p:cNvSpPr>
-            <a:spLocks noGrp="1"/>
-          </p:cNvSpPr>
-          <p:nvPr>
-            <p:ph type="sldImg" idx="2"/>
-          </p:nvPr>
-        </p:nvSpPr>
-        <p:spPr/>
-      </p:sp>
-      <p:sp>
-        <p:nvSpPr>
-          <p:cNvPr id="3" name="Notes Placeholder 2"/>
-          <p:cNvSpPr>
-            <a:spLocks noGrp="1"/>
-          </p:cNvSpPr>
-          <p:nvPr>
-            <p:ph type="body" idx="3" sz="quarter"/>
-          </p:nvPr>
-        </p:nvSpPr>
-        <p:spPr/>
-        <p:txBody>
-          <a:bodyPr/>
-          <a:lstStyle/>
-          <a:p>
-            <a:r>
-              <a:t>[my_take] 약 12초</a:t>
-            </a:r>
-          </a:p>
-          <a:p>
-            <a:r>
-              <a:t>대본: 본인 코멘트를 자유롭게 추가하세요.</a:t>
-            </a:r>
-          </a:p>
-          <a:p>
-            <a:r>
-              <a:t>연출 노트: 본인 사진 + 한마디 코멘트. assets/my-photo/latest.jpg 로 직접 교체.</a:t>
-            </a:r>
-          </a:p>
-        </p:txBody>
-      </p:sp>
-      <p:sp>
-        <p:nvSpPr>
-          <p:cNvPr id="4" name="Slide Number Placeholder 3"/>
-          <p:cNvSpPr>
-            <a:spLocks noGrp="1"/>
-          </p:cNvSpPr>
-          <p:nvPr>
-            <p:ph type="sldNum" idx="5" sz="quarter"/>
-          </p:nvPr>
-        </p:nvSpPr>
-        <p:spPr/>
-      </p:sp>
-    </p:spTree>
-  </p:cSld>
-  <p:clrMapOvr>
-    <a:masterClrMapping/>
-  </p:clrMapOvr>
-</p:notes>
-</file>
-
-<file path=ppt/notesSlides/notesSlide6.xml><?xml version="1.0" encoding="utf-8"?>
 <p:notes xmlns:a="http://schemas.openxmlformats.org/drawingml/2006/main" xmlns:p="http://schemas.openxmlformats.org/presentationml/2006/main" xmlns:r="http://schemas.openxmlformats.org/officeDocument/2006/relationships">
   <p:cSld>
     <p:spTree>
@@ -4052,7 +3971,7 @@
       <p:grpSpPr/>
       <p:pic>
         <p:nvPicPr>
-          <p:cNvPr id="2" name="Picture 1" descr="frame_04_key_finding_2.png"/>
+          <p:cNvPr id="2" name="Picture 1" descr="frame_05_my_take.png"/>
           <p:cNvPicPr>
             <a:picLocks noChangeAspect="1"/>
           </p:cNvPicPr>
@@ -4094,7 +4013,7 @@
       <p:grpSpPr/>
       <p:pic>
         <p:nvPicPr>
-          <p:cNvPr id="2" name="Picture 1" descr="frame_05_my_take.png"/>
+          <p:cNvPr id="2" name="Picture 1" descr="frame_06_cta.png"/>
           <p:cNvPicPr>
             <a:picLocks noChangeAspect="1"/>
           </p:cNvPicPr>
@@ -4134,48 +4053,6 @@
         <p:nvPr/>
       </p:nvGrpSpPr>
       <p:grpSpPr/>
-      <p:pic>
-        <p:nvPicPr>
-          <p:cNvPr id="2" name="Picture 1" descr="frame_06_cta.png"/>
-          <p:cNvPicPr>
-            <a:picLocks noChangeAspect="1"/>
-          </p:cNvPicPr>
-          <p:nvPr/>
-        </p:nvPicPr>
-        <p:blipFill>
-          <a:blip r:embed="rId2"/>
-          <a:stretch>
-            <a:fillRect/>
-          </a:stretch>
-        </p:blipFill>
-        <p:spPr>
-          <a:xfrm>
-            <a:off x="0" y="0"/>
-            <a:ext cx="5559552" cy="9875520"/>
-          </a:xfrm>
-          <a:prstGeom prst="rect">
-            <a:avLst/>
-          </a:prstGeom>
-        </p:spPr>
-      </p:pic>
-    </p:spTree>
-  </p:cSld>
-  <p:clrMapOvr>
-    <a:masterClrMapping/>
-  </p:clrMapOvr>
-</p:sld>
-</file>
-
-<file path=ppt/slides/slide7.xml><?xml version="1.0" encoding="utf-8"?>
-<p:sld xmlns:a="http://schemas.openxmlformats.org/drawingml/2006/main" xmlns:p="http://schemas.openxmlformats.org/presentationml/2006/main" xmlns:r="http://schemas.openxmlformats.org/officeDocument/2006/relationships">
-  <p:cSld>
-    <p:spTree>
-      <p:nvGrpSpPr>
-        <p:cNvPr id="1" name=""/>
-        <p:cNvGrpSpPr/>
-        <p:nvPr/>
-      </p:nvGrpSpPr>
-      <p:grpSpPr/>
       <p:sp>
         <p:nvSpPr>
           <p:cNvPr id="2" name="TextBox 1"/>
@@ -4204,12 +4081,12 @@
           </a:p>
           <a:p>
             <a:r>
-              <a:t>RETRACTION: Comparative Efficacy of Janus Kinase Inhibitors Indicated for Severe Alopecia Areata: A Bayesian Network Meta-Analysis and Matching-Adjusted Indirect Comparison</a:t>
-            </a:r>
-          </a:p>
-          <a:p>
-            <a:r>
-              <a:t>https://pubmed.ncbi.nlm.nih.gov/42661279/</a:t>
+              <a:t>Role of Prostaglandins in Androgenetic Alopecia</a:t>
+            </a:r>
+          </a:p>
+          <a:p>
+            <a:r>
+              <a:t>https://pubmed.ncbi.nlm.nih.gov/42660347/</a:t>
             </a:r>
           </a:p>
         </p:txBody>

--- a/pwa/data/latest/slides.pptx
+++ b/pwa/data/latest/slides.pptx
@@ -11,6 +11,7 @@
     <p:sldId id="259" r:id="rId11"/>
     <p:sldId id="260" r:id="rId12"/>
     <p:sldId id="261" r:id="rId13"/>
+    <p:sldId id="262" r:id="rId14"/>
   </p:sldIdLst>
   <p:sldSz cx="5559552" cy="9875520" type="screen4x3"/>
   <p:notesSz cx="6858000" cy="9144000"/>
@@ -592,7 +593,7 @@
           </a:p>
           <a:p>
             <a:r>
-              <a:t>대본: 《Prostaglandins &amp; other lipid mediators》 - Role of Prostaglandins in Androgenetic Alopecia</a:t>
+              <a:t>대본: 《International journal of cosmetic science》 - New insights from data analysis of 12 global clinical studies on hair shedding</a:t>
             </a:r>
           </a:p>
           <a:p>
@@ -672,7 +673,7 @@
           </a:p>
           <a:p>
             <a:r>
-              <a:t>대본: Several novel agents, including PG analogs, receptor modulators, and 15-hydroxyprostaglandin dehydrogenase inhibitors, have shown potential applications in AGA treatment.</a:t>
+              <a:t>대본: Cette recherche a analysé 12 études cliniques portant sur 805 participants (323 hommes et 482 femmes) issus de 8 pays (Chine, Indonésie, Royaume‐Uni, Inde, Brésil, Thaïlande, Turquie et États‐Unis) préoccupés par la perte de cheveux.</a:t>
             </a:r>
           </a:p>
           <a:p>
@@ -747,17 +748,17 @@
           <a:lstStyle/>
           <a:p>
             <a:r>
-              <a:t>[my_take] 약 12초</a:t>
-            </a:r>
-          </a:p>
-          <a:p>
-            <a:r>
-              <a:t>대본: 본인 코멘트를 자유롭게 추가하세요.</a:t>
-            </a:r>
-          </a:p>
-          <a:p>
-            <a:r>
-              <a:t>연출 노트: 본인 사진 + 한마디 코멘트. assets/my-photo/latest.jpg 로 직접 교체.</a:t>
+              <a:t>[key_finding_2] 약 12초</a:t>
+            </a:r>
+          </a:p>
+          <a:p>
+            <a:r>
+              <a:t>대본: Dans les 3 études asiatiques récentes, alors que la chute totale de cheveux comprenait à la fois les cheveux tombés à la racine (cheveux exogènes présentant une extrémité en forme caractéristique d’une massue) et les cheveux cassés, les cheveux tombés à la racine représentaient la proportion prédominante, soit en moyenne 96,5 % de la chute totale chez les participantes chinoises, 98,8 % chez les participants chinois et 72,2 % chez les participantes indonésiennes.</a:t>
+            </a:r>
+          </a:p>
+          <a:p>
+            <a:r>
+              <a:t>연출 노트: 핵심 포인트 2 (없으면 이 씬 스킵)</a:t>
             </a:r>
           </a:p>
         </p:txBody>
@@ -783,6 +784,86 @@
 </file>
 
 <file path=ppt/notesSlides/notesSlide5.xml><?xml version="1.0" encoding="utf-8"?>
+<p:notes xmlns:a="http://schemas.openxmlformats.org/drawingml/2006/main" xmlns:p="http://schemas.openxmlformats.org/presentationml/2006/main" xmlns:r="http://schemas.openxmlformats.org/officeDocument/2006/relationships">
+  <p:cSld>
+    <p:spTree>
+      <p:nvGrpSpPr>
+        <p:cNvPr id="1" name=""/>
+        <p:cNvGrpSpPr/>
+        <p:nvPr/>
+      </p:nvGrpSpPr>
+      <p:grpSpPr>
+        <a:xfrm>
+          <a:off x="0" y="0"/>
+          <a:ext cx="0" cy="0"/>
+          <a:chOff x="0" y="0"/>
+          <a:chExt cx="0" cy="0"/>
+        </a:xfrm>
+      </p:grpSpPr>
+      <p:sp>
+        <p:nvSpPr>
+          <p:cNvPr id="2" name="Slide Image Placeholder 1"/>
+          <p:cNvSpPr>
+            <a:spLocks noGrp="1"/>
+          </p:cNvSpPr>
+          <p:nvPr>
+            <p:ph type="sldImg" idx="2"/>
+          </p:nvPr>
+        </p:nvSpPr>
+        <p:spPr/>
+      </p:sp>
+      <p:sp>
+        <p:nvSpPr>
+          <p:cNvPr id="3" name="Notes Placeholder 2"/>
+          <p:cNvSpPr>
+            <a:spLocks noGrp="1"/>
+          </p:cNvSpPr>
+          <p:nvPr>
+            <p:ph type="body" idx="3" sz="quarter"/>
+          </p:nvPr>
+        </p:nvSpPr>
+        <p:spPr/>
+        <p:txBody>
+          <a:bodyPr/>
+          <a:lstStyle/>
+          <a:p>
+            <a:r>
+              <a:t>[my_take] 약 12초</a:t>
+            </a:r>
+          </a:p>
+          <a:p>
+            <a:r>
+              <a:t>대본: 본인 코멘트를 자유롭게 추가하세요.</a:t>
+            </a:r>
+          </a:p>
+          <a:p>
+            <a:r>
+              <a:t>연출 노트: 본인 사진 + 한마디 코멘트. assets/my-photo/latest.jpg 로 직접 교체.</a:t>
+            </a:r>
+          </a:p>
+        </p:txBody>
+      </p:sp>
+      <p:sp>
+        <p:nvSpPr>
+          <p:cNvPr id="4" name="Slide Number Placeholder 3"/>
+          <p:cNvSpPr>
+            <a:spLocks noGrp="1"/>
+          </p:cNvSpPr>
+          <p:nvPr>
+            <p:ph type="sldNum" idx="5" sz="quarter"/>
+          </p:nvPr>
+        </p:nvSpPr>
+        <p:spPr/>
+      </p:sp>
+    </p:spTree>
+  </p:cSld>
+  <p:clrMapOvr>
+    <a:masterClrMapping/>
+  </p:clrMapOvr>
+</p:notes>
+</file>
+
+<file path=ppt/notesSlides/notesSlide6.xml><?xml version="1.0" encoding="utf-8"?>
 <p:notes xmlns:a="http://schemas.openxmlformats.org/drawingml/2006/main" xmlns:p="http://schemas.openxmlformats.org/presentationml/2006/main" xmlns:r="http://schemas.openxmlformats.org/officeDocument/2006/relationships">
   <p:cSld>
     <p:spTree>
@@ -3971,7 +4052,7 @@
       <p:grpSpPr/>
       <p:pic>
         <p:nvPicPr>
-          <p:cNvPr id="2" name="Picture 1" descr="frame_05_my_take.png"/>
+          <p:cNvPr id="2" name="Picture 1" descr="frame_04_key_finding_2.png"/>
           <p:cNvPicPr>
             <a:picLocks noChangeAspect="1"/>
           </p:cNvPicPr>
@@ -4013,7 +4094,7 @@
       <p:grpSpPr/>
       <p:pic>
         <p:nvPicPr>
-          <p:cNvPr id="2" name="Picture 1" descr="frame_06_cta.png"/>
+          <p:cNvPr id="2" name="Picture 1" descr="frame_05_my_take.png"/>
           <p:cNvPicPr>
             <a:picLocks noChangeAspect="1"/>
           </p:cNvPicPr>
@@ -4053,6 +4134,48 @@
         <p:nvPr/>
       </p:nvGrpSpPr>
       <p:grpSpPr/>
+      <p:pic>
+        <p:nvPicPr>
+          <p:cNvPr id="2" name="Picture 1" descr="frame_06_cta.png"/>
+          <p:cNvPicPr>
+            <a:picLocks noChangeAspect="1"/>
+          </p:cNvPicPr>
+          <p:nvPr/>
+        </p:nvPicPr>
+        <p:blipFill>
+          <a:blip r:embed="rId2"/>
+          <a:stretch>
+            <a:fillRect/>
+          </a:stretch>
+        </p:blipFill>
+        <p:spPr>
+          <a:xfrm>
+            <a:off x="0" y="0"/>
+            <a:ext cx="5559552" cy="9875520"/>
+          </a:xfrm>
+          <a:prstGeom prst="rect">
+            <a:avLst/>
+          </a:prstGeom>
+        </p:spPr>
+      </p:pic>
+    </p:spTree>
+  </p:cSld>
+  <p:clrMapOvr>
+    <a:masterClrMapping/>
+  </p:clrMapOvr>
+</p:sld>
+</file>
+
+<file path=ppt/slides/slide7.xml><?xml version="1.0" encoding="utf-8"?>
+<p:sld xmlns:a="http://schemas.openxmlformats.org/drawingml/2006/main" xmlns:p="http://schemas.openxmlformats.org/presentationml/2006/main" xmlns:r="http://schemas.openxmlformats.org/officeDocument/2006/relationships">
+  <p:cSld>
+    <p:spTree>
+      <p:nvGrpSpPr>
+        <p:cNvPr id="1" name=""/>
+        <p:cNvGrpSpPr/>
+        <p:nvPr/>
+      </p:nvGrpSpPr>
+      <p:grpSpPr/>
       <p:sp>
         <p:nvSpPr>
           <p:cNvPr id="2" name="TextBox 1"/>
@@ -4081,12 +4204,12 @@
           </a:p>
           <a:p>
             <a:r>
-              <a:t>Role of Prostaglandins in Androgenetic Alopecia</a:t>
-            </a:r>
-          </a:p>
-          <a:p>
-            <a:r>
-              <a:t>https://pubmed.ncbi.nlm.nih.gov/42660347/</a:t>
+              <a:t>New insights from data analysis of 12 global clinical studies on hair shedding</a:t>
+            </a:r>
+          </a:p>
+          <a:p>
+            <a:r>
+              <a:t>https://pubmed.ncbi.nlm.nih.gov/42657759/</a:t>
             </a:r>
           </a:p>
         </p:txBody>

--- a/pwa/data/latest/slides.pptx
+++ b/pwa/data/latest/slides.pptx
@@ -593,7 +593,7 @@
           </a:p>
           <a:p>
             <a:r>
-              <a:t>대본: 《International journal of cosmetic science》 - New insights from data analysis of 12 global clinical studies on hair shedding</a:t>
+              <a:t>대본: 《Asian Pacific journal of cancer prevention : APJCP》 - Do Generic EGFR-TKIs Perform as Well as Innovators? Real-World Evidence from Gefitinib-Treated EGFR-Mutated NSCLC in Indonesia</a:t>
             </a:r>
           </a:p>
           <a:p>
@@ -673,7 +673,7 @@
           </a:p>
           <a:p>
             <a:r>
-              <a:t>대본: Cette recherche a analysé 12 études cliniques portant sur 805 participants (323 hommes et 482 femmes) issus de 8 pays (Chine, Indonésie, Royaume‐Uni, Inde, Brésil, Thaïlande, Turquie et États‐Unis) préoccupés par la perte de cheveux.</a:t>
+              <a:t>대본: Result: A total of 192 patients met the inclusion criteria (innovator n = 124; generic n = 68).</a:t>
             </a:r>
           </a:p>
           <a:p>
@@ -753,7 +753,7 @@
           </a:p>
           <a:p>
             <a:r>
-              <a:t>대본: Dans les 3 études asiatiques récentes, alors que la chute totale de cheveux comprenait à la fois les cheveux tombés à la racine (cheveux exogènes présentant une extrémité en forme caractéristique d’une massue) et les cheveux cassés, les cheveux tombés à la racine représentaient la proportion prédominante, soit en moyenne 96,5 % de la chute totale chez les participantes chinoises, 98,8 % chez les participants chinois et 72,2 % chez les participantes indonésiennes.</a:t>
+              <a:t>대본: The median PFS was 12.2 months (95% CI, 8.7-15.7) in the innovator group and 16.4 months (95% CI, 13.7-19.1) in the generic group.</a:t>
             </a:r>
           </a:p>
           <a:p>
@@ -4204,12 +4204,12 @@
           </a:p>
           <a:p>
             <a:r>
-              <a:t>New insights from data analysis of 12 global clinical studies on hair shedding</a:t>
-            </a:r>
-          </a:p>
-          <a:p>
-            <a:r>
-              <a:t>https://pubmed.ncbi.nlm.nih.gov/42657759/</a:t>
+              <a:t>Do Generic EGFR-TKIs Perform as Well as Innovators? Real-World Evidence from Gefitinib-Treated EGFR-Mutated NSCLC in Indonesia</a:t>
+            </a:r>
+          </a:p>
+          <a:p>
+            <a:r>
+              <a:t>https://pubmed.ncbi.nlm.nih.gov/42663218/</a:t>
             </a:r>
           </a:p>
         </p:txBody>

--- a/pwa/data/latest/slides.pptx
+++ b/pwa/data/latest/slides.pptx
@@ -593,7 +593,7 @@
           </a:p>
           <a:p>
             <a:r>
-              <a:t>대본: 《Asian Pacific journal of cancer prevention : APJCP》 - Do Generic EGFR-TKIs Perform as Well as Innovators? Real-World Evidence from Gefitinib-Treated EGFR-Mutated NSCLC in Indonesia</a:t>
+              <a:t>대본: 《Aging cell》 - Shelterin TPP1 Promotes Hair Regeneration Through Activating Bulge Hair Follicle Stem Cells</a:t>
             </a:r>
           </a:p>
           <a:p>
@@ -673,7 +673,7 @@
           </a:p>
           <a:p>
             <a:r>
-              <a:t>대본: Result: A total of 192 patients met the inclusion criteria (innovator n = 124; generic n = 68).</a:t>
+              <a:t>대본: Telomere shortening drives hair follicle senescence, yet successful reversal of this aging process has remained elusive.</a:t>
             </a:r>
           </a:p>
           <a:p>
@@ -753,7 +753,7 @@
           </a:p>
           <a:p>
             <a:r>
-              <a:t>대본: The median PFS was 12.2 months (95% CI, 8.7-15.7) in the innovator group and 16.4 months (95% CI, 13.7-19.1) in the generic group.</a:t>
+              <a:t>대본: Here, we report that stem cell overexpression of Acd, the gene encoding TPP1 (telomere protection protein 1)-a shelterin component that recruits telomerase-accelerates hair regeneration in mice.</a:t>
             </a:r>
           </a:p>
           <a:p>
@@ -4204,12 +4204,12 @@
           </a:p>
           <a:p>
             <a:r>
-              <a:t>Do Generic EGFR-TKIs Perform as Well as Innovators? Real-World Evidence from Gefitinib-Treated EGFR-Mutated NSCLC in Indonesia</a:t>
-            </a:r>
-          </a:p>
-          <a:p>
-            <a:r>
-              <a:t>https://pubmed.ncbi.nlm.nih.gov/42663218/</a:t>
+              <a:t>Shelterin TPP1 Promotes Hair Regeneration Through Activating Bulge Hair Follicle Stem Cells</a:t>
+            </a:r>
+          </a:p>
+          <a:p>
+            <a:r>
+              <a:t>https://pubmed.ncbi.nlm.nih.gov/42663085/</a:t>
             </a:r>
           </a:p>
         </p:txBody>

--- a/pwa/data/latest/slides.pptx
+++ b/pwa/data/latest/slides.pptx
@@ -593,7 +593,7 @@
           </a:p>
           <a:p>
             <a:r>
-              <a:t>대본: 《Aging cell》 - Shelterin TPP1 Promotes Hair Regeneration Through Activating Bulge Hair Follicle Stem Cells</a:t>
+              <a:t>대본: 《Prostaglandins &amp; other lipid mediators》 - Role of Prostaglandins in Androgenetic Alopecia</a:t>
             </a:r>
           </a:p>
           <a:p>
@@ -673,7 +673,7 @@
           </a:p>
           <a:p>
             <a:r>
-              <a:t>대본: Telomere shortening drives hair follicle senescence, yet successful reversal of this aging process has remained elusive.</a:t>
+              <a:t>대본: Androgenetic alopecia (AGA) is the most prevalent progressive hair loss disorder worldwide, and its pathogenesis is closely linked to dysregulated androgen metabolism.</a:t>
             </a:r>
           </a:p>
           <a:p>
@@ -753,7 +753,7 @@
           </a:p>
           <a:p>
             <a:r>
-              <a:t>대본: Here, we report that stem cell overexpression of Acd, the gene encoding TPP1 (telomere protection protein 1)-a shelterin component that recruits telomerase-accelerates hair regeneration in mice.</a:t>
+              <a:t>대본: Conventional therapies for AGA have limited efficacy and adverse reactions.</a:t>
             </a:r>
           </a:p>
           <a:p>
@@ -4204,12 +4204,12 @@
           </a:p>
           <a:p>
             <a:r>
-              <a:t>Shelterin TPP1 Promotes Hair Regeneration Through Activating Bulge Hair Follicle Stem Cells</a:t>
-            </a:r>
-          </a:p>
-          <a:p>
-            <a:r>
-              <a:t>https://pubmed.ncbi.nlm.nih.gov/42663085/</a:t>
+              <a:t>Role of Prostaglandins in Androgenetic Alopecia</a:t>
+            </a:r>
+          </a:p>
+          <a:p>
+            <a:r>
+              <a:t>https://pubmed.ncbi.nlm.nih.gov/42660347/</a:t>
             </a:r>
           </a:p>
         </p:txBody>

--- a/pwa/data/latest/slides.pptx
+++ b/pwa/data/latest/slides.pptx
@@ -593,7 +593,7 @@
           </a:p>
           <a:p>
             <a:r>
-              <a:t>대본: 《Prostaglandins &amp; other lipid mediators》 - Role of Prostaglandins in Androgenetic Alopecia</a:t>
+              <a:t>대본: 《International journal of cosmetic science》 - New insights from data analysis of 12 global clinical studies on hair shedding</a:t>
             </a:r>
           </a:p>
           <a:p>
@@ -673,7 +673,7 @@
           </a:p>
           <a:p>
             <a:r>
-              <a:t>대본: Androgenetic alopecia (AGA) is the most prevalent progressive hair loss disorder worldwide, and its pathogenesis is closely linked to dysregulated androgen metabolism.</a:t>
+              <a:t>대본: This research analysed 12 clinical studies involving 805 participants (323 males and 482 females) across eight countries (China, Indonesia, UK, India, Brazil, Thailand, Turkey and US) with concerns about hair loss.</a:t>
             </a:r>
           </a:p>
           <a:p>
@@ -753,7 +753,7 @@
           </a:p>
           <a:p>
             <a:r>
-              <a:t>대본: Conventional therapies for AGA have limited efficacy and adverse reactions.</a:t>
+              <a:t>대본: Across the three recent Asian studies, whilst total hair fall comprised both shed hairs from the root (exogen hairs with a typical club end) and broken hairs, shed hairs from the root represented the predominant proportion, accounting for an average of 96.5% of total hair fall in Chinese female participants, 98.8% in Chinese male participants, and 72.2% in Indonesian female participants.</a:t>
             </a:r>
           </a:p>
           <a:p>
@@ -4204,12 +4204,12 @@
           </a:p>
           <a:p>
             <a:r>
-              <a:t>Role of Prostaglandins in Androgenetic Alopecia</a:t>
-            </a:r>
-          </a:p>
-          <a:p>
-            <a:r>
-              <a:t>https://pubmed.ncbi.nlm.nih.gov/42660347/</a:t>
+              <a:t>New insights from data analysis of 12 global clinical studies on hair shedding</a:t>
+            </a:r>
+          </a:p>
+          <a:p>
+            <a:r>
+              <a:t>https://pubmed.ncbi.nlm.nih.gov/42657759/</a:t>
             </a:r>
           </a:p>
         </p:txBody>

--- a/pwa/data/latest/slides.pptx
+++ b/pwa/data/latest/slides.pptx
@@ -593,7 +593,7 @@
           </a:p>
           <a:p>
             <a:r>
-              <a:t>대본: 《International journal of cosmetic science》 - New insights from data analysis of 12 global clinical studies on hair shedding</a:t>
+              <a:t>대본: 《Frontiers in immunology》 - Alopecia areata patients are associated with increased risk of glaucoma: a multicenter, retrospective cohort study</a:t>
             </a:r>
           </a:p>
           <a:p>
@@ -673,7 +673,7 @@
           </a:p>
           <a:p>
             <a:r>
-              <a:t>대본: This research analysed 12 clinical studies involving 805 participants (323 males and 482 females) across eight countries (China, Indonesia, UK, India, Brazil, Thailand, Turkey and US) with concerns about hair loss.</a:t>
+              <a:t>대본: Adults (≥18 years) with at least two visit records and a diagnosis of AA between 2005 and 2023 were included and matched 1:1 with individuals undergoing general health examinations without an AA diagnosis.</a:t>
             </a:r>
           </a:p>
           <a:p>
@@ -753,7 +753,7 @@
           </a:p>
           <a:p>
             <a:r>
-              <a:t>대본: Across the three recent Asian studies, whilst total hair fall comprised both shed hairs from the root (exogen hairs with a typical club end) and broken hairs, shed hairs from the root represented the predominant proportion, accounting for an average of 96.5% of total hair fall in Chinese female participants, 98.8% in Chinese male participants, and 72.2% in Indonesian female participants.</a:t>
+              <a:t>대본: During a 15-year follow-up, AA was associated with a higher risk of glaucoma (HR = 1.89; 95% CI, 1.51-2.38), consistent across models and sensitivity analyses.</a:t>
             </a:r>
           </a:p>
           <a:p>
@@ -3926,7 +3926,7 @@
       <p:grpSpPr/>
       <p:pic>
         <p:nvPicPr>
-          <p:cNvPr id="2" name="Picture 1" descr="frame_01_hook.png"/>
+          <p:cNvPr id="2" name="Picture 1" descr="frame_01_hook.jpg"/>
           <p:cNvPicPr>
             <a:picLocks noChangeAspect="1"/>
           </p:cNvPicPr>
@@ -3968,7 +3968,7 @@
       <p:grpSpPr/>
       <p:pic>
         <p:nvPicPr>
-          <p:cNvPr id="2" name="Picture 1" descr="frame_02_paper_intro.png"/>
+          <p:cNvPr id="2" name="Picture 1" descr="frame_02_paper_intro.jpg"/>
           <p:cNvPicPr>
             <a:picLocks noChangeAspect="1"/>
           </p:cNvPicPr>
@@ -4010,7 +4010,7 @@
       <p:grpSpPr/>
       <p:pic>
         <p:nvPicPr>
-          <p:cNvPr id="2" name="Picture 1" descr="frame_03_key_finding_1.png"/>
+          <p:cNvPr id="2" name="Picture 1" descr="frame_03_key_finding_1.jpg"/>
           <p:cNvPicPr>
             <a:picLocks noChangeAspect="1"/>
           </p:cNvPicPr>
@@ -4052,7 +4052,7 @@
       <p:grpSpPr/>
       <p:pic>
         <p:nvPicPr>
-          <p:cNvPr id="2" name="Picture 1" descr="frame_04_key_finding_2.png"/>
+          <p:cNvPr id="2" name="Picture 1" descr="frame_04_key_finding_2.jpg"/>
           <p:cNvPicPr>
             <a:picLocks noChangeAspect="1"/>
           </p:cNvPicPr>
@@ -4094,7 +4094,7 @@
       <p:grpSpPr/>
       <p:pic>
         <p:nvPicPr>
-          <p:cNvPr id="2" name="Picture 1" descr="frame_05_my_take.png"/>
+          <p:cNvPr id="2" name="Picture 1" descr="frame_05_my_take.jpg"/>
           <p:cNvPicPr>
             <a:picLocks noChangeAspect="1"/>
           </p:cNvPicPr>
@@ -4136,7 +4136,7 @@
       <p:grpSpPr/>
       <p:pic>
         <p:nvPicPr>
-          <p:cNvPr id="2" name="Picture 1" descr="frame_06_cta.png"/>
+          <p:cNvPr id="2" name="Picture 1" descr="frame_06_cta.jpg"/>
           <p:cNvPicPr>
             <a:picLocks noChangeAspect="1"/>
           </p:cNvPicPr>
@@ -4204,12 +4204,12 @@
           </a:p>
           <a:p>
             <a:r>
-              <a:t>New insights from data analysis of 12 global clinical studies on hair shedding</a:t>
-            </a:r>
-          </a:p>
-          <a:p>
-            <a:r>
-              <a:t>https://pubmed.ncbi.nlm.nih.gov/42657759/</a:t>
+              <a:t>Alopecia areata patients are associated with increased risk of glaucoma: a multicenter, retrospective cohort study</a:t>
+            </a:r>
+          </a:p>
+          <a:p>
+            <a:r>
+              <a:t>https://pubmed.ncbi.nlm.nih.gov/42656655/</a:t>
             </a:r>
           </a:p>
         </p:txBody>

--- a/pwa/data/latest/slides.pptx
+++ b/pwa/data/latest/slides.pptx
@@ -593,7 +593,7 @@
           </a:p>
           <a:p>
             <a:r>
-              <a:t>대본: 《Frontiers in immunology》 - Alopecia areata patients are associated with increased risk of glaucoma: a multicenter, retrospective cohort study</a:t>
+              <a:t>대본: 《Molecules (Basel, Switzerland)》 - Amphiphilic Covalent Organic Framework for Efficient DHT Adsorption and Androgenetic Alopecia Treatment via Spectral Technology</a:t>
             </a:r>
           </a:p>
           <a:p>
@@ -673,7 +673,7 @@
           </a:p>
           <a:p>
             <a:r>
-              <a:t>대본: Adults (≥18 years) with at least two visit records and a diagnosis of AA between 2005 and 2023 were included and matched 1:1 with individuals undergoing general health examinations without an AA diagnosis.</a:t>
+              <a:t>대본: Androgenetic alopecia (AGA) is a prevalent clinical disorder, and the key pathogenic factor is dihydrotestosterone (DHT) present in the pilosebaceous unit.</a:t>
             </a:r>
           </a:p>
           <a:p>
@@ -753,7 +753,7 @@
           </a:p>
           <a:p>
             <a:r>
-              <a:t>대본: During a 15-year follow-up, AA was associated with a higher risk of glaucoma (HR = 1.89; 95% CI, 1.51-2.38), consistent across models and sensitivity analyses.</a:t>
+              <a:t>대본: Current clinical therapeutic options are often associated with notable adverse effects, highlighting the urgent need for safer and more effective interventions.</a:t>
             </a:r>
           </a:p>
           <a:p>
@@ -4204,12 +4204,12 @@
           </a:p>
           <a:p>
             <a:r>
-              <a:t>Alopecia areata patients are associated with increased risk of glaucoma: a multicenter, retrospective cohort study</a:t>
-            </a:r>
-          </a:p>
-          <a:p>
-            <a:r>
-              <a:t>https://pubmed.ncbi.nlm.nih.gov/42656655/</a:t>
+              <a:t>Amphiphilic Covalent Organic Framework for Efficient DHT Adsorption and Androgenetic Alopecia Treatment via Spectral Technology</a:t>
+            </a:r>
+          </a:p>
+          <a:p>
+            <a:r>
+              <a:t>https://pubmed.ncbi.nlm.nih.gov/42654016/</a:t>
             </a:r>
           </a:p>
         </p:txBody>

--- a/pwa/data/latest/slides.pptx
+++ b/pwa/data/latest/slides.pptx
@@ -593,7 +593,7 @@
           </a:p>
           <a:p>
             <a:r>
-              <a:t>대본: 《Molecules (Basel, Switzerland)》 - Amphiphilic Covalent Organic Framework for Efficient DHT Adsorption and Androgenetic Alopecia Treatment via Spectral Technology</a:t>
+              <a:t>대본: 《Molecules (Basel, Switzerland)》 - Pungenin Promotes Hair Growth in Mouse Models of Androgenic Alopecia Through Transcriptional Regulation of the PI3K/AKT/mTOR Axis</a:t>
             </a:r>
           </a:p>
           <a:p>
@@ -673,7 +673,7 @@
           </a:p>
           <a:p>
             <a:r>
-              <a:t>대본: Androgenetic alopecia (AGA) is a prevalent clinical disorder, and the key pathogenic factor is dihydrotestosterone (DHT) present in the pilosebaceous unit.</a:t>
+              <a:t>대본: Androgenetic alopecia (AGA) is the most common form of hair loss, characterized by the progressive miniaturization of hair follicles driven by dihydrotestosterone (DHT)-mediated androgen receptor signaling.</a:t>
             </a:r>
           </a:p>
           <a:p>
@@ -753,7 +753,7 @@
           </a:p>
           <a:p>
             <a:r>
-              <a:t>대본: Current clinical therapeutic options are often associated with notable adverse effects, highlighting the urgent need for safer and more effective interventions.</a:t>
+              <a:t>대본: Current pharmacotherapies remain limited in efficacy and are often associated with undesirable side effects.</a:t>
             </a:r>
           </a:p>
           <a:p>
@@ -4204,12 +4204,12 @@
           </a:p>
           <a:p>
             <a:r>
-              <a:t>Amphiphilic Covalent Organic Framework for Efficient DHT Adsorption and Androgenetic Alopecia Treatment via Spectral Technology</a:t>
-            </a:r>
-          </a:p>
-          <a:p>
-            <a:r>
-              <a:t>https://pubmed.ncbi.nlm.nih.gov/42654016/</a:t>
+              <a:t>Pungenin Promotes Hair Growth in Mouse Models of Androgenic Alopecia Through Transcriptional Regulation of the PI3K/AKT/mTOR Axis</a:t>
+            </a:r>
+          </a:p>
+          <a:p>
+            <a:r>
+              <a:t>https://pubmed.ncbi.nlm.nih.gov/42653946/</a:t>
             </a:r>
           </a:p>
         </p:txBody>

--- a/pwa/data/latest/slides.pptx
+++ b/pwa/data/latest/slides.pptx
@@ -593,7 +593,7 @@
           </a:p>
           <a:p>
             <a:r>
-              <a:t>대본: 《Molecules (Basel, Switzerland)》 - Pungenin Promotes Hair Growth in Mouse Models of Androgenic Alopecia Through Transcriptional Regulation of the PI3K/AKT/mTOR Axis</a:t>
+              <a:t>대본: 《Dermatologic surgery : official publication for American Society for Dermatologic Surgery [et al.]》 - Can Transplanted Hair Follicles Survive in the Absence of Arrector Pili Muscle Attachments?</a:t>
             </a:r>
           </a:p>
           <a:p>
@@ -673,7 +673,7 @@
           </a:p>
           <a:p>
             <a:r>
-              <a:t>대본: Androgenetic alopecia (AGA) is the most common form of hair loss, characterized by the progressive miniaturization of hair follicles driven by dihydrotestosterone (DHT)-mediated androgen receptor signaling.</a:t>
+              <a:t>대본: Methods: Scalp biopsies from recipient and native donor areas of 5 patients with suboptimal graft survival after HT were analyzed.</a:t>
             </a:r>
           </a:p>
           <a:p>
@@ -753,7 +753,7 @@
           </a:p>
           <a:p>
             <a:r>
-              <a:t>대본: Current pharmacotherapies remain limited in efficacy and are often associated with undesirable side effects.</a:t>
+              <a:t>대본: Two 4-mm punch biopsies were obtained in each case for horizontal and vertical sectioning.</a:t>
             </a:r>
           </a:p>
           <a:p>
@@ -4204,12 +4204,12 @@
           </a:p>
           <a:p>
             <a:r>
-              <a:t>Pungenin Promotes Hair Growth in Mouse Models of Androgenic Alopecia Through Transcriptional Regulation of the PI3K/AKT/mTOR Axis</a:t>
-            </a:r>
-          </a:p>
-          <a:p>
-            <a:r>
-              <a:t>https://pubmed.ncbi.nlm.nih.gov/42653946/</a:t>
+              <a:t>Can Transplanted Hair Follicles Survive in the Absence of Arrector Pili Muscle Attachments?</a:t>
+            </a:r>
+          </a:p>
+          <a:p>
+            <a:r>
+              <a:t>https://pubmed.ncbi.nlm.nih.gov/42664316/</a:t>
             </a:r>
           </a:p>
         </p:txBody>

--- a/pwa/data/latest/slides.pptx
+++ b/pwa/data/latest/slides.pptx
@@ -513,12 +513,12 @@
           </a:p>
           <a:p>
             <a:r>
-              <a:t>대본: 오늘 새로 나온 탈모 연구, 이거 안 보면 손해입니다.</a:t>
-            </a:r>
-          </a:p>
-          <a:p>
-            <a:r>
-              <a:t>연출 노트: 가장 임팩트 있는 한 줄. 시청 유지율의 핵심 구간.</a:t>
+              <a:t>대본: 85% 이 숫자, 탈모 연구가 새로 내놨습니다</a:t>
+            </a:r>
+          </a:p>
+          <a:p>
+            <a:r>
+              <a:t>연출 노트: 0.5초 안에 스크롤을 멈추게 하는 구간. 숫자를 크게 읽어준다.</a:t>
             </a:r>
           </a:p>
         </p:txBody>
@@ -588,17 +588,17 @@
           <a:lstStyle/>
           <a:p>
             <a:r>
-              <a:t>[paper_intro] 약 9초</a:t>
-            </a:r>
-          </a:p>
-          <a:p>
-            <a:r>
-              <a:t>대본: 《Veterinary journal (London, England : 1997)》 - Canine Flank Alopecia: A Narrative Review of Clinical Presentation, Genetic Basis, and Therapeutic Management</a:t>
-            </a:r>
-          </a:p>
-          <a:p>
-            <a:r>
-              <a:t>연출 노트: 오늘 다룰 논문/기사 표지 카드 노출 + 출처 소개</a:t>
+              <a:t>[paper_intro] 약 8초</a:t>
+            </a:r>
+          </a:p>
+          <a:p>
+            <a:r>
+              <a:t>대본: 《Clinical, cosmetic and investigational dermatology》 - Dupilumab Combined with Topical 5% Minoxidil for Severe Alopecia Areata in a 2-Year-Old Child with Type 2 Immune Features: A Case Report</a:t>
+            </a:r>
+          </a:p>
+          <a:p>
+            <a:r>
+              <a:t>연출 노트: 출처를 분명히 밝혀 신뢰를 준다.</a:t>
             </a:r>
           </a:p>
         </p:txBody>
@@ -668,17 +668,17 @@
           <a:lstStyle/>
           <a:p>
             <a:r>
-              <a:t>[key_finding_1] 약 12초</a:t>
-            </a:r>
-          </a:p>
-          <a:p>
-            <a:r>
-              <a:t>대본: Canine flank alopecia (CFA) is a seasonally recurrent skin disorder with a strong breed predisposition.</a:t>
-            </a:r>
-          </a:p>
-          <a:p>
-            <a:r>
-              <a:t>연출 노트: 핵심 포인트 1 - 주제 관련 이미지 배경 + 자막 오버레이</a:t>
+              <a:t>[key_finding_1] 약 10초</a:t>
+            </a:r>
+          </a:p>
+          <a:p>
+            <a:r>
+              <a:t>대본: Background: Severe alopecia areata (AA) in very young children is difficult to manage because evidence-based treatment options are limited and currently approved Janus kinase (JAK) inhibitor therapies do not cover children younger than 12 years.</a:t>
+            </a:r>
+          </a:p>
+          <a:p>
+            <a:r>
+              <a:t>연출 노트: 핵심 포인트 1. 자막을 끊어 읽는다.</a:t>
             </a:r>
           </a:p>
         </p:txBody>
@@ -748,17 +748,17 @@
           <a:lstStyle/>
           <a:p>
             <a:r>
-              <a:t>[key_finding_2] 약 12초</a:t>
-            </a:r>
-          </a:p>
-          <a:p>
-            <a:r>
-              <a:t>대본: Affected dogs display non-inflammatory, often hyperpigmented, well-circumscribed, symmetrical patches of hair loss, typically located on the thoracolumbar flanks.</a:t>
-            </a:r>
-          </a:p>
-          <a:p>
-            <a:r>
-              <a:t>연출 노트: 핵심 포인트 2 (없으면 이 씬 스킵)</a:t>
+              <a:t>[key_finding_2] 약 10초</a:t>
+            </a:r>
+          </a:p>
+          <a:p>
+            <a:r>
+              <a:t>대본: Case presentation: A 2-year-and-5-month-old girl with a 2-year history of progressive scalp hair loss presented with severe diffuse AA (Severity of Alopecia Tool [SALT] score, 85%).</a:t>
+            </a:r>
+          </a:p>
+          <a:p>
+            <a:r>
+              <a:t>연출 노트: 핵심 포인트 2.</a:t>
             </a:r>
           </a:p>
         </p:txBody>
@@ -828,17 +828,17 @@
           <a:lstStyle/>
           <a:p>
             <a:r>
-              <a:t>[my_take] 약 12초</a:t>
-            </a:r>
-          </a:p>
-          <a:p>
-            <a:r>
-              <a:t>대본: 본인 코멘트를 자유롭게 추가하세요.</a:t>
-            </a:r>
-          </a:p>
-          <a:p>
-            <a:r>
-              <a:t>연출 노트: 본인 사진 + 한마디 코멘트. assets/my-photo/latest.jpg 로 직접 교체.</a:t>
+              <a:t>[my_take] 약 10초</a:t>
+            </a:r>
+          </a:p>
+          <a:p>
+            <a:r>
+              <a:t>대본: 탈모 연구, 매일 쉽게 정리해드립니다 🙂</a:t>
+            </a:r>
+          </a:p>
+          <a:p>
+            <a:r>
+              <a:t>연출 노트: 본인 사진 + 코멘트. 문구를 직접 바꿔 쓰세요.</a:t>
             </a:r>
           </a:p>
         </p:txBody>
@@ -908,7 +908,7 @@
           <a:lstStyle/>
           <a:p>
             <a:r>
-              <a:t>[cta] 약 9초</a:t>
+              <a:t>[cta] 약 8초</a:t>
             </a:r>
           </a:p>
           <a:p>
@@ -918,7 +918,7 @@
           </a:p>
           <a:p>
             <a:r>
-              <a:t>연출 노트: 구독/팔로우 유도 + 원문 링크는 고정 댓글 안내</a:t>
+              <a:t>연출 노트: 원문 링크는 고정 댓글로 안내.</a:t>
             </a:r>
           </a:p>
         </p:txBody>
@@ -3917,6 +3917,180 @@
 <file path=ppt/slides/slide1.xml><?xml version="1.0" encoding="utf-8"?>
 <p:sld xmlns:a="http://schemas.openxmlformats.org/drawingml/2006/main" xmlns:p="http://schemas.openxmlformats.org/presentationml/2006/main" xmlns:r="http://schemas.openxmlformats.org/officeDocument/2006/relationships">
   <p:cSld>
+    <p:bg>
+      <p:bgPr>
+        <a:solidFill>
+          <a:srgbClr val="1B1F3B"/>
+        </a:solidFill>
+        <a:effectLst/>
+      </p:bgPr>
+    </p:bg>
+    <p:spTree>
+      <p:nvGrpSpPr>
+        <p:cNvPr id="1" name=""/>
+        <p:cNvGrpSpPr/>
+        <p:nvPr/>
+      </p:nvGrpSpPr>
+      <p:grpSpPr/>
+      <p:sp>
+        <p:nvSpPr>
+          <p:cNvPr id="2" name="TextBox 1"/>
+          <p:cNvSpPr txBox="1"/>
+          <p:nvPr/>
+        </p:nvSpPr>
+        <p:spPr>
+          <a:xfrm>
+            <a:off x="365760" y="1371600"/>
+            <a:ext cx="4828032" cy="457200"/>
+          </a:xfrm>
+          <a:prstGeom prst="rect">
+            <a:avLst/>
+          </a:prstGeom>
+          <a:noFill/>
+        </p:spPr>
+        <p:txBody>
+          <a:bodyPr wrap="square" anchor="ctr">
+            <a:spAutoFit/>
+          </a:bodyPr>
+          <a:lstStyle/>
+          <a:p>
+            <a:pPr algn="ctr"/>
+            <a:r>
+              <a:rPr sz="1400" b="1">
+                <a:solidFill>
+                  <a:srgbClr val="FF6B6B"/>
+                </a:solidFill>
+                <a:latin typeface="Arial"/>
+              </a:rPr>
+              <a:t>CLINICAL, COSMETIC AND INVESTIGATIONAL D</a:t>
+            </a:r>
+          </a:p>
+        </p:txBody>
+      </p:sp>
+      <p:sp>
+        <p:nvSpPr>
+          <p:cNvPr id="3" name="TextBox 2"/>
+          <p:cNvSpPr txBox="1"/>
+          <p:nvPr/>
+        </p:nvSpPr>
+        <p:spPr>
+          <a:xfrm>
+            <a:off x="274320" y="3108960"/>
+            <a:ext cx="5010912" cy="2011680"/>
+          </a:xfrm>
+          <a:prstGeom prst="rect">
+            <a:avLst/>
+          </a:prstGeom>
+          <a:noFill/>
+        </p:spPr>
+        <p:txBody>
+          <a:bodyPr wrap="square" anchor="ctr">
+            <a:spAutoFit/>
+          </a:bodyPr>
+          <a:lstStyle/>
+          <a:p>
+            <a:pPr algn="ctr"/>
+            <a:r>
+              <a:rPr sz="8000" b="1">
+                <a:solidFill>
+                  <a:srgbClr val="FF6B6B"/>
+                </a:solidFill>
+                <a:latin typeface="Arial"/>
+              </a:rPr>
+              <a:t>85%</a:t>
+            </a:r>
+          </a:p>
+        </p:txBody>
+      </p:sp>
+      <p:sp>
+        <p:nvSpPr>
+          <p:cNvPr id="4" name="TextBox 3"/>
+          <p:cNvSpPr txBox="1"/>
+          <p:nvPr/>
+        </p:nvSpPr>
+        <p:spPr>
+          <a:xfrm>
+            <a:off x="457200" y="5394960"/>
+            <a:ext cx="4645152" cy="1463040"/>
+          </a:xfrm>
+          <a:prstGeom prst="rect">
+            <a:avLst/>
+          </a:prstGeom>
+          <a:noFill/>
+        </p:spPr>
+        <p:txBody>
+          <a:bodyPr wrap="square" anchor="ctr">
+            <a:spAutoFit/>
+          </a:bodyPr>
+          <a:lstStyle/>
+          <a:p>
+            <a:pPr algn="ctr"/>
+            <a:r>
+              <a:rPr sz="2800" b="1">
+                <a:solidFill>
+                  <a:srgbClr val="FFFFFF"/>
+                </a:solidFill>
+                <a:latin typeface="Arial"/>
+              </a:rPr>
+              <a:t>이 숫자, 탈모 연구가 새로 내놨습니다</a:t>
+            </a:r>
+          </a:p>
+        </p:txBody>
+      </p:sp>
+      <p:sp>
+        <p:nvSpPr>
+          <p:cNvPr id="5" name="TextBox 4"/>
+          <p:cNvSpPr txBox="1"/>
+          <p:nvPr/>
+        </p:nvSpPr>
+        <p:spPr>
+          <a:xfrm>
+            <a:off x="365760" y="8778240"/>
+            <a:ext cx="4828032" cy="457200"/>
+          </a:xfrm>
+          <a:prstGeom prst="rect">
+            <a:avLst/>
+          </a:prstGeom>
+          <a:noFill/>
+        </p:spPr>
+        <p:txBody>
+          <a:bodyPr wrap="square" anchor="ctr">
+            <a:spAutoFit/>
+          </a:bodyPr>
+          <a:lstStyle/>
+          <a:p>
+            <a:pPr algn="ctr"/>
+            <a:r>
+              <a:rPr sz="1200" b="0">
+                <a:solidFill>
+                  <a:srgbClr val="AAAFCD"/>
+                </a:solidFill>
+                <a:latin typeface="Arial"/>
+              </a:rPr>
+              <a:t>2026  |  매일 아침 탈모 연구 한 편</a:t>
+            </a:r>
+          </a:p>
+        </p:txBody>
+      </p:sp>
+    </p:spTree>
+  </p:cSld>
+  <p:clrMapOvr>
+    <a:masterClrMapping/>
+  </p:clrMapOvr>
+</p:sld>
+</file>
+
+<file path=ppt/slides/slide2.xml><?xml version="1.0" encoding="utf-8"?>
+<p:sld xmlns:a="http://schemas.openxmlformats.org/drawingml/2006/main" xmlns:p="http://schemas.openxmlformats.org/presentationml/2006/main" xmlns:r="http://schemas.openxmlformats.org/officeDocument/2006/relationships">
+  <p:cSld>
+    <p:bg>
+      <p:bgPr>
+        <a:solidFill>
+          <a:srgbClr val="1B1F3B"/>
+        </a:solidFill>
+        <a:effectLst/>
+      </p:bgPr>
+    </p:bg>
     <p:spTree>
       <p:nvGrpSpPr>
         <p:cNvPr id="1" name=""/>
@@ -3926,7 +4100,7 @@
       <p:grpSpPr/>
       <p:pic>
         <p:nvPicPr>
-          <p:cNvPr id="2" name="Picture 1" descr="frame_01_hook.jpg"/>
+          <p:cNvPr id="2" name="Picture 1" descr="paper_card.png"/>
           <p:cNvPicPr>
             <a:picLocks noChangeAspect="1"/>
           </p:cNvPicPr>
@@ -3940,14 +4114,84 @@
         </p:blipFill>
         <p:spPr>
           <a:xfrm>
-            <a:off x="0" y="0"/>
-            <a:ext cx="5559552" cy="9875520"/>
+            <a:off x="502920" y="822960"/>
+            <a:ext cx="4553712" cy="8095488"/>
           </a:xfrm>
           <a:prstGeom prst="rect">
             <a:avLst/>
           </a:prstGeom>
         </p:spPr>
       </p:pic>
+      <p:sp>
+        <p:nvSpPr>
+          <p:cNvPr id="3" name="TextBox 2"/>
+          <p:cNvSpPr txBox="1"/>
+          <p:nvPr/>
+        </p:nvSpPr>
+        <p:spPr>
+          <a:xfrm>
+            <a:off x="365760" y="6766560"/>
+            <a:ext cx="4828032" cy="1828800"/>
+          </a:xfrm>
+          <a:prstGeom prst="rect">
+            <a:avLst/>
+          </a:prstGeom>
+          <a:noFill/>
+        </p:spPr>
+        <p:txBody>
+          <a:bodyPr wrap="square" anchor="ctr">
+            <a:spAutoFit/>
+          </a:bodyPr>
+          <a:lstStyle/>
+          <a:p>
+            <a:pPr algn="ctr"/>
+            <a:r>
+              <a:rPr sz="2000" b="1">
+                <a:solidFill>
+                  <a:srgbClr val="FFFFFF"/>
+                </a:solidFill>
+                <a:latin typeface="Arial"/>
+              </a:rPr>
+              <a:t>Dupilumab Combined with Topical 5% Minoxidil for Severe Alopecia Areata in a 2-Year-Old Child with Type 2 Immune Features: A Case Report</a:t>
+            </a:r>
+          </a:p>
+        </p:txBody>
+      </p:sp>
+      <p:sp>
+        <p:nvSpPr>
+          <p:cNvPr id="4" name="TextBox 3"/>
+          <p:cNvSpPr txBox="1"/>
+          <p:nvPr/>
+        </p:nvSpPr>
+        <p:spPr>
+          <a:xfrm>
+            <a:off x="365760" y="8595360"/>
+            <a:ext cx="4828032" cy="548640"/>
+          </a:xfrm>
+          <a:prstGeom prst="rect">
+            <a:avLst/>
+          </a:prstGeom>
+          <a:noFill/>
+        </p:spPr>
+        <p:txBody>
+          <a:bodyPr wrap="square" anchor="ctr">
+            <a:spAutoFit/>
+          </a:bodyPr>
+          <a:lstStyle/>
+          <a:p>
+            <a:pPr algn="ctr"/>
+            <a:r>
+              <a:rPr sz="1300" b="0">
+                <a:solidFill>
+                  <a:srgbClr val="AAAFCD"/>
+                </a:solidFill>
+                <a:latin typeface="Arial"/>
+              </a:rPr>
+              <a:t>Clinical, cosmetic and investigational dermatology  ·  2026</a:t>
+            </a:r>
+          </a:p>
+        </p:txBody>
+      </p:sp>
     </p:spTree>
   </p:cSld>
   <p:clrMapOvr>
@@ -3956,9 +4200,17 @@
 </p:sld>
 </file>
 
-<file path=ppt/slides/slide2.xml><?xml version="1.0" encoding="utf-8"?>
+<file path=ppt/slides/slide3.xml><?xml version="1.0" encoding="utf-8"?>
 <p:sld xmlns:a="http://schemas.openxmlformats.org/drawingml/2006/main" xmlns:p="http://schemas.openxmlformats.org/presentationml/2006/main" xmlns:r="http://schemas.openxmlformats.org/officeDocument/2006/relationships">
   <p:cSld>
+    <p:bg>
+      <p:bgPr>
+        <a:solidFill>
+          <a:srgbClr val="1B1F3B"/>
+        </a:solidFill>
+        <a:effectLst/>
+      </p:bgPr>
+    </p:bg>
     <p:spTree>
       <p:nvGrpSpPr>
         <p:cNvPr id="1" name=""/>
@@ -3968,7 +4220,7 @@
       <p:grpSpPr/>
       <p:pic>
         <p:nvPicPr>
-          <p:cNvPr id="2" name="Picture 1" descr="frame_02_paper_intro.jpg"/>
+          <p:cNvPr id="2" name="Picture 1" descr="topic_1.jpg"/>
           <p:cNvPicPr>
             <a:picLocks noChangeAspect="1"/>
           </p:cNvPicPr>
@@ -3982,14 +4234,93 @@
         </p:blipFill>
         <p:spPr>
           <a:xfrm>
-            <a:off x="0" y="0"/>
-            <a:ext cx="5559552" cy="9875520"/>
+            <a:off x="-3067027" y="0"/>
+            <a:ext cx="11693607" cy="9875520"/>
           </a:xfrm>
           <a:prstGeom prst="rect">
             <a:avLst/>
           </a:prstGeom>
         </p:spPr>
       </p:pic>
+      <p:sp>
+        <p:nvSpPr>
+          <p:cNvPr id="3" name="Rectangle 2"/>
+          <p:cNvSpPr/>
+          <p:nvPr/>
+        </p:nvSpPr>
+        <p:spPr>
+          <a:xfrm>
+            <a:off x="0" y="6122822"/>
+            <a:ext cx="5559552" cy="3752698"/>
+          </a:xfrm>
+          <a:prstGeom prst="rect">
+            <a:avLst/>
+          </a:prstGeom>
+          <a:solidFill>
+            <a:srgbClr val="000000"/>
+          </a:solidFill>
+          <a:ln>
+            <a:noFill/>
+          </a:ln>
+          <a:effectLst/>
+        </p:spPr>
+        <p:style>
+          <a:lnRef idx="1">
+            <a:schemeClr val="accent1"/>
+          </a:lnRef>
+          <a:fillRef idx="3">
+            <a:schemeClr val="accent1"/>
+          </a:fillRef>
+          <a:effectRef idx="2">
+            <a:schemeClr val="accent1"/>
+          </a:effectRef>
+          <a:fontRef idx="minor">
+            <a:schemeClr val="lt1"/>
+          </a:fontRef>
+        </p:style>
+        <p:txBody>
+          <a:bodyPr rtlCol="0" anchor="ctr"/>
+          <a:lstStyle/>
+          <a:p>
+            <a:pPr algn="ctr"/>
+          </a:p>
+        </p:txBody>
+      </p:sp>
+      <p:sp>
+        <p:nvSpPr>
+          <p:cNvPr id="4" name="TextBox 3"/>
+          <p:cNvSpPr txBox="1"/>
+          <p:nvPr/>
+        </p:nvSpPr>
+        <p:spPr>
+          <a:xfrm>
+            <a:off x="365760" y="6400800"/>
+            <a:ext cx="4828032" cy="2926080"/>
+          </a:xfrm>
+          <a:prstGeom prst="rect">
+            <a:avLst/>
+          </a:prstGeom>
+          <a:noFill/>
+        </p:spPr>
+        <p:txBody>
+          <a:bodyPr wrap="square" anchor="ctr">
+            <a:spAutoFit/>
+          </a:bodyPr>
+          <a:lstStyle/>
+          <a:p>
+            <a:pPr algn="ctr"/>
+            <a:r>
+              <a:rPr sz="2200" b="1">
+                <a:solidFill>
+                  <a:srgbClr val="FFFFFF"/>
+                </a:solidFill>
+                <a:latin typeface="Arial"/>
+              </a:rPr>
+              <a:t>Background: Severe alopecia areata (AA) in very young children is difficult to manage because evidence-based treatment options are limited and currently approved Janus kinase (JAK) inhibitor therapies do not cover children younger than 12 years.</a:t>
+            </a:r>
+          </a:p>
+        </p:txBody>
+      </p:sp>
     </p:spTree>
   </p:cSld>
   <p:clrMapOvr>
@@ -3998,9 +4329,17 @@
 </p:sld>
 </file>
 
-<file path=ppt/slides/slide3.xml><?xml version="1.0" encoding="utf-8"?>
+<file path=ppt/slides/slide4.xml><?xml version="1.0" encoding="utf-8"?>
 <p:sld xmlns:a="http://schemas.openxmlformats.org/drawingml/2006/main" xmlns:p="http://schemas.openxmlformats.org/presentationml/2006/main" xmlns:r="http://schemas.openxmlformats.org/officeDocument/2006/relationships">
   <p:cSld>
+    <p:bg>
+      <p:bgPr>
+        <a:solidFill>
+          <a:srgbClr val="1B1F3B"/>
+        </a:solidFill>
+        <a:effectLst/>
+      </p:bgPr>
+    </p:bg>
     <p:spTree>
       <p:nvGrpSpPr>
         <p:cNvPr id="1" name=""/>
@@ -4010,7 +4349,7 @@
       <p:grpSpPr/>
       <p:pic>
         <p:nvPicPr>
-          <p:cNvPr id="2" name="Picture 1" descr="frame_03_key_finding_1.jpg"/>
+          <p:cNvPr id="2" name="Picture 1" descr="topic_2.jpg"/>
           <p:cNvPicPr>
             <a:picLocks noChangeAspect="1"/>
           </p:cNvPicPr>
@@ -4024,14 +4363,93 @@
         </p:blipFill>
         <p:spPr>
           <a:xfrm>
-            <a:off x="0" y="0"/>
-            <a:ext cx="5559552" cy="9875520"/>
+            <a:off x="-923544" y="0"/>
+            <a:ext cx="7406640" cy="9875520"/>
           </a:xfrm>
           <a:prstGeom prst="rect">
             <a:avLst/>
           </a:prstGeom>
         </p:spPr>
       </p:pic>
+      <p:sp>
+        <p:nvSpPr>
+          <p:cNvPr id="3" name="Rectangle 2"/>
+          <p:cNvSpPr/>
+          <p:nvPr/>
+        </p:nvSpPr>
+        <p:spPr>
+          <a:xfrm>
+            <a:off x="0" y="6122822"/>
+            <a:ext cx="5559552" cy="3752698"/>
+          </a:xfrm>
+          <a:prstGeom prst="rect">
+            <a:avLst/>
+          </a:prstGeom>
+          <a:solidFill>
+            <a:srgbClr val="000000"/>
+          </a:solidFill>
+          <a:ln>
+            <a:noFill/>
+          </a:ln>
+          <a:effectLst/>
+        </p:spPr>
+        <p:style>
+          <a:lnRef idx="1">
+            <a:schemeClr val="accent1"/>
+          </a:lnRef>
+          <a:fillRef idx="3">
+            <a:schemeClr val="accent1"/>
+          </a:fillRef>
+          <a:effectRef idx="2">
+            <a:schemeClr val="accent1"/>
+          </a:effectRef>
+          <a:fontRef idx="minor">
+            <a:schemeClr val="lt1"/>
+          </a:fontRef>
+        </p:style>
+        <p:txBody>
+          <a:bodyPr rtlCol="0" anchor="ctr"/>
+          <a:lstStyle/>
+          <a:p>
+            <a:pPr algn="ctr"/>
+          </a:p>
+        </p:txBody>
+      </p:sp>
+      <p:sp>
+        <p:nvSpPr>
+          <p:cNvPr id="4" name="TextBox 3"/>
+          <p:cNvSpPr txBox="1"/>
+          <p:nvPr/>
+        </p:nvSpPr>
+        <p:spPr>
+          <a:xfrm>
+            <a:off x="365760" y="6400800"/>
+            <a:ext cx="4828032" cy="2926080"/>
+          </a:xfrm>
+          <a:prstGeom prst="rect">
+            <a:avLst/>
+          </a:prstGeom>
+          <a:noFill/>
+        </p:spPr>
+        <p:txBody>
+          <a:bodyPr wrap="square" anchor="ctr">
+            <a:spAutoFit/>
+          </a:bodyPr>
+          <a:lstStyle/>
+          <a:p>
+            <a:pPr algn="ctr"/>
+            <a:r>
+              <a:rPr sz="2200" b="1">
+                <a:solidFill>
+                  <a:srgbClr val="FFFFFF"/>
+                </a:solidFill>
+                <a:latin typeface="Arial"/>
+              </a:rPr>
+              <a:t>Case presentation: A 2-year-and-5-month-old girl with a 2-year history of progressive scalp hair loss presented with severe diffuse AA (Severity of Alopecia Tool [SALT] score, 85%).</a:t>
+            </a:r>
+          </a:p>
+        </p:txBody>
+      </p:sp>
     </p:spTree>
   </p:cSld>
   <p:clrMapOvr>
@@ -4040,9 +4458,17 @@
 </p:sld>
 </file>
 
-<file path=ppt/slides/slide4.xml><?xml version="1.0" encoding="utf-8"?>
+<file path=ppt/slides/slide5.xml><?xml version="1.0" encoding="utf-8"?>
 <p:sld xmlns:a="http://schemas.openxmlformats.org/drawingml/2006/main" xmlns:p="http://schemas.openxmlformats.org/presentationml/2006/main" xmlns:r="http://schemas.openxmlformats.org/officeDocument/2006/relationships">
   <p:cSld>
+    <p:bg>
+      <p:bgPr>
+        <a:solidFill>
+          <a:srgbClr val="1B1F3B"/>
+        </a:solidFill>
+        <a:effectLst/>
+      </p:bgPr>
+    </p:bg>
     <p:spTree>
       <p:nvGrpSpPr>
         <p:cNvPr id="1" name=""/>
@@ -4052,7 +4478,7 @@
       <p:grpSpPr/>
       <p:pic>
         <p:nvPicPr>
-          <p:cNvPr id="2" name="Picture 1" descr="frame_04_key_finding_2.jpg"/>
+          <p:cNvPr id="2" name="Picture 1" descr="latest.jpg"/>
           <p:cNvPicPr>
             <a:picLocks noChangeAspect="1"/>
           </p:cNvPicPr>
@@ -4066,56 +4492,93 @@
         </p:blipFill>
         <p:spPr>
           <a:xfrm>
-            <a:off x="0" y="0"/>
-            <a:ext cx="5559552" cy="9875520"/>
+            <a:off x="0" y="-4064"/>
+            <a:ext cx="5559552" cy="9883648"/>
           </a:xfrm>
           <a:prstGeom prst="rect">
             <a:avLst/>
           </a:prstGeom>
         </p:spPr>
       </p:pic>
-    </p:spTree>
-  </p:cSld>
-  <p:clrMapOvr>
-    <a:masterClrMapping/>
-  </p:clrMapOvr>
-</p:sld>
-</file>
-
-<file path=ppt/slides/slide5.xml><?xml version="1.0" encoding="utf-8"?>
-<p:sld xmlns:a="http://schemas.openxmlformats.org/drawingml/2006/main" xmlns:p="http://schemas.openxmlformats.org/presentationml/2006/main" xmlns:r="http://schemas.openxmlformats.org/officeDocument/2006/relationships">
-  <p:cSld>
-    <p:spTree>
-      <p:nvGrpSpPr>
-        <p:cNvPr id="1" name=""/>
-        <p:cNvGrpSpPr/>
-        <p:nvPr/>
-      </p:nvGrpSpPr>
-      <p:grpSpPr/>
-      <p:pic>
-        <p:nvPicPr>
-          <p:cNvPr id="2" name="Picture 1" descr="frame_05_my_take.jpg"/>
-          <p:cNvPicPr>
-            <a:picLocks noChangeAspect="1"/>
-          </p:cNvPicPr>
+      <p:sp>
+        <p:nvSpPr>
+          <p:cNvPr id="3" name="Rectangle 2"/>
+          <p:cNvSpPr/>
           <p:nvPr/>
-        </p:nvPicPr>
-        <p:blipFill>
-          <a:blip r:embed="rId2"/>
-          <a:stretch>
-            <a:fillRect/>
-          </a:stretch>
-        </p:blipFill>
+        </p:nvSpPr>
         <p:spPr>
           <a:xfrm>
-            <a:off x="0" y="0"/>
-            <a:ext cx="5559552" cy="9875520"/>
+            <a:off x="0" y="6122822"/>
+            <a:ext cx="5559552" cy="3752698"/>
           </a:xfrm>
           <a:prstGeom prst="rect">
             <a:avLst/>
           </a:prstGeom>
+          <a:solidFill>
+            <a:srgbClr val="000000"/>
+          </a:solidFill>
+          <a:ln>
+            <a:noFill/>
+          </a:ln>
+          <a:effectLst/>
         </p:spPr>
-      </p:pic>
+        <p:style>
+          <a:lnRef idx="1">
+            <a:schemeClr val="accent1"/>
+          </a:lnRef>
+          <a:fillRef idx="3">
+            <a:schemeClr val="accent1"/>
+          </a:fillRef>
+          <a:effectRef idx="2">
+            <a:schemeClr val="accent1"/>
+          </a:effectRef>
+          <a:fontRef idx="minor">
+            <a:schemeClr val="lt1"/>
+          </a:fontRef>
+        </p:style>
+        <p:txBody>
+          <a:bodyPr rtlCol="0" anchor="ctr"/>
+          <a:lstStyle/>
+          <a:p>
+            <a:pPr algn="ctr"/>
+          </a:p>
+        </p:txBody>
+      </p:sp>
+      <p:sp>
+        <p:nvSpPr>
+          <p:cNvPr id="4" name="TextBox 3"/>
+          <p:cNvSpPr txBox="1"/>
+          <p:nvPr/>
+        </p:nvSpPr>
+        <p:spPr>
+          <a:xfrm>
+            <a:off x="365760" y="6400800"/>
+            <a:ext cx="4828032" cy="2926080"/>
+          </a:xfrm>
+          <a:prstGeom prst="rect">
+            <a:avLst/>
+          </a:prstGeom>
+          <a:noFill/>
+        </p:spPr>
+        <p:txBody>
+          <a:bodyPr wrap="square" anchor="ctr">
+            <a:spAutoFit/>
+          </a:bodyPr>
+          <a:lstStyle/>
+          <a:p>
+            <a:pPr algn="ctr"/>
+            <a:r>
+              <a:rPr sz="2200" b="1">
+                <a:solidFill>
+                  <a:srgbClr val="FFFFFF"/>
+                </a:solidFill>
+                <a:latin typeface="Arial"/>
+              </a:rPr>
+              <a:t>탈모 연구, 매일 쉽게 정리해드립니다 🙂</a:t>
+            </a:r>
+          </a:p>
+        </p:txBody>
+      </p:sp>
     </p:spTree>
   </p:cSld>
   <p:clrMapOvr>
@@ -4127,6 +4590,14 @@
 <file path=ppt/slides/slide6.xml><?xml version="1.0" encoding="utf-8"?>
 <p:sld xmlns:a="http://schemas.openxmlformats.org/drawingml/2006/main" xmlns:p="http://schemas.openxmlformats.org/presentationml/2006/main" xmlns:r="http://schemas.openxmlformats.org/officeDocument/2006/relationships">
   <p:cSld>
+    <p:bg>
+      <p:bgPr>
+        <a:solidFill>
+          <a:srgbClr val="1B1F3B"/>
+        </a:solidFill>
+        <a:effectLst/>
+      </p:bgPr>
+    </p:bg>
     <p:spTree>
       <p:nvGrpSpPr>
         <p:cNvPr id="1" name=""/>
@@ -4134,30 +4605,41 @@
         <p:nvPr/>
       </p:nvGrpSpPr>
       <p:grpSpPr/>
-      <p:pic>
-        <p:nvPicPr>
-          <p:cNvPr id="2" name="Picture 1" descr="frame_06_cta.jpg"/>
-          <p:cNvPicPr>
-            <a:picLocks noChangeAspect="1"/>
-          </p:cNvPicPr>
+      <p:sp>
+        <p:nvSpPr>
+          <p:cNvPr id="2" name="TextBox 1"/>
+          <p:cNvSpPr txBox="1"/>
           <p:nvPr/>
-        </p:nvPicPr>
-        <p:blipFill>
-          <a:blip r:embed="rId2"/>
-          <a:stretch>
-            <a:fillRect/>
-          </a:stretch>
-        </p:blipFill>
+        </p:nvSpPr>
         <p:spPr>
           <a:xfrm>
-            <a:off x="0" y="0"/>
-            <a:ext cx="5559552" cy="9875520"/>
+            <a:off x="457200" y="3474720"/>
+            <a:ext cx="4645152" cy="2743200"/>
           </a:xfrm>
           <a:prstGeom prst="rect">
             <a:avLst/>
           </a:prstGeom>
+          <a:noFill/>
         </p:spPr>
-      </p:pic>
+        <p:txBody>
+          <a:bodyPr wrap="square" anchor="ctr">
+            <a:spAutoFit/>
+          </a:bodyPr>
+          <a:lstStyle/>
+          <a:p>
+            <a:pPr algn="ctr"/>
+            <a:r>
+              <a:rPr sz="3400" b="1">
+                <a:solidFill>
+                  <a:srgbClr val="FFFFFF"/>
+                </a:solidFill>
+                <a:latin typeface="Arial"/>
+              </a:rPr>
+              <a:t>더 자세한 내용은 원문 링크에서 확인하세요. 매일 새로운 탈모 연구, 팔로우하고 놓치지 마세요!</a:t>
+            </a:r>
+          </a:p>
+        </p:txBody>
+      </p:sp>
     </p:spTree>
   </p:cSld>
   <p:clrMapOvr>
@@ -4169,6 +4651,14 @@
 <file path=ppt/slides/slide7.xml><?xml version="1.0" encoding="utf-8"?>
 <p:sld xmlns:a="http://schemas.openxmlformats.org/drawingml/2006/main" xmlns:p="http://schemas.openxmlformats.org/presentationml/2006/main" xmlns:r="http://schemas.openxmlformats.org/officeDocument/2006/relationships">
   <p:cSld>
+    <p:bg>
+      <p:bgPr>
+        <a:solidFill>
+          <a:srgbClr val="12142A"/>
+        </a:solidFill>
+        <a:effectLst/>
+      </p:bgPr>
+    </p:bg>
     <p:spTree>
       <p:nvGrpSpPr>
         <p:cNvPr id="1" name=""/>
@@ -4184,8 +4674,8 @@
         </p:nvSpPr>
         <p:spPr>
           <a:xfrm>
-            <a:off x="365760" y="365760"/>
-            <a:ext cx="4828032" cy="3657600"/>
+            <a:off x="365760" y="731520"/>
+            <a:ext cx="4828032" cy="548640"/>
           </a:xfrm>
           <a:prstGeom prst="rect">
             <a:avLst/>
@@ -4193,23 +4683,67 @@
           <a:noFill/>
         </p:spPr>
         <p:txBody>
-          <a:bodyPr wrap="square">
+          <a:bodyPr wrap="square" anchor="ctr">
             <a:spAutoFit/>
           </a:bodyPr>
           <a:lstStyle/>
           <a:p>
-            <a:r>
-              <a:t>참고 자료 출처</a:t>
-            </a:r>
-          </a:p>
-          <a:p>
-            <a:r>
-              <a:t>Canine Flank Alopecia: A Narrative Review of Clinical Presentation, Genetic Basis, and Therapeutic Management</a:t>
-            </a:r>
-          </a:p>
-          <a:p>
-            <a:r>
-              <a:t>https://pubmed.ncbi.nlm.nih.gov/42722190/</a:t>
+            <a:pPr algn="ctr"/>
+            <a:r>
+              <a:rPr sz="2200" b="1">
+                <a:solidFill>
+                  <a:srgbClr val="FF6B6B"/>
+                </a:solidFill>
+                <a:latin typeface="Arial"/>
+              </a:rPr>
+              <a:t>출처</a:t>
+            </a:r>
+          </a:p>
+        </p:txBody>
+      </p:sp>
+      <p:sp>
+        <p:nvSpPr>
+          <p:cNvPr id="3" name="TextBox 2"/>
+          <p:cNvSpPr txBox="1"/>
+          <p:nvPr/>
+        </p:nvSpPr>
+        <p:spPr>
+          <a:xfrm>
+            <a:off x="365760" y="1463040"/>
+            <a:ext cx="4828032" cy="7680960"/>
+          </a:xfrm>
+          <a:prstGeom prst="rect">
+            <a:avLst/>
+          </a:prstGeom>
+          <a:noFill/>
+        </p:spPr>
+        <p:txBody>
+          <a:bodyPr wrap="square" anchor="t">
+            <a:spAutoFit/>
+          </a:bodyPr>
+          <a:lstStyle/>
+          <a:p>
+            <a:pPr algn="l"/>
+            <a:r>
+              <a:rPr sz="1000" b="0">
+                <a:solidFill>
+                  <a:srgbClr val="D5D8EA"/>
+                </a:solidFill>
+                <a:latin typeface="Arial"/>
+              </a:rPr>
+              <a:t>[출처]
+논문: Dupilumab Combined with Topical 5% Minoxidil for Severe Alopecia Areata in a 2-Year-Old Child with Type 2 Immune Features: A Case Report
+게재: Clinical, cosmetic and investigational dermatology
+원문: https://pubmed.ncbi.nlm.nih.gov/42719841/
+[이미지 출처]
+- Male pattern baldness.jpg / Originally uploaded by Lkinkade (Transferred by XenonX3) / CC BY-SA 2.5
+  https://commons.wikimedia.org/wiki/File:Male_pattern_baldness.jpg
+- Male-pattern hair loss.jpg / BlaiserPascal / CC BY-SA 4.0
+  https://commons.wikimedia.org/wiki/File:Male-pattern_hair_loss.jpg
+※ CC BY-SA 이미지가 포함되어 있습니다. 저작자 표시가 필수이며,
+  동일조건변경허락(ShareAlike) 조항이 영상 전체에 적용될 수 있으니
+  상업적 이용 시 해당 이미지를 교체하는 편이 안전합니다.
+</a:t>
             </a:r>
           </a:p>
         </p:txBody>

--- a/pwa/data/latest/slides.pptx
+++ b/pwa/data/latest/slides.pptx
@@ -12,6 +12,7 @@
     <p:sldId id="260" r:id="rId12"/>
     <p:sldId id="261" r:id="rId13"/>
     <p:sldId id="262" r:id="rId14"/>
+    <p:sldId id="263" r:id="rId15"/>
   </p:sldIdLst>
   <p:sldSz cx="5559552" cy="9875520" type="screen4x3"/>
   <p:notesSz cx="6858000" cy="9144000"/>
@@ -513,7 +514,7 @@
           </a:p>
           <a:p>
             <a:r>
-              <a:t>대본: 85% 이 숫자, 탈모 연구가 새로 내놨습니다</a:t>
+              <a:t>대본: 오늘의 논문 Indian journal of dermatology에 실린 새 연구입니다</a:t>
             </a:r>
           </a:p>
           <a:p>
@@ -593,7 +594,7 @@
           </a:p>
           <a:p>
             <a:r>
-              <a:t>대본: 《Clinical, cosmetic and investigational dermatology》 - Dupilumab Combined with Topical 5% Minoxidil for Severe Alopecia Areata in a 2-Year-Old Child with Type 2 Immune Features: A Case Report</a:t>
+              <a:t>대본: 《Indian journal of dermatology》 - 'Cutting Through the Roots': A Critical Appraisal of Transverse and Vertical Sectioning Techniques of Scalp Biopsy for Primary Alopecia</a:t>
             </a:r>
           </a:p>
           <a:p>
@@ -673,7 +674,7 @@
           </a:p>
           <a:p>
             <a:r>
-              <a:t>대본: Background: Severe alopecia areata (AA) in very young children is difficult to manage because evidence-based treatment options are limited and currently approved Janus kinase (JAK) inhibitor therapies do not cover children younger than 12 years.</a:t>
+              <a:t>대본: Alopecia, a prevalent and distressing condition with diverse aetiologies, encompasses both scarring and non-scarring types and necessitates accurate diagnostic approaches for effective management.</a:t>
             </a:r>
           </a:p>
           <a:p>
@@ -748,17 +749,17 @@
           <a:lstStyle/>
           <a:p>
             <a:r>
-              <a:t>[key_finding_2] 약 10초</a:t>
-            </a:r>
-          </a:p>
-          <a:p>
-            <a:r>
-              <a:t>대본: Case presentation: A 2-year-and-5-month-old girl with a 2-year history of progressive scalp hair loss presented with severe diffuse AA (Severity of Alopecia Tool [SALT] score, 85%).</a:t>
-            </a:r>
-          </a:p>
-          <a:p>
-            <a:r>
-              <a:t>연출 노트: 핵심 포인트 2.</a:t>
+              <a:t>[paper_table] 약 8초</a:t>
+            </a:r>
+          </a:p>
+          <a:p>
+            <a:r>
+              <a:t>대본: 표로 보면 이렇습니다. Common primary alopecia subtypes and their key histological features[12345]</a:t>
+            </a:r>
+          </a:p>
+          <a:p>
+            <a:r>
+              <a:t>연출 노트: 핵심 숫자 한 칸만 짚어준다. 표는 셀을 직접 수정할 수 있다.</a:t>
             </a:r>
           </a:p>
         </p:txBody>
@@ -828,17 +829,17 @@
           <a:lstStyle/>
           <a:p>
             <a:r>
-              <a:t>[my_take] 약 10초</a:t>
-            </a:r>
-          </a:p>
-          <a:p>
-            <a:r>
-              <a:t>대본: 탈모 연구, 매일 쉽게 정리해드립니다 🙂</a:t>
-            </a:r>
-          </a:p>
-          <a:p>
-            <a:r>
-              <a:t>연출 노트: 본인 사진 + 코멘트. 문구를 직접 바꿔 쓰세요.</a:t>
+              <a:t>[key_finding_2] 약 10초</a:t>
+            </a:r>
+          </a:p>
+          <a:p>
+            <a:r>
+              <a:t>대본: Apart from optimal biopsy site selection based on clinical suspicion, such as active borders for scarring alopecias and lesion borders for non-scarring alopecias, choice of appropriate method for grossing of alopecic scalp biopsies also forms a key step.</a:t>
+            </a:r>
+          </a:p>
+          <a:p>
+            <a:r>
+              <a:t>연출 노트: 핵심 포인트 2.</a:t>
             </a:r>
           </a:p>
         </p:txBody>
@@ -864,6 +865,86 @@
 </file>
 
 <file path=ppt/notesSlides/notesSlide6.xml><?xml version="1.0" encoding="utf-8"?>
+<p:notes xmlns:a="http://schemas.openxmlformats.org/drawingml/2006/main" xmlns:p="http://schemas.openxmlformats.org/presentationml/2006/main" xmlns:r="http://schemas.openxmlformats.org/officeDocument/2006/relationships">
+  <p:cSld>
+    <p:spTree>
+      <p:nvGrpSpPr>
+        <p:cNvPr id="1" name=""/>
+        <p:cNvGrpSpPr/>
+        <p:nvPr/>
+      </p:nvGrpSpPr>
+      <p:grpSpPr>
+        <a:xfrm>
+          <a:off x="0" y="0"/>
+          <a:ext cx="0" cy="0"/>
+          <a:chOff x="0" y="0"/>
+          <a:chExt cx="0" cy="0"/>
+        </a:xfrm>
+      </p:grpSpPr>
+      <p:sp>
+        <p:nvSpPr>
+          <p:cNvPr id="2" name="Slide Image Placeholder 1"/>
+          <p:cNvSpPr>
+            <a:spLocks noGrp="1"/>
+          </p:cNvSpPr>
+          <p:nvPr>
+            <p:ph type="sldImg" idx="2"/>
+          </p:nvPr>
+        </p:nvSpPr>
+        <p:spPr/>
+      </p:sp>
+      <p:sp>
+        <p:nvSpPr>
+          <p:cNvPr id="3" name="Notes Placeholder 2"/>
+          <p:cNvSpPr>
+            <a:spLocks noGrp="1"/>
+          </p:cNvSpPr>
+          <p:nvPr>
+            <p:ph type="body" idx="3" sz="quarter"/>
+          </p:nvPr>
+        </p:nvSpPr>
+        <p:spPr/>
+        <p:txBody>
+          <a:bodyPr/>
+          <a:lstStyle/>
+          <a:p>
+            <a:r>
+              <a:t>[my_take] 약 10초</a:t>
+            </a:r>
+          </a:p>
+          <a:p>
+            <a:r>
+              <a:t>대본: 탈모 연구, 매일 쉽게 정리해드립니다 🙂</a:t>
+            </a:r>
+          </a:p>
+          <a:p>
+            <a:r>
+              <a:t>연출 노트: 본인 사진 + 코멘트. 문구를 직접 바꿔 쓰세요.</a:t>
+            </a:r>
+          </a:p>
+        </p:txBody>
+      </p:sp>
+      <p:sp>
+        <p:nvSpPr>
+          <p:cNvPr id="4" name="Slide Number Placeholder 3"/>
+          <p:cNvSpPr>
+            <a:spLocks noGrp="1"/>
+          </p:cNvSpPr>
+          <p:nvPr>
+            <p:ph type="sldNum" idx="5" sz="quarter"/>
+          </p:nvPr>
+        </p:nvSpPr>
+        <p:spPr/>
+      </p:sp>
+    </p:spTree>
+  </p:cSld>
+  <p:clrMapOvr>
+    <a:masterClrMapping/>
+  </p:clrMapOvr>
+</p:notes>
+</file>
+
+<file path=ppt/notesSlides/notesSlide7.xml><?xml version="1.0" encoding="utf-8"?>
 <p:notes xmlns:a="http://schemas.openxmlformats.org/drawingml/2006/main" xmlns:p="http://schemas.openxmlformats.org/presentationml/2006/main" xmlns:r="http://schemas.openxmlformats.org/officeDocument/2006/relationships">
   <p:cSld>
     <p:spTree>
@@ -3962,7 +4043,7 @@
                 </a:solidFill>
                 <a:latin typeface="Arial"/>
               </a:rPr>
-              <a:t>CLINICAL, COSMETIC AND INVESTIGATIONAL D</a:t>
+              <a:t>INDIAN JOURNAL OF DERMATOLOGY</a:t>
             </a:r>
           </a:p>
         </p:txBody>
@@ -3997,7 +4078,7 @@
                 </a:solidFill>
                 <a:latin typeface="Arial"/>
               </a:rPr>
-              <a:t>85%</a:t>
+              <a:t>오늘의 논문</a:t>
             </a:r>
           </a:p>
         </p:txBody>
@@ -4032,7 +4113,7 @@
                 </a:solidFill>
                 <a:latin typeface="Arial"/>
               </a:rPr>
-              <a:t>이 숫자, 탈모 연구가 새로 내놨습니다</a:t>
+              <a:t>Indian journal of dermatology에 실린 새 연구입니다</a:t>
             </a:r>
           </a:p>
         </p:txBody>
@@ -4067,7 +4148,7 @@
                 </a:solidFill>
                 <a:latin typeface="Arial"/>
               </a:rPr>
-              <a:t>2026  |  매일 아침 탈모 연구 한 편</a:t>
+              <a:t>2026 Sep-Oct  |  매일 아침 탈모 연구 한 편</a:t>
             </a:r>
           </a:p>
         </p:txBody>
@@ -4152,7 +4233,7 @@
                 </a:solidFill>
                 <a:latin typeface="Arial"/>
               </a:rPr>
-              <a:t>Dupilumab Combined with Topical 5% Minoxidil for Severe Alopecia Areata in a 2-Year-Old Child with Type 2 Immune Features: A Case Report</a:t>
+              <a:t>'Cutting Through the Roots': A Critical Appraisal of Transverse and Vertical Sectioning Techniques of Scalp Biopsy for Primary Alopecia</a:t>
             </a:r>
           </a:p>
         </p:txBody>
@@ -4187,7 +4268,7 @@
                 </a:solidFill>
                 <a:latin typeface="Arial"/>
               </a:rPr>
-              <a:t>Clinical, cosmetic and investigational dermatology  ·  2026</a:t>
+              <a:t>Indian journal of dermatology  ·  2026 Sep-Oct</a:t>
             </a:r>
           </a:p>
         </p:txBody>
@@ -4316,7 +4397,7 @@
                 </a:solidFill>
                 <a:latin typeface="Arial"/>
               </a:rPr>
-              <a:t>Background: Severe alopecia areata (AA) in very young children is difficult to manage because evidence-based treatment options are limited and currently approved Janus kinase (JAK) inhibitor therapies do not cover children younger than 12 years.</a:t>
+              <a:t>Alopecia, a prevalent and distressing condition with diverse aetiologies, encompasses both scarring and non-scarring types and necessitates accurate diagnostic approaches for effective management.</a:t>
             </a:r>
           </a:p>
         </p:txBody>
@@ -4330,6 +4411,470 @@
 </file>
 
 <file path=ppt/slides/slide4.xml><?xml version="1.0" encoding="utf-8"?>
+<p:sld xmlns:a="http://schemas.openxmlformats.org/drawingml/2006/main" xmlns:p="http://schemas.openxmlformats.org/presentationml/2006/main" xmlns:r="http://schemas.openxmlformats.org/officeDocument/2006/relationships">
+  <p:cSld>
+    <p:bg>
+      <p:bgPr>
+        <a:solidFill>
+          <a:srgbClr val="12142A"/>
+        </a:solidFill>
+        <a:effectLst/>
+      </p:bgPr>
+    </p:bg>
+    <p:spTree>
+      <p:nvGrpSpPr>
+        <p:cNvPr id="1" name=""/>
+        <p:cNvGrpSpPr/>
+        <p:nvPr/>
+      </p:nvGrpSpPr>
+      <p:grpSpPr/>
+      <p:sp>
+        <p:nvSpPr>
+          <p:cNvPr id="2" name="TextBox 1"/>
+          <p:cNvSpPr txBox="1"/>
+          <p:nvPr/>
+        </p:nvSpPr>
+        <p:spPr>
+          <a:xfrm>
+            <a:off x="365760" y="1097280"/>
+            <a:ext cx="4828032" cy="548640"/>
+          </a:xfrm>
+          <a:prstGeom prst="rect">
+            <a:avLst/>
+          </a:prstGeom>
+          <a:noFill/>
+        </p:spPr>
+        <p:txBody>
+          <a:bodyPr wrap="square" anchor="ctr">
+            <a:spAutoFit/>
+          </a:bodyPr>
+          <a:lstStyle/>
+          <a:p>
+            <a:pPr algn="ctr"/>
+            <a:r>
+              <a:rPr sz="2000" b="1">
+                <a:solidFill>
+                  <a:srgbClr val="FF6B6B"/>
+                </a:solidFill>
+                <a:latin typeface="Arial"/>
+              </a:rPr>
+              <a:t>논문 Table 1</a:t>
+            </a:r>
+          </a:p>
+        </p:txBody>
+      </p:sp>
+      <p:sp>
+        <p:nvSpPr>
+          <p:cNvPr id="3" name="TextBox 2"/>
+          <p:cNvSpPr txBox="1"/>
+          <p:nvPr/>
+        </p:nvSpPr>
+        <p:spPr>
+          <a:xfrm>
+            <a:off x="365760" y="1737360"/>
+            <a:ext cx="4828032" cy="914400"/>
+          </a:xfrm>
+          <a:prstGeom prst="rect">
+            <a:avLst/>
+          </a:prstGeom>
+          <a:noFill/>
+        </p:spPr>
+        <p:txBody>
+          <a:bodyPr wrap="square" anchor="ctr">
+            <a:spAutoFit/>
+          </a:bodyPr>
+          <a:lstStyle/>
+          <a:p>
+            <a:pPr algn="ctr"/>
+            <a:r>
+              <a:rPr sz="1300" b="0">
+                <a:solidFill>
+                  <a:srgbClr val="AAAFCD"/>
+                </a:solidFill>
+                <a:latin typeface="Arial"/>
+              </a:rPr>
+              <a:t>Common primary alopecia subtypes and their key histological features[12345]</a:t>
+            </a:r>
+          </a:p>
+        </p:txBody>
+      </p:sp>
+      <p:graphicFrame>
+        <p:nvGraphicFramePr>
+          <p:cNvPr id="4" name="Table 3"/>
+          <p:cNvGraphicFramePr>
+            <a:graphicFrameLocks noGrp="1"/>
+          </p:cNvGraphicFramePr>
+          <p:nvPr/>
+        </p:nvGraphicFramePr>
+        <p:xfrm>
+          <a:off x="320040" y="2926080"/>
+          <a:ext cx="4919472" cy="3520440"/>
+        </p:xfrm>
+        <a:graphic>
+          <a:graphicData uri="http://schemas.openxmlformats.org/drawingml/2006/table">
+            <a:tbl>
+              <a:tblPr firstRow="1" bandRow="1">
+                <a:tableStyleId>{5C22544A-7EE6-4342-B048-85BDC9FD1C3A}</a:tableStyleId>
+              </a:tblPr>
+              <a:tblGrid>
+                <a:gridCol w="1639824"/>
+                <a:gridCol w="1639824"/>
+                <a:gridCol w="1639824"/>
+              </a:tblGrid>
+              <a:tr h="502920">
+                <a:tc>
+                  <a:txBody>
+                    <a:bodyPr/>
+                    <a:lstStyle/>
+                    <a:p>
+                      <a:pPr>
+                        <a:defRPr sz="1200" b="1">
+                          <a:latin typeface="Arial"/>
+                        </a:defRPr>
+                      </a:pPr>
+                      <a:r>
+                        <a:t>Broad category</a:t>
+                      </a:r>
+                    </a:p>
+                  </a:txBody>
+                  <a:tcPr/>
+                </a:tc>
+                <a:tc>
+                  <a:txBody>
+                    <a:bodyPr/>
+                    <a:lstStyle/>
+                    <a:p>
+                      <a:pPr>
+                        <a:defRPr sz="1200" b="1">
+                          <a:latin typeface="Arial"/>
+                        </a:defRPr>
+                      </a:pPr>
+                      <a:r>
+                        <a:t>Disease entity</a:t>
+                      </a:r>
+                    </a:p>
+                  </a:txBody>
+                  <a:tcPr/>
+                </a:tc>
+                <a:tc>
+                  <a:txBody>
+                    <a:bodyPr/>
+                    <a:lstStyle/>
+                    <a:p>
+                      <a:pPr>
+                        <a:defRPr sz="1200" b="1">
+                          <a:latin typeface="Arial"/>
+                        </a:defRPr>
+                      </a:pPr>
+                      <a:r>
+                        <a:t>Key histopathological findings</a:t>
+                      </a:r>
+                    </a:p>
+                  </a:txBody>
+                  <a:tcPr/>
+                </a:tc>
+              </a:tr>
+              <a:tr h="502920">
+                <a:tc>
+                  <a:txBody>
+                    <a:bodyPr/>
+                    <a:lstStyle/>
+                    <a:p>
+                      <a:pPr>
+                        <a:defRPr sz="1100" b="0">
+                          <a:latin typeface="Arial"/>
+                        </a:defRPr>
+                      </a:pPr>
+                    </a:p>
+                  </a:txBody>
+                  <a:tcPr/>
+                </a:tc>
+                <a:tc>
+                  <a:txBody>
+                    <a:bodyPr/>
+                    <a:lstStyle/>
+                    <a:p>
+                      <a:pPr>
+                        <a:defRPr sz="1100" b="0">
+                          <a:latin typeface="Arial"/>
+                        </a:defRPr>
+                      </a:pPr>
+                      <a:r>
+                        <a:t>Cutaneous/Discoid lupus erythematosus</a:t>
+                      </a:r>
+                    </a:p>
+                  </a:txBody>
+                  <a:tcPr/>
+                </a:tc>
+                <a:tc>
+                  <a:txBody>
+                    <a:bodyPr/>
+                    <a:lstStyle/>
+                    <a:p>
+                      <a:pPr>
+                        <a:defRPr sz="1100" b="0">
+                          <a:latin typeface="Arial"/>
+                        </a:defRPr>
+                      </a:pPr>
+                      <a:r>
+                        <a:t>• Follicular plugging</a:t>
+                      </a:r>
+                    </a:p>
+                  </a:txBody>
+                  <a:tcPr/>
+                </a:tc>
+              </a:tr>
+              <a:tr h="502920">
+                <a:tc>
+                  <a:txBody>
+                    <a:bodyPr/>
+                    <a:lstStyle/>
+                    <a:p>
+                      <a:pPr>
+                        <a:defRPr sz="1100" b="0">
+                          <a:latin typeface="Arial"/>
+                        </a:defRPr>
+                      </a:pPr>
+                      <a:r>
+                        <a:t>Scarring (cicatricial) alopecia</a:t>
+                      </a:r>
+                    </a:p>
+                  </a:txBody>
+                  <a:tcPr/>
+                </a:tc>
+                <a:tc>
+                  <a:txBody>
+                    <a:bodyPr/>
+                    <a:lstStyle/>
+                    <a:p>
+                      <a:pPr>
+                        <a:defRPr sz="1100" b="0">
+                          <a:latin typeface="Arial"/>
+                        </a:defRPr>
+                      </a:pPr>
+                    </a:p>
+                  </a:txBody>
+                  <a:tcPr/>
+                </a:tc>
+                <a:tc>
+                  <a:txBody>
+                    <a:bodyPr/>
+                    <a:lstStyle/>
+                    <a:p>
+                      <a:pPr>
+                        <a:defRPr sz="1100" b="0">
+                          <a:latin typeface="Arial"/>
+                        </a:defRPr>
+                      </a:pPr>
+                      <a:r>
+                        <a:t>• Vacuolar degeneration of the basal lay</a:t>
+                      </a:r>
+                    </a:p>
+                  </a:txBody>
+                  <a:tcPr/>
+                </a:tc>
+              </a:tr>
+              <a:tr h="502920">
+                <a:tc>
+                  <a:txBody>
+                    <a:bodyPr/>
+                    <a:lstStyle/>
+                    <a:p>
+                      <a:pPr>
+                        <a:defRPr sz="1100" b="0">
+                          <a:latin typeface="Arial"/>
+                        </a:defRPr>
+                      </a:pPr>
+                    </a:p>
+                  </a:txBody>
+                  <a:tcPr/>
+                </a:tc>
+                <a:tc>
+                  <a:txBody>
+                    <a:bodyPr/>
+                    <a:lstStyle/>
+                    <a:p>
+                      <a:pPr>
+                        <a:defRPr sz="1100" b="0">
+                          <a:latin typeface="Arial"/>
+                        </a:defRPr>
+                      </a:pPr>
+                    </a:p>
+                  </a:txBody>
+                  <a:tcPr/>
+                </a:tc>
+                <a:tc>
+                  <a:txBody>
+                    <a:bodyPr/>
+                    <a:lstStyle/>
+                    <a:p>
+                      <a:pPr>
+                        <a:defRPr sz="1100" b="0">
+                          <a:latin typeface="Arial"/>
+                        </a:defRPr>
+                      </a:pPr>
+                      <a:r>
+                        <a:t>• Thickened basement membrane of the epi</a:t>
+                      </a:r>
+                    </a:p>
+                  </a:txBody>
+                  <a:tcPr/>
+                </a:tc>
+              </a:tr>
+              <a:tr h="502920">
+                <a:tc>
+                  <a:txBody>
+                    <a:bodyPr/>
+                    <a:lstStyle/>
+                    <a:p>
+                      <a:pPr>
+                        <a:defRPr sz="1100" b="0">
+                          <a:latin typeface="Arial"/>
+                        </a:defRPr>
+                      </a:pPr>
+                    </a:p>
+                  </a:txBody>
+                  <a:tcPr/>
+                </a:tc>
+                <a:tc>
+                  <a:txBody>
+                    <a:bodyPr/>
+                    <a:lstStyle/>
+                    <a:p>
+                      <a:pPr>
+                        <a:defRPr sz="1100" b="0">
+                          <a:latin typeface="Arial"/>
+                        </a:defRPr>
+                      </a:pPr>
+                    </a:p>
+                  </a:txBody>
+                  <a:tcPr/>
+                </a:tc>
+                <a:tc>
+                  <a:txBody>
+                    <a:bodyPr/>
+                    <a:lstStyle/>
+                    <a:p>
+                      <a:pPr>
+                        <a:defRPr sz="1100" b="0">
+                          <a:latin typeface="Arial"/>
+                        </a:defRPr>
+                      </a:pPr>
+                      <a:r>
+                        <a:t>• Apoptotic keratinocytes</a:t>
+                      </a:r>
+                    </a:p>
+                  </a:txBody>
+                  <a:tcPr/>
+                </a:tc>
+              </a:tr>
+              <a:tr h="502920">
+                <a:tc>
+                  <a:txBody>
+                    <a:bodyPr/>
+                    <a:lstStyle/>
+                    <a:p>
+                      <a:pPr>
+                        <a:defRPr sz="1100" b="0">
+                          <a:latin typeface="Arial"/>
+                        </a:defRPr>
+                      </a:pPr>
+                    </a:p>
+                  </a:txBody>
+                  <a:tcPr/>
+                </a:tc>
+                <a:tc>
+                  <a:txBody>
+                    <a:bodyPr/>
+                    <a:lstStyle/>
+                    <a:p>
+                      <a:pPr>
+                        <a:defRPr sz="1100" b="0">
+                          <a:latin typeface="Arial"/>
+                        </a:defRPr>
+                      </a:pPr>
+                    </a:p>
+                  </a:txBody>
+                  <a:tcPr/>
+                </a:tc>
+                <a:tc>
+                  <a:txBody>
+                    <a:bodyPr/>
+                    <a:lstStyle/>
+                    <a:p>
+                      <a:pPr>
+                        <a:defRPr sz="1100" b="0">
+                          <a:latin typeface="Arial"/>
+                        </a:defRPr>
+                      </a:pPr>
+                      <a:r>
+                        <a:t>• Interface dermatitis</a:t>
+                      </a:r>
+                    </a:p>
+                  </a:txBody>
+                  <a:tcPr/>
+                </a:tc>
+              </a:tr>
+              <a:tr h="502920">
+                <a:tc>
+                  <a:txBody>
+                    <a:bodyPr/>
+                    <a:lstStyle/>
+                    <a:p>
+                      <a:pPr>
+                        <a:defRPr sz="1100" b="0">
+                          <a:latin typeface="Arial"/>
+                        </a:defRPr>
+                      </a:pPr>
+                    </a:p>
+                  </a:txBody>
+                  <a:tcPr/>
+                </a:tc>
+                <a:tc>
+                  <a:txBody>
+                    <a:bodyPr/>
+                    <a:lstStyle/>
+                    <a:p>
+                      <a:pPr>
+                        <a:defRPr sz="1100" b="0">
+                          <a:latin typeface="Arial"/>
+                        </a:defRPr>
+                      </a:pPr>
+                    </a:p>
+                  </a:txBody>
+                  <a:tcPr/>
+                </a:tc>
+                <a:tc>
+                  <a:txBody>
+                    <a:bodyPr/>
+                    <a:lstStyle/>
+                    <a:p>
+                      <a:pPr>
+                        <a:defRPr sz="1100" b="0">
+                          <a:latin typeface="Arial"/>
+                        </a:defRPr>
+                      </a:pPr>
+                      <a:r>
+                        <a:t>• Superficial and deep perifollicular an</a:t>
+                      </a:r>
+                    </a:p>
+                  </a:txBody>
+                  <a:tcPr/>
+                </a:tc>
+              </a:tr>
+            </a:tbl>
+          </a:graphicData>
+        </a:graphic>
+      </p:graphicFrame>
+    </p:spTree>
+  </p:cSld>
+  <p:clrMapOvr>
+    <a:masterClrMapping/>
+  </p:clrMapOvr>
+</p:sld>
+</file>
+
+<file path=ppt/slides/slide5.xml><?xml version="1.0" encoding="utf-8"?>
 <p:sld xmlns:a="http://schemas.openxmlformats.org/drawingml/2006/main" xmlns:p="http://schemas.openxmlformats.org/presentationml/2006/main" xmlns:r="http://schemas.openxmlformats.org/officeDocument/2006/relationships">
   <p:cSld>
     <p:bg>
@@ -4445,7 +4990,7 @@
                 </a:solidFill>
                 <a:latin typeface="Arial"/>
               </a:rPr>
-              <a:t>Case presentation: A 2-year-and-5-month-old girl with a 2-year history of progressive scalp hair loss presented with severe diffuse AA (Severity of Alopecia Tool [SALT] score, 85%).</a:t>
+              <a:t>Apart from optimal biopsy site selection based on clinical suspicion, such as active borders for scarring alopecias and lesion borders for non-scarring alopecias, choice of appropriate method for grossing of alopecic scalp biopsies also forms a key step.</a:t>
             </a:r>
           </a:p>
         </p:txBody>
@@ -4458,7 +5003,7 @@
 </p:sld>
 </file>
 
-<file path=ppt/slides/slide5.xml><?xml version="1.0" encoding="utf-8"?>
+<file path=ppt/slides/slide6.xml><?xml version="1.0" encoding="utf-8"?>
 <p:sld xmlns:a="http://schemas.openxmlformats.org/drawingml/2006/main" xmlns:p="http://schemas.openxmlformats.org/presentationml/2006/main" xmlns:r="http://schemas.openxmlformats.org/officeDocument/2006/relationships">
   <p:cSld>
     <p:bg>
@@ -4587,7 +5132,7 @@
 </p:sld>
 </file>
 
-<file path=ppt/slides/slide6.xml><?xml version="1.0" encoding="utf-8"?>
+<file path=ppt/slides/slide7.xml><?xml version="1.0" encoding="utf-8"?>
 <p:sld xmlns:a="http://schemas.openxmlformats.org/drawingml/2006/main" xmlns:p="http://schemas.openxmlformats.org/presentationml/2006/main" xmlns:r="http://schemas.openxmlformats.org/officeDocument/2006/relationships">
   <p:cSld>
     <p:bg>
@@ -4648,7 +5193,7 @@
 </p:sld>
 </file>
 
-<file path=ppt/slides/slide7.xml><?xml version="1.0" encoding="utf-8"?>
+<file path=ppt/slides/slide8.xml><?xml version="1.0" encoding="utf-8"?>
 <p:sld xmlns:a="http://schemas.openxmlformats.org/drawingml/2006/main" xmlns:p="http://schemas.openxmlformats.org/presentationml/2006/main" xmlns:r="http://schemas.openxmlformats.org/officeDocument/2006/relationships">
   <p:cSld>
     <p:bg>
@@ -4732,9 +5277,9 @@
                 <a:latin typeface="Arial"/>
               </a:rPr>
               <a:t>[출처]
-논문: Dupilumab Combined with Topical 5% Minoxidil for Severe Alopecia Areata in a 2-Year-Old Child with Type 2 Immune Features: A Case Report
-게재: Clinical, cosmetic and investigational dermatology
-원문: https://pubmed.ncbi.nlm.nih.gov/42719841/
+논문: 'Cutting Through the Roots': A Critical Appraisal of Transverse and Vertical Sectioning Techniques of Scalp Biopsy for Primary Alopecia
+게재: Indian journal of dermatology
+원문: https://pubmed.ncbi.nlm.nih.gov/42708156/
 [이미지 출처]
 - Male pattern baldness.jpg / Originally uploaded by Lkinkade (Transferred by XenonX3) / CC BY-SA 2.5
   https://commons.wikimedia.org/wiki/File:Male_pattern_baldness.jpg
@@ -4743,6 +5288,11 @@
 ※ CC BY-SA 이미지가 포함되어 있습니다. 저작자 표시가 필수이며,
   동일조건변경허락(ShareAlike) 조항이 영상 전체에 적용될 수 있으니
   상업적 이용 시 해당 이미지를 교체하는 편이 안전합니다.
+[논문 본문 그림·표]
+- PubMed Central PMC13549692 (재사용 가능 라이선스)
+  https://www.ncbi.nlm.nih.gov/pmc/articles/PMC13549692/
+  · Table 1
+  ※ 오픈액세스 논문의 그림·표이며, 위 원문 출처를 함께 표기하세요.
 </a:t>
             </a:r>
           </a:p>

--- a/pwa/data/latest/slides.pptx
+++ b/pwa/data/latest/slides.pptx
@@ -514,7 +514,7 @@
           </a:p>
           <a:p>
             <a:r>
-              <a:t>대본: 오늘의 논문 Indian journal of dermatology에 실린 새 연구입니다</a:t>
+              <a:t>대본: 93.16% 이 숫자, 탈모 연구가 새로 내놨습니다</a:t>
             </a:r>
           </a:p>
           <a:p>
@@ -594,7 +594,7 @@
           </a:p>
           <a:p>
             <a:r>
-              <a:t>대본: 《Indian journal of dermatology》 - 'Cutting Through the Roots': A Critical Appraisal of Transverse and Vertical Sectioning Techniques of Scalp Biopsy for Primary Alopecia</a:t>
+              <a:t>대본: 《Indian journal of dermatology》 - Effectiveness and Safety Profile of Oral Tofacitinib in Alopecia Areata: An Observational Study from a Tertiary Hospital</a:t>
             </a:r>
           </a:p>
           <a:p>
@@ -674,7 +674,7 @@
           </a:p>
           <a:p>
             <a:r>
-              <a:t>대본: Alopecia, a prevalent and distressing condition with diverse aetiologies, encompasses both scarring and non-scarring types and necessitates accurate diagnostic approaches for effective management.</a:t>
+              <a:t>대본: Results: SALT score at 6 months showed a mean SALT reduction of 79.27% (43.33% of patients), followed by 93.16% (26.67%), 28.24% (20%), and 3.76% (10%).</a:t>
             </a:r>
           </a:p>
           <a:p>
@@ -754,7 +754,7 @@
           </a:p>
           <a:p>
             <a:r>
-              <a:t>대본: 표로 보면 이렇습니다. Common primary alopecia subtypes and their key histological features[12345]</a:t>
+              <a:t>대본: 표로 보면 이렇습니다. SALT reduction with oral Tofacitinib at 3 and 6 months in Alopecia areata</a:t>
             </a:r>
           </a:p>
           <a:p>
@@ -834,7 +834,7 @@
           </a:p>
           <a:p>
             <a:r>
-              <a:t>대본: Apart from optimal biopsy site selection based on clinical suspicion, such as active borders for scarring alopecias and lesion borders for non-scarring alopecias, choice of appropriate method for grossing of alopecic scalp biopsies also forms a key step.</a:t>
+              <a:t>대본: Similarly, at 6 months, we observed a positive change in AAPS of 4.25 (&gt;90% SALT reduction) followed by 2.9 (50%-90%), 1.66 (10%-50%), and 1 (&lt;10%).</a:t>
             </a:r>
           </a:p>
           <a:p>
@@ -4078,7 +4078,7 @@
                 </a:solidFill>
                 <a:latin typeface="Arial"/>
               </a:rPr>
-              <a:t>오늘의 논문</a:t>
+              <a:t>93.16%</a:t>
             </a:r>
           </a:p>
         </p:txBody>
@@ -4113,7 +4113,7 @@
                 </a:solidFill>
                 <a:latin typeface="Arial"/>
               </a:rPr>
-              <a:t>Indian journal of dermatology에 실린 새 연구입니다</a:t>
+              <a:t>이 숫자, 탈모 연구가 새로 내놨습니다</a:t>
             </a:r>
           </a:p>
         </p:txBody>
@@ -4233,7 +4233,7 @@
                 </a:solidFill>
                 <a:latin typeface="Arial"/>
               </a:rPr>
-              <a:t>'Cutting Through the Roots': A Critical Appraisal of Transverse and Vertical Sectioning Techniques of Scalp Biopsy for Primary Alopecia</a:t>
+              <a:t>Effectiveness and Safety Profile of Oral Tofacitinib in Alopecia Areata: An Observational Study from a Tertiary Hospital</a:t>
             </a:r>
           </a:p>
         </p:txBody>
@@ -4397,7 +4397,7 @@
                 </a:solidFill>
                 <a:latin typeface="Arial"/>
               </a:rPr>
-              <a:t>Alopecia, a prevalent and distressing condition with diverse aetiologies, encompasses both scarring and non-scarring types and necessitates accurate diagnostic approaches for effective management.</a:t>
+              <a:t>Results: SALT score at 6 months showed a mean SALT reduction of 79.27% (43.33% of patients), followed by 93.16% (26.67%), 28.24% (20%), and 3.76% (10%).</a:t>
             </a:r>
           </a:p>
         </p:txBody>
@@ -4493,7 +4493,7 @@
                 </a:solidFill>
                 <a:latin typeface="Arial"/>
               </a:rPr>
-              <a:t>Common primary alopecia subtypes and their key histological features[12345]</a:t>
+              <a:t>SALT reduction with oral Tofacitinib at 3 and 6 months in Alopecia areata</a:t>
             </a:r>
           </a:p>
         </p:txBody>
@@ -4508,7 +4508,7 @@
         </p:nvGraphicFramePr>
         <p:xfrm>
           <a:off x="320040" y="2926080"/>
-          <a:ext cx="4919472" cy="3520440"/>
+          <a:ext cx="4919472" cy="2514600"/>
         </p:xfrm>
         <a:graphic>
           <a:graphicData uri="http://schemas.openxmlformats.org/drawingml/2006/table">
@@ -4517,9 +4517,10 @@
                 <a:tableStyleId>{5C22544A-7EE6-4342-B048-85BDC9FD1C3A}</a:tableStyleId>
               </a:tblPr>
               <a:tblGrid>
-                <a:gridCol w="1639824"/>
-                <a:gridCol w="1639824"/>
-                <a:gridCol w="1639824"/>
+                <a:gridCol w="1229868"/>
+                <a:gridCol w="1229868"/>
+                <a:gridCol w="1229868"/>
+                <a:gridCol w="1229868"/>
               </a:tblGrid>
               <a:tr h="502920">
                 <a:tc>
@@ -4533,7 +4534,7 @@
                         </a:defRPr>
                       </a:pPr>
                       <a:r>
-                        <a:t>Broad category</a:t>
+                        <a:t>Group</a:t>
                       </a:r>
                     </a:p>
                   </a:txBody>
@@ -4550,7 +4551,7 @@
                         </a:defRPr>
                       </a:pPr>
                       <a:r>
-                        <a:t>Disease entity</a:t>
+                        <a:t>Mean percentage SALT reduction at 3 mont</a:t>
                       </a:r>
                     </a:p>
                   </a:txBody>
@@ -4567,40 +4568,7 @@
                         </a:defRPr>
                       </a:pPr>
                       <a:r>
-                        <a:t>Key histopathological findings</a:t>
-                      </a:r>
-                    </a:p>
-                  </a:txBody>
-                  <a:tcPr/>
-                </a:tc>
-              </a:tr>
-              <a:tr h="502920">
-                <a:tc>
-                  <a:txBody>
-                    <a:bodyPr/>
-                    <a:lstStyle/>
-                    <a:p>
-                      <a:pPr>
-                        <a:defRPr sz="1100" b="0">
-                          <a:latin typeface="Arial"/>
-                        </a:defRPr>
-                      </a:pPr>
-                    </a:p>
-                  </a:txBody>
-                  <a:tcPr/>
-                </a:tc>
-                <a:tc>
-                  <a:txBody>
-                    <a:bodyPr/>
-                    <a:lstStyle/>
-                    <a:p>
-                      <a:pPr>
-                        <a:defRPr sz="1100" b="0">
-                          <a:latin typeface="Arial"/>
-                        </a:defRPr>
-                      </a:pPr>
-                      <a:r>
-                        <a:t>Cutaneous/Discoid lupus erythematosus</a:t>
+                        <a:t>P</a:t>
                       </a:r>
                     </a:p>
                   </a:txBody>
@@ -4612,12 +4580,12 @@
                     <a:lstStyle/>
                     <a:p>
                       <a:pPr>
-                        <a:defRPr sz="1100" b="0">
+                        <a:defRPr sz="1200" b="1">
                           <a:latin typeface="Arial"/>
                         </a:defRPr>
                       </a:pPr>
                       <a:r>
-                        <a:t>• Follicular plugging</a:t>
+                        <a:t>Group</a:t>
                       </a:r>
                     </a:p>
                   </a:txBody>
@@ -4636,7 +4604,7 @@
                         </a:defRPr>
                       </a:pPr>
                       <a:r>
-                        <a:t>Scarring (cicatricial) alopecia</a:t>
+                        <a:t>&lt;10% reduction</a:t>
                       </a:r>
                     </a:p>
                   </a:txBody>
@@ -4652,6 +4620,9 @@
                           <a:latin typeface="Arial"/>
                         </a:defRPr>
                       </a:pPr>
+                      <a:r>
+                        <a:t>2.06%</a:t>
+                      </a:r>
                     </a:p>
                   </a:txBody>
                   <a:tcPr/>
@@ -4667,7 +4638,24 @@
                         </a:defRPr>
                       </a:pPr>
                       <a:r>
-                        <a:t>• Vacuolar degeneration of the basal lay</a:t>
+                        <a:t>0.04</a:t>
+                      </a:r>
+                    </a:p>
+                  </a:txBody>
+                  <a:tcPr/>
+                </a:tc>
+                <a:tc>
+                  <a:txBody>
+                    <a:bodyPr/>
+                    <a:lstStyle/>
+                    <a:p>
+                      <a:pPr>
+                        <a:defRPr sz="1100" b="0">
+                          <a:latin typeface="Arial"/>
+                        </a:defRPr>
+                      </a:pPr>
+                      <a:r>
+                        <a:t>&lt;10% reduction</a:t>
                       </a:r>
                     </a:p>
                   </a:txBody>
@@ -4685,20 +4673,9 @@
                           <a:latin typeface="Arial"/>
                         </a:defRPr>
                       </a:pPr>
-                    </a:p>
-                  </a:txBody>
-                  <a:tcPr/>
-                </a:tc>
-                <a:tc>
-                  <a:txBody>
-                    <a:bodyPr/>
-                    <a:lstStyle/>
-                    <a:p>
-                      <a:pPr>
-                        <a:defRPr sz="1100" b="0">
-                          <a:latin typeface="Arial"/>
-                        </a:defRPr>
-                      </a:pPr>
+                      <a:r>
+                        <a:t>10–50% reduction</a:t>
+                      </a:r>
                     </a:p>
                   </a:txBody>
                   <a:tcPr/>
@@ -4714,7 +4691,41 @@
                         </a:defRPr>
                       </a:pPr>
                       <a:r>
-                        <a:t>• Thickened basement membrane of the epi</a:t>
+                        <a:t>35.31%</a:t>
+                      </a:r>
+                    </a:p>
+                  </a:txBody>
+                  <a:tcPr/>
+                </a:tc>
+                <a:tc>
+                  <a:txBody>
+                    <a:bodyPr/>
+                    <a:lstStyle/>
+                    <a:p>
+                      <a:pPr>
+                        <a:defRPr sz="1100" b="0">
+                          <a:latin typeface="Arial"/>
+                        </a:defRPr>
+                      </a:pPr>
+                      <a:r>
+                        <a:t>&lt;0.001</a:t>
+                      </a:r>
+                    </a:p>
+                  </a:txBody>
+                  <a:tcPr/>
+                </a:tc>
+                <a:tc>
+                  <a:txBody>
+                    <a:bodyPr/>
+                    <a:lstStyle/>
+                    <a:p>
+                      <a:pPr>
+                        <a:defRPr sz="1100" b="0">
+                          <a:latin typeface="Arial"/>
+                        </a:defRPr>
+                      </a:pPr>
+                      <a:r>
+                        <a:t>10–50% reduction</a:t>
                       </a:r>
                     </a:p>
                   </a:txBody>
@@ -4732,20 +4743,9 @@
                           <a:latin typeface="Arial"/>
                         </a:defRPr>
                       </a:pPr>
-                    </a:p>
-                  </a:txBody>
-                  <a:tcPr/>
-                </a:tc>
-                <a:tc>
-                  <a:txBody>
-                    <a:bodyPr/>
-                    <a:lstStyle/>
-                    <a:p>
-                      <a:pPr>
-                        <a:defRPr sz="1100" b="0">
-                          <a:latin typeface="Arial"/>
-                        </a:defRPr>
-                      </a:pPr>
+                      <a:r>
+                        <a:t>50–90% reduction</a:t>
+                      </a:r>
                     </a:p>
                   </a:txBody>
                   <a:tcPr/>
@@ -4761,7 +4761,41 @@
                         </a:defRPr>
                       </a:pPr>
                       <a:r>
-                        <a:t>• Apoptotic keratinocytes</a:t>
+                        <a:t>59.75%</a:t>
+                      </a:r>
+                    </a:p>
+                  </a:txBody>
+                  <a:tcPr/>
+                </a:tc>
+                <a:tc>
+                  <a:txBody>
+                    <a:bodyPr/>
+                    <a:lstStyle/>
+                    <a:p>
+                      <a:pPr>
+                        <a:defRPr sz="1100" b="0">
+                          <a:latin typeface="Arial"/>
+                        </a:defRPr>
+                      </a:pPr>
+                      <a:r>
+                        <a:t>&lt;0.001</a:t>
+                      </a:r>
+                    </a:p>
+                  </a:txBody>
+                  <a:tcPr/>
+                </a:tc>
+                <a:tc>
+                  <a:txBody>
+                    <a:bodyPr/>
+                    <a:lstStyle/>
+                    <a:p>
+                      <a:pPr>
+                        <a:defRPr sz="1100" b="0">
+                          <a:latin typeface="Arial"/>
+                        </a:defRPr>
+                      </a:pPr>
+                      <a:r>
+                        <a:t>50–90% reduction</a:t>
                       </a:r>
                     </a:p>
                   </a:txBody>
@@ -4779,20 +4813,9 @@
                           <a:latin typeface="Arial"/>
                         </a:defRPr>
                       </a:pPr>
-                    </a:p>
-                  </a:txBody>
-                  <a:tcPr/>
-                </a:tc>
-                <a:tc>
-                  <a:txBody>
-                    <a:bodyPr/>
-                    <a:lstStyle/>
-                    <a:p>
-                      <a:pPr>
-                        <a:defRPr sz="1100" b="0">
-                          <a:latin typeface="Arial"/>
-                        </a:defRPr>
-                      </a:pPr>
+                      <a:r>
+                        <a:t>&gt;90% reduction</a:t>
+                      </a:r>
                     </a:p>
                   </a:txBody>
                   <a:tcPr/>
@@ -4808,38 +4831,8 @@
                         </a:defRPr>
                       </a:pPr>
                       <a:r>
-                        <a:t>• Interface dermatitis</a:t>
+                        <a:t>-</a:t>
                       </a:r>
-                    </a:p>
-                  </a:txBody>
-                  <a:tcPr/>
-                </a:tc>
-              </a:tr>
-              <a:tr h="502920">
-                <a:tc>
-                  <a:txBody>
-                    <a:bodyPr/>
-                    <a:lstStyle/>
-                    <a:p>
-                      <a:pPr>
-                        <a:defRPr sz="1100" b="0">
-                          <a:latin typeface="Arial"/>
-                        </a:defRPr>
-                      </a:pPr>
-                    </a:p>
-                  </a:txBody>
-                  <a:tcPr/>
-                </a:tc>
-                <a:tc>
-                  <a:txBody>
-                    <a:bodyPr/>
-                    <a:lstStyle/>
-                    <a:p>
-                      <a:pPr>
-                        <a:defRPr sz="1100" b="0">
-                          <a:latin typeface="Arial"/>
-                        </a:defRPr>
-                      </a:pPr>
                     </a:p>
                   </a:txBody>
                   <a:tcPr/>
@@ -4855,7 +4848,24 @@
                         </a:defRPr>
                       </a:pPr>
                       <a:r>
-                        <a:t>• Superficial and deep perifollicular an</a:t>
+                        <a:t>-</a:t>
+                      </a:r>
+                    </a:p>
+                  </a:txBody>
+                  <a:tcPr/>
+                </a:tc>
+                <a:tc>
+                  <a:txBody>
+                    <a:bodyPr/>
+                    <a:lstStyle/>
+                    <a:p>
+                      <a:pPr>
+                        <a:defRPr sz="1100" b="0">
+                          <a:latin typeface="Arial"/>
+                        </a:defRPr>
+                      </a:pPr>
+                      <a:r>
+                        <a:t>&gt;90% reduction</a:t>
                       </a:r>
                     </a:p>
                   </a:txBody>
@@ -4990,7 +5000,7 @@
                 </a:solidFill>
                 <a:latin typeface="Arial"/>
               </a:rPr>
-              <a:t>Apart from optimal biopsy site selection based on clinical suspicion, such as active borders for scarring alopecias and lesion borders for non-scarring alopecias, choice of appropriate method for grossing of alopecic scalp biopsies also forms a key step.</a:t>
+              <a:t>Similarly, at 6 months, we observed a positive change in AAPS of 4.25 (&gt;90% SALT reduction) followed by 2.9 (50%-90%), 1.66 (10%-50%), and 1 (&lt;10%).</a:t>
             </a:r>
           </a:p>
         </p:txBody>
@@ -5277,9 +5287,9 @@
                 <a:latin typeface="Arial"/>
               </a:rPr>
               <a:t>[출처]
-논문: 'Cutting Through the Roots': A Critical Appraisal of Transverse and Vertical Sectioning Techniques of Scalp Biopsy for Primary Alopecia
+논문: Effectiveness and Safety Profile of Oral Tofacitinib in Alopecia Areata: An Observational Study from a Tertiary Hospital
 게재: Indian journal of dermatology
-원문: https://pubmed.ncbi.nlm.nih.gov/42708156/
+원문: https://pubmed.ncbi.nlm.nih.gov/42708150/
 [이미지 출처]
 - Male pattern baldness.jpg / Originally uploaded by Lkinkade (Transferred by XenonX3) / CC BY-SA 2.5
   https://commons.wikimedia.org/wiki/File:Male_pattern_baldness.jpg
@@ -5289,8 +5299,8 @@
   동일조건변경허락(ShareAlike) 조항이 영상 전체에 적용될 수 있으니
   상업적 이용 시 해당 이미지를 교체하는 편이 안전합니다.
 [논문 본문 그림·표]
-- PubMed Central PMC13549692 (재사용 가능 라이선스)
-  https://www.ncbi.nlm.nih.gov/pmc/articles/PMC13549692/
+- PubMed Central PMC13549691 (재사용 가능 라이선스)
+  https://www.ncbi.nlm.nih.gov/pmc/articles/PMC13549691/
   · Table 1
   ※ 오픈액세스 논문의 그림·표이며, 위 원문 출처를 함께 표기하세요.
 </a:t>

--- a/pwa/data/latest/slides.pptx
+++ b/pwa/data/latest/slides.pptx
@@ -514,7 +514,7 @@
           </a:p>
           <a:p>
             <a:r>
-              <a:t>대본: 93.16% 이 숫자, 탈모 연구가 새로 내놨습니다</a:t>
+              <a:t>대본: 원형탈모 오늘 나온 최신 연구를 정리했습니다</a:t>
             </a:r>
           </a:p>
           <a:p>
@@ -594,7 +594,7 @@
           </a:p>
           <a:p>
             <a:r>
-              <a:t>대본: 《Indian journal of dermatology》 - Effectiveness and Safety Profile of Oral Tofacitinib in Alopecia Areata: An Observational Study from a Tertiary Hospital</a:t>
+              <a:t>대본: 《Frontiers in medicine》 - IL-15 in alopecia areata: the immune tolerance mechanistic insights and translational perspectives</a:t>
             </a:r>
           </a:p>
           <a:p>
@@ -674,7 +674,7 @@
           </a:p>
           <a:p>
             <a:r>
-              <a:t>대본: Results: SALT score at 6 months showed a mean SALT reduction of 79.27% (43.33% of patients), followed by 93.16% (26.67%), 28.24% (20%), and 3.76% (10%).</a:t>
+              <a:t>대본: In the past, IL-2 and IL-15 are generally recognized for their roles in promoting pro-inflammatory immune responses.</a:t>
             </a:r>
           </a:p>
           <a:p>
@@ -754,7 +754,7 @@
           </a:p>
           <a:p>
             <a:r>
-              <a:t>대본: 표로 보면 이렇습니다. SALT reduction with oral Tofacitinib at 3 and 6 months in Alopecia areata</a:t>
+              <a:t>대본: 표로 보면 이렇습니다. The comparison of IL-15 effect in different studies of AA.</a:t>
             </a:r>
           </a:p>
           <a:p>
@@ -834,7 +834,7 @@
           </a:p>
           <a:p>
             <a:r>
-              <a:t>대본: Similarly, at 6 months, we observed a positive change in AAPS of 4.25 (&gt;90% SALT reduction) followed by 2.9 (50%-90%), 1.66 (10%-50%), and 1 (&lt;10%).</a:t>
+              <a:t>대본: Moreover, cytokine-based therapeutic strategies utilizing IL-2 or IL-15 have the capacity to expand effector T cell and NK cells, thereby offering a viable alternative immunotherapeutic approach for cancer treatment.</a:t>
             </a:r>
           </a:p>
           <a:p>
@@ -4043,7 +4043,7 @@
                 </a:solidFill>
                 <a:latin typeface="Arial"/>
               </a:rPr>
-              <a:t>INDIAN JOURNAL OF DERMATOLOGY</a:t>
+              <a:t>FRONTIERS IN MEDICINE</a:t>
             </a:r>
           </a:p>
         </p:txBody>
@@ -4078,7 +4078,7 @@
                 </a:solidFill>
                 <a:latin typeface="Arial"/>
               </a:rPr>
-              <a:t>93.16%</a:t>
+              <a:t>원형탈모</a:t>
             </a:r>
           </a:p>
         </p:txBody>
@@ -4113,7 +4113,7 @@
                 </a:solidFill>
                 <a:latin typeface="Arial"/>
               </a:rPr>
-              <a:t>이 숫자, 탈모 연구가 새로 내놨습니다</a:t>
+              <a:t>오늘 나온 최신 연구를 정리했습니다</a:t>
             </a:r>
           </a:p>
         </p:txBody>
@@ -4148,7 +4148,7 @@
                 </a:solidFill>
                 <a:latin typeface="Arial"/>
               </a:rPr>
-              <a:t>2026 Sep-Oct  |  매일 아침 탈모 연구 한 편</a:t>
+              <a:t>2026  |  매일 아침 탈모 연구 한 편</a:t>
             </a:r>
           </a:p>
         </p:txBody>
@@ -4233,7 +4233,7 @@
                 </a:solidFill>
                 <a:latin typeface="Arial"/>
               </a:rPr>
-              <a:t>Effectiveness and Safety Profile of Oral Tofacitinib in Alopecia Areata: An Observational Study from a Tertiary Hospital</a:t>
+              <a:t>IL-15 in alopecia areata: the immune tolerance mechanistic insights and translational perspectives</a:t>
             </a:r>
           </a:p>
         </p:txBody>
@@ -4268,7 +4268,7 @@
                 </a:solidFill>
                 <a:latin typeface="Arial"/>
               </a:rPr>
-              <a:t>Indian journal of dermatology  ·  2026 Sep-Oct</a:t>
+              <a:t>Frontiers in medicine  ·  2026</a:t>
             </a:r>
           </a:p>
         </p:txBody>
@@ -4397,7 +4397,7 @@
                 </a:solidFill>
                 <a:latin typeface="Arial"/>
               </a:rPr>
-              <a:t>Results: SALT score at 6 months showed a mean SALT reduction of 79.27% (43.33% of patients), followed by 93.16% (26.67%), 28.24% (20%), and 3.76% (10%).</a:t>
+              <a:t>In the past, IL-2 and IL-15 are generally recognized for their roles in promoting pro-inflammatory immune responses.</a:t>
             </a:r>
           </a:p>
         </p:txBody>
@@ -4493,7 +4493,7 @@
                 </a:solidFill>
                 <a:latin typeface="Arial"/>
               </a:rPr>
-              <a:t>SALT reduction with oral Tofacitinib at 3 and 6 months in Alopecia areata</a:t>
+              <a:t>The comparison of IL-15 effect in different studies of AA.</a:t>
             </a:r>
           </a:p>
         </p:txBody>
@@ -4508,7 +4508,7 @@
         </p:nvGraphicFramePr>
         <p:xfrm>
           <a:off x="320040" y="2926080"/>
-          <a:ext cx="4919472" cy="2514600"/>
+          <a:ext cx="4919472" cy="2011680"/>
         </p:xfrm>
         <a:graphic>
           <a:graphicData uri="http://schemas.openxmlformats.org/drawingml/2006/table">
@@ -4534,7 +4534,7 @@
                         </a:defRPr>
                       </a:pPr>
                       <a:r>
-                        <a:t>Group</a:t>
+                        <a:t>Study</a:t>
                       </a:r>
                     </a:p>
                   </a:txBody>
@@ -4551,7 +4551,7 @@
                         </a:defRPr>
                       </a:pPr>
                       <a:r>
-                        <a:t>Mean percentage SALT reduction at 3 mont</a:t>
+                        <a:t>Model</a:t>
                       </a:r>
                     </a:p>
                   </a:txBody>
@@ -4568,7 +4568,7 @@
                         </a:defRPr>
                       </a:pPr>
                       <a:r>
-                        <a:t>P</a:t>
+                        <a:t>IL-15 exposure</a:t>
                       </a:r>
                     </a:p>
                   </a:txBody>
@@ -4585,7 +4585,7 @@
                         </a:defRPr>
                       </a:pPr>
                       <a:r>
-                        <a:t>Group</a:t>
+                        <a:t>Main finding</a:t>
                       </a:r>
                     </a:p>
                   </a:txBody>
@@ -4604,7 +4604,7 @@
                         </a:defRPr>
                       </a:pPr>
                       <a:r>
-                        <a:t>&lt;10% reduction</a:t>
+                        <a:t>Suzuki et al., 2024 (76)</a:t>
                       </a:r>
                     </a:p>
                   </a:txBody>
@@ -4621,7 +4621,7 @@
                         </a:defRPr>
                       </a:pPr>
                       <a:r>
-                        <a:t>2.06%</a:t>
+                        <a:t>Human AA tissue;ex vivo human hair folli</a:t>
                       </a:r>
                     </a:p>
                   </a:txBody>
@@ -4638,7 +4638,7 @@
                         </a:defRPr>
                       </a:pPr>
                       <a:r>
-                        <a:t>0.04</a:t>
+                        <a:t>rhIL-15 exact concentration reported in </a:t>
                       </a:r>
                     </a:p>
                   </a:txBody>
@@ -4655,7 +4655,7 @@
                         </a:defRPr>
                       </a:pPr>
                       <a:r>
-                        <a:t>&lt;10% reduction</a:t>
+                        <a:t>IL-15 exerts the anti-inflammatory effec</a:t>
                       </a:r>
                     </a:p>
                   </a:txBody>
@@ -4674,7 +4674,7 @@
                         </a:defRPr>
                       </a:pPr>
                       <a:r>
-                        <a:t>10–50% reduction</a:t>
+                        <a:t>Suzuki et al., 2024 (82)</a:t>
                       </a:r>
                     </a:p>
                   </a:txBody>
@@ -4691,7 +4691,7 @@
                         </a:defRPr>
                       </a:pPr>
                       <a:r>
-                        <a:t>35.31%</a:t>
+                        <a:t>Human AA tissue</a:t>
                       </a:r>
                     </a:p>
                   </a:txBody>
@@ -4708,7 +4708,7 @@
                         </a:defRPr>
                       </a:pPr>
                       <a:r>
-                        <a:t>&lt;0.001</a:t>
+                        <a:t>rhIL-15(1, 50 and 100 ng/ml)</a:t>
                       </a:r>
                     </a:p>
                   </a:txBody>
@@ -4725,7 +4725,7 @@
                         </a:defRPr>
                       </a:pPr>
                       <a:r>
-                        <a:t>10–50% reduction</a:t>
+                        <a:t>IL-15 promotes hair follicles growth in </a:t>
                       </a:r>
                     </a:p>
                   </a:txBody>
@@ -4744,7 +4744,7 @@
                         </a:defRPr>
                       </a:pPr>
                       <a:r>
-                        <a:t>50–90% reduction</a:t>
+                        <a:t>Seok et al., 2023 (75)</a:t>
                       </a:r>
                     </a:p>
                   </a:txBody>
@@ -4761,7 +4761,7 @@
                         </a:defRPr>
                       </a:pPr>
                       <a:r>
-                        <a:t>59.75%</a:t>
+                        <a:t>AA mouse model;cell culture</a:t>
                       </a:r>
                     </a:p>
                   </a:txBody>
@@ -4778,7 +4778,7 @@
                         </a:defRPr>
                       </a:pPr>
                       <a:r>
-                        <a:t>&lt;0.001</a:t>
+                        <a:t>IL-15</a:t>
                       </a:r>
                     </a:p>
                   </a:txBody>
@@ -4795,77 +4795,7 @@
                         </a:defRPr>
                       </a:pPr>
                       <a:r>
-                        <a:t>50–90% reduction</a:t>
-                      </a:r>
-                    </a:p>
-                  </a:txBody>
-                  <a:tcPr/>
-                </a:tc>
-              </a:tr>
-              <a:tr h="502920">
-                <a:tc>
-                  <a:txBody>
-                    <a:bodyPr/>
-                    <a:lstStyle/>
-                    <a:p>
-                      <a:pPr>
-                        <a:defRPr sz="1100" b="0">
-                          <a:latin typeface="Arial"/>
-                        </a:defRPr>
-                      </a:pPr>
-                      <a:r>
-                        <a:t>&gt;90% reduction</a:t>
-                      </a:r>
-                    </a:p>
-                  </a:txBody>
-                  <a:tcPr/>
-                </a:tc>
-                <a:tc>
-                  <a:txBody>
-                    <a:bodyPr/>
-                    <a:lstStyle/>
-                    <a:p>
-                      <a:pPr>
-                        <a:defRPr sz="1100" b="0">
-                          <a:latin typeface="Arial"/>
-                        </a:defRPr>
-                      </a:pPr>
-                      <a:r>
-                        <a:t>-</a:t>
-                      </a:r>
-                    </a:p>
-                  </a:txBody>
-                  <a:tcPr/>
-                </a:tc>
-                <a:tc>
-                  <a:txBody>
-                    <a:bodyPr/>
-                    <a:lstStyle/>
-                    <a:p>
-                      <a:pPr>
-                        <a:defRPr sz="1100" b="0">
-                          <a:latin typeface="Arial"/>
-                        </a:defRPr>
-                      </a:pPr>
-                      <a:r>
-                        <a:t>-</a:t>
-                      </a:r>
-                    </a:p>
-                  </a:txBody>
-                  <a:tcPr/>
-                </a:tc>
-                <a:tc>
-                  <a:txBody>
-                    <a:bodyPr/>
-                    <a:lstStyle/>
-                    <a:p>
-                      <a:pPr>
-                        <a:defRPr sz="1100" b="0">
-                          <a:latin typeface="Arial"/>
-                        </a:defRPr>
-                      </a:pPr>
-                      <a:r>
-                        <a:t>&gt;90% reduction</a:t>
+                        <a:t>IL-15 promotes the production of a new s</a:t>
                       </a:r>
                     </a:p>
                   </a:txBody>
@@ -5000,7 +4930,7 @@
                 </a:solidFill>
                 <a:latin typeface="Arial"/>
               </a:rPr>
-              <a:t>Similarly, at 6 months, we observed a positive change in AAPS of 4.25 (&gt;90% SALT reduction) followed by 2.9 (50%-90%), 1.66 (10%-50%), and 1 (&lt;10%).</a:t>
+              <a:t>Moreover, cytokine-based therapeutic strategies utilizing IL-2 or IL-15 have the capacity to expand effector T cell and NK cells, thereby offering a viable alternative immunotherapeutic approach for cancer treatment.</a:t>
             </a:r>
           </a:p>
         </p:txBody>
@@ -5287,9 +5217,9 @@
                 <a:latin typeface="Arial"/>
               </a:rPr>
               <a:t>[출처]
-논문: Effectiveness and Safety Profile of Oral Tofacitinib in Alopecia Areata: An Observational Study from a Tertiary Hospital
-게재: Indian journal of dermatology
-원문: https://pubmed.ncbi.nlm.nih.gov/42708150/
+논문: IL-15 in alopecia areata: the immune tolerance mechanistic insights and translational perspectives
+게재: Frontiers in medicine
+원문: https://pubmed.ncbi.nlm.nih.gov/42707815/
 [이미지 출처]
 - Male pattern baldness.jpg / Originally uploaded by Lkinkade (Transferred by XenonX3) / CC BY-SA 2.5
   https://commons.wikimedia.org/wiki/File:Male_pattern_baldness.jpg
@@ -5299,8 +5229,8 @@
   동일조건변경허락(ShareAlike) 조항이 영상 전체에 적용될 수 있으니
   상업적 이용 시 해당 이미지를 교체하는 편이 안전합니다.
 [논문 본문 그림·표]
-- PubMed Central PMC13549691 (재사용 가능 라이선스)
-  https://www.ncbi.nlm.nih.gov/pmc/articles/PMC13549691/
+- PubMed Central PMC13548128 (재사용 가능 라이선스)
+  https://www.ncbi.nlm.nih.gov/pmc/articles/PMC13548128/
   · Table 1
   ※ 오픈액세스 논문의 그림·표이며, 위 원문 출처를 함께 표기하세요.
 </a:t>

--- a/pwa/data/latest/slides.pptx
+++ b/pwa/data/latest/slides.pptx
@@ -12,7 +12,6 @@
     <p:sldId id="260" r:id="rId12"/>
     <p:sldId id="261" r:id="rId13"/>
     <p:sldId id="262" r:id="rId14"/>
-    <p:sldId id="263" r:id="rId15"/>
   </p:sldIdLst>
   <p:sldSz cx="5559552" cy="9875520" type="screen4x3"/>
   <p:notesSz cx="6858000" cy="9144000"/>
@@ -594,7 +593,7 @@
           </a:p>
           <a:p>
             <a:r>
-              <a:t>대본: 《Frontiers in medicine》 - IL-15 in alopecia areata: the immune tolerance mechanistic insights and translational perspectives</a:t>
+              <a:t>대본: 《Recent advances in inflammation &amp; allergy drug discovery》 - Understanding Alopecia Areata: An Integrative Review of Causes, Mechanisms, and Management Strategies</a:t>
             </a:r>
           </a:p>
           <a:p>
@@ -674,7 +673,7 @@
           </a:p>
           <a:p>
             <a:r>
-              <a:t>대본: In the past, IL-2 and IL-15 are generally recognized for their roles in promoting pro-inflammatory immune responses.</a:t>
+              <a:t>대본: Introduction: Alopecia areata is a non-scarring autoimmune disease that is usually characterized by patchy or diffuse hair loss.</a:t>
             </a:r>
           </a:p>
           <a:p>
@@ -749,17 +748,17 @@
           <a:lstStyle/>
           <a:p>
             <a:r>
-              <a:t>[paper_table] 약 8초</a:t>
-            </a:r>
-          </a:p>
-          <a:p>
-            <a:r>
-              <a:t>대본: 표로 보면 이렇습니다. The comparison of IL-15 effect in different studies of AA.</a:t>
-            </a:r>
-          </a:p>
-          <a:p>
-            <a:r>
-              <a:t>연출 노트: 핵심 숫자 한 칸만 짚어준다. 표는 셀을 직접 수정할 수 있다.</a:t>
+              <a:t>[key_finding_2] 약 10초</a:t>
+            </a:r>
+          </a:p>
+          <a:p>
+            <a:r>
+              <a:t>대본: The collapse of the immunological privilege of hair follicles and activation of cytotoxic T-cell pathways, regulated by metabolic, psychological, and environmental variables, cause this disorder.</a:t>
+            </a:r>
+          </a:p>
+          <a:p>
+            <a:r>
+              <a:t>연출 노트: 핵심 포인트 2.</a:t>
             </a:r>
           </a:p>
         </p:txBody>
@@ -829,17 +828,17 @@
           <a:lstStyle/>
           <a:p>
             <a:r>
-              <a:t>[key_finding_2] 약 10초</a:t>
-            </a:r>
-          </a:p>
-          <a:p>
-            <a:r>
-              <a:t>대본: Moreover, cytokine-based therapeutic strategies utilizing IL-2 or IL-15 have the capacity to expand effector T cell and NK cells, thereby offering a viable alternative immunotherapeutic approach for cancer treatment.</a:t>
-            </a:r>
-          </a:p>
-          <a:p>
-            <a:r>
-              <a:t>연출 노트: 핵심 포인트 2.</a:t>
+              <a:t>[my_take] 약 10초</a:t>
+            </a:r>
+          </a:p>
+          <a:p>
+            <a:r>
+              <a:t>대본: 탈모 연구, 매일 쉽게 정리해드립니다 🙂</a:t>
+            </a:r>
+          </a:p>
+          <a:p>
+            <a:r>
+              <a:t>연출 노트: 본인 사진 + 코멘트. 문구를 직접 바꿔 쓰세요.</a:t>
             </a:r>
           </a:p>
         </p:txBody>
@@ -865,86 +864,6 @@
 </file>
 
 <file path=ppt/notesSlides/notesSlide6.xml><?xml version="1.0" encoding="utf-8"?>
-<p:notes xmlns:a="http://schemas.openxmlformats.org/drawingml/2006/main" xmlns:p="http://schemas.openxmlformats.org/presentationml/2006/main" xmlns:r="http://schemas.openxmlformats.org/officeDocument/2006/relationships">
-  <p:cSld>
-    <p:spTree>
-      <p:nvGrpSpPr>
-        <p:cNvPr id="1" name=""/>
-        <p:cNvGrpSpPr/>
-        <p:nvPr/>
-      </p:nvGrpSpPr>
-      <p:grpSpPr>
-        <a:xfrm>
-          <a:off x="0" y="0"/>
-          <a:ext cx="0" cy="0"/>
-          <a:chOff x="0" y="0"/>
-          <a:chExt cx="0" cy="0"/>
-        </a:xfrm>
-      </p:grpSpPr>
-      <p:sp>
-        <p:nvSpPr>
-          <p:cNvPr id="2" name="Slide Image Placeholder 1"/>
-          <p:cNvSpPr>
-            <a:spLocks noGrp="1"/>
-          </p:cNvSpPr>
-          <p:nvPr>
-            <p:ph type="sldImg" idx="2"/>
-          </p:nvPr>
-        </p:nvSpPr>
-        <p:spPr/>
-      </p:sp>
-      <p:sp>
-        <p:nvSpPr>
-          <p:cNvPr id="3" name="Notes Placeholder 2"/>
-          <p:cNvSpPr>
-            <a:spLocks noGrp="1"/>
-          </p:cNvSpPr>
-          <p:nvPr>
-            <p:ph type="body" idx="3" sz="quarter"/>
-          </p:nvPr>
-        </p:nvSpPr>
-        <p:spPr/>
-        <p:txBody>
-          <a:bodyPr/>
-          <a:lstStyle/>
-          <a:p>
-            <a:r>
-              <a:t>[my_take] 약 10초</a:t>
-            </a:r>
-          </a:p>
-          <a:p>
-            <a:r>
-              <a:t>대본: 탈모 연구, 매일 쉽게 정리해드립니다 🙂</a:t>
-            </a:r>
-          </a:p>
-          <a:p>
-            <a:r>
-              <a:t>연출 노트: 본인 사진 + 코멘트. 문구를 직접 바꿔 쓰세요.</a:t>
-            </a:r>
-          </a:p>
-        </p:txBody>
-      </p:sp>
-      <p:sp>
-        <p:nvSpPr>
-          <p:cNvPr id="4" name="Slide Number Placeholder 3"/>
-          <p:cNvSpPr>
-            <a:spLocks noGrp="1"/>
-          </p:cNvSpPr>
-          <p:nvPr>
-            <p:ph type="sldNum" idx="5" sz="quarter"/>
-          </p:nvPr>
-        </p:nvSpPr>
-        <p:spPr/>
-      </p:sp>
-    </p:spTree>
-  </p:cSld>
-  <p:clrMapOvr>
-    <a:masterClrMapping/>
-  </p:clrMapOvr>
-</p:notes>
-</file>
-
-<file path=ppt/notesSlides/notesSlide7.xml><?xml version="1.0" encoding="utf-8"?>
 <p:notes xmlns:a="http://schemas.openxmlformats.org/drawingml/2006/main" xmlns:p="http://schemas.openxmlformats.org/presentationml/2006/main" xmlns:r="http://schemas.openxmlformats.org/officeDocument/2006/relationships">
   <p:cSld>
     <p:spTree>
@@ -4043,7 +3962,7 @@
                 </a:solidFill>
                 <a:latin typeface="Arial"/>
               </a:rPr>
-              <a:t>FRONTIERS IN MEDICINE</a:t>
+              <a:t>RECENT ADVANCES IN INFLAMMATION &amp; ALLERG</a:t>
             </a:r>
           </a:p>
         </p:txBody>
@@ -4148,7 +4067,7 @@
                 </a:solidFill>
                 <a:latin typeface="Arial"/>
               </a:rPr>
-              <a:t>2026  |  매일 아침 탈모 연구 한 편</a:t>
+              <a:t>2026 Aug 28  |  매일 아침 탈모 연구 한 편</a:t>
             </a:r>
           </a:p>
         </p:txBody>
@@ -4233,7 +4152,7 @@
                 </a:solidFill>
                 <a:latin typeface="Arial"/>
               </a:rPr>
-              <a:t>IL-15 in alopecia areata: the immune tolerance mechanistic insights and translational perspectives</a:t>
+              <a:t>Understanding Alopecia Areata: An Integrative Review of Causes, Mechanisms, and Management Strategies</a:t>
             </a:r>
           </a:p>
         </p:txBody>
@@ -4268,7 +4187,7 @@
                 </a:solidFill>
                 <a:latin typeface="Arial"/>
               </a:rPr>
-              <a:t>Frontiers in medicine  ·  2026</a:t>
+              <a:t>Recent advances in inflammation &amp; allergy drug discovery  ·  2026 Aug 28</a:t>
             </a:r>
           </a:p>
         </p:txBody>
@@ -4397,7 +4316,7 @@
                 </a:solidFill>
                 <a:latin typeface="Arial"/>
               </a:rPr>
-              <a:t>In the past, IL-2 and IL-15 are generally recognized for their roles in promoting pro-inflammatory immune responses.</a:t>
+              <a:t>Introduction: Alopecia areata is a non-scarring autoimmune disease that is usually characterized by patchy or diffuse hair loss.</a:t>
             </a:r>
           </a:p>
         </p:txBody>
@@ -4411,410 +4330,6 @@
 </file>
 
 <file path=ppt/slides/slide4.xml><?xml version="1.0" encoding="utf-8"?>
-<p:sld xmlns:a="http://schemas.openxmlformats.org/drawingml/2006/main" xmlns:p="http://schemas.openxmlformats.org/presentationml/2006/main" xmlns:r="http://schemas.openxmlformats.org/officeDocument/2006/relationships">
-  <p:cSld>
-    <p:bg>
-      <p:bgPr>
-        <a:solidFill>
-          <a:srgbClr val="12142A"/>
-        </a:solidFill>
-        <a:effectLst/>
-      </p:bgPr>
-    </p:bg>
-    <p:spTree>
-      <p:nvGrpSpPr>
-        <p:cNvPr id="1" name=""/>
-        <p:cNvGrpSpPr/>
-        <p:nvPr/>
-      </p:nvGrpSpPr>
-      <p:grpSpPr/>
-      <p:sp>
-        <p:nvSpPr>
-          <p:cNvPr id="2" name="TextBox 1"/>
-          <p:cNvSpPr txBox="1"/>
-          <p:nvPr/>
-        </p:nvSpPr>
-        <p:spPr>
-          <a:xfrm>
-            <a:off x="365760" y="1097280"/>
-            <a:ext cx="4828032" cy="548640"/>
-          </a:xfrm>
-          <a:prstGeom prst="rect">
-            <a:avLst/>
-          </a:prstGeom>
-          <a:noFill/>
-        </p:spPr>
-        <p:txBody>
-          <a:bodyPr wrap="square" anchor="ctr">
-            <a:spAutoFit/>
-          </a:bodyPr>
-          <a:lstStyle/>
-          <a:p>
-            <a:pPr algn="ctr"/>
-            <a:r>
-              <a:rPr sz="2000" b="1">
-                <a:solidFill>
-                  <a:srgbClr val="FF6B6B"/>
-                </a:solidFill>
-                <a:latin typeface="Arial"/>
-              </a:rPr>
-              <a:t>논문 Table 1</a:t>
-            </a:r>
-          </a:p>
-        </p:txBody>
-      </p:sp>
-      <p:sp>
-        <p:nvSpPr>
-          <p:cNvPr id="3" name="TextBox 2"/>
-          <p:cNvSpPr txBox="1"/>
-          <p:nvPr/>
-        </p:nvSpPr>
-        <p:spPr>
-          <a:xfrm>
-            <a:off x="365760" y="1737360"/>
-            <a:ext cx="4828032" cy="914400"/>
-          </a:xfrm>
-          <a:prstGeom prst="rect">
-            <a:avLst/>
-          </a:prstGeom>
-          <a:noFill/>
-        </p:spPr>
-        <p:txBody>
-          <a:bodyPr wrap="square" anchor="ctr">
-            <a:spAutoFit/>
-          </a:bodyPr>
-          <a:lstStyle/>
-          <a:p>
-            <a:pPr algn="ctr"/>
-            <a:r>
-              <a:rPr sz="1300" b="0">
-                <a:solidFill>
-                  <a:srgbClr val="AAAFCD"/>
-                </a:solidFill>
-                <a:latin typeface="Arial"/>
-              </a:rPr>
-              <a:t>The comparison of IL-15 effect in different studies of AA.</a:t>
-            </a:r>
-          </a:p>
-        </p:txBody>
-      </p:sp>
-      <p:graphicFrame>
-        <p:nvGraphicFramePr>
-          <p:cNvPr id="4" name="Table 3"/>
-          <p:cNvGraphicFramePr>
-            <a:graphicFrameLocks noGrp="1"/>
-          </p:cNvGraphicFramePr>
-          <p:nvPr/>
-        </p:nvGraphicFramePr>
-        <p:xfrm>
-          <a:off x="320040" y="2926080"/>
-          <a:ext cx="4919472" cy="2011680"/>
-        </p:xfrm>
-        <a:graphic>
-          <a:graphicData uri="http://schemas.openxmlformats.org/drawingml/2006/table">
-            <a:tbl>
-              <a:tblPr firstRow="1" bandRow="1">
-                <a:tableStyleId>{5C22544A-7EE6-4342-B048-85BDC9FD1C3A}</a:tableStyleId>
-              </a:tblPr>
-              <a:tblGrid>
-                <a:gridCol w="1229868"/>
-                <a:gridCol w="1229868"/>
-                <a:gridCol w="1229868"/>
-                <a:gridCol w="1229868"/>
-              </a:tblGrid>
-              <a:tr h="502920">
-                <a:tc>
-                  <a:txBody>
-                    <a:bodyPr/>
-                    <a:lstStyle/>
-                    <a:p>
-                      <a:pPr>
-                        <a:defRPr sz="1200" b="1">
-                          <a:latin typeface="Arial"/>
-                        </a:defRPr>
-                      </a:pPr>
-                      <a:r>
-                        <a:t>Study</a:t>
-                      </a:r>
-                    </a:p>
-                  </a:txBody>
-                  <a:tcPr/>
-                </a:tc>
-                <a:tc>
-                  <a:txBody>
-                    <a:bodyPr/>
-                    <a:lstStyle/>
-                    <a:p>
-                      <a:pPr>
-                        <a:defRPr sz="1200" b="1">
-                          <a:latin typeface="Arial"/>
-                        </a:defRPr>
-                      </a:pPr>
-                      <a:r>
-                        <a:t>Model</a:t>
-                      </a:r>
-                    </a:p>
-                  </a:txBody>
-                  <a:tcPr/>
-                </a:tc>
-                <a:tc>
-                  <a:txBody>
-                    <a:bodyPr/>
-                    <a:lstStyle/>
-                    <a:p>
-                      <a:pPr>
-                        <a:defRPr sz="1200" b="1">
-                          <a:latin typeface="Arial"/>
-                        </a:defRPr>
-                      </a:pPr>
-                      <a:r>
-                        <a:t>IL-15 exposure</a:t>
-                      </a:r>
-                    </a:p>
-                  </a:txBody>
-                  <a:tcPr/>
-                </a:tc>
-                <a:tc>
-                  <a:txBody>
-                    <a:bodyPr/>
-                    <a:lstStyle/>
-                    <a:p>
-                      <a:pPr>
-                        <a:defRPr sz="1200" b="1">
-                          <a:latin typeface="Arial"/>
-                        </a:defRPr>
-                      </a:pPr>
-                      <a:r>
-                        <a:t>Main finding</a:t>
-                      </a:r>
-                    </a:p>
-                  </a:txBody>
-                  <a:tcPr/>
-                </a:tc>
-              </a:tr>
-              <a:tr h="502920">
-                <a:tc>
-                  <a:txBody>
-                    <a:bodyPr/>
-                    <a:lstStyle/>
-                    <a:p>
-                      <a:pPr>
-                        <a:defRPr sz="1100" b="0">
-                          <a:latin typeface="Arial"/>
-                        </a:defRPr>
-                      </a:pPr>
-                      <a:r>
-                        <a:t>Suzuki et al., 2024 (76)</a:t>
-                      </a:r>
-                    </a:p>
-                  </a:txBody>
-                  <a:tcPr/>
-                </a:tc>
-                <a:tc>
-                  <a:txBody>
-                    <a:bodyPr/>
-                    <a:lstStyle/>
-                    <a:p>
-                      <a:pPr>
-                        <a:defRPr sz="1100" b="0">
-                          <a:latin typeface="Arial"/>
-                        </a:defRPr>
-                      </a:pPr>
-                      <a:r>
-                        <a:t>Human AA tissue;ex vivo human hair folli</a:t>
-                      </a:r>
-                    </a:p>
-                  </a:txBody>
-                  <a:tcPr/>
-                </a:tc>
-                <a:tc>
-                  <a:txBody>
-                    <a:bodyPr/>
-                    <a:lstStyle/>
-                    <a:p>
-                      <a:pPr>
-                        <a:defRPr sz="1100" b="0">
-                          <a:latin typeface="Arial"/>
-                        </a:defRPr>
-                      </a:pPr>
-                      <a:r>
-                        <a:t>rhIL-15 exact concentration reported in </a:t>
-                      </a:r>
-                    </a:p>
-                  </a:txBody>
-                  <a:tcPr/>
-                </a:tc>
-                <a:tc>
-                  <a:txBody>
-                    <a:bodyPr/>
-                    <a:lstStyle/>
-                    <a:p>
-                      <a:pPr>
-                        <a:defRPr sz="1100" b="0">
-                          <a:latin typeface="Arial"/>
-                        </a:defRPr>
-                      </a:pPr>
-                      <a:r>
-                        <a:t>IL-15 exerts the anti-inflammatory effec</a:t>
-                      </a:r>
-                    </a:p>
-                  </a:txBody>
-                  <a:tcPr/>
-                </a:tc>
-              </a:tr>
-              <a:tr h="502920">
-                <a:tc>
-                  <a:txBody>
-                    <a:bodyPr/>
-                    <a:lstStyle/>
-                    <a:p>
-                      <a:pPr>
-                        <a:defRPr sz="1100" b="0">
-                          <a:latin typeface="Arial"/>
-                        </a:defRPr>
-                      </a:pPr>
-                      <a:r>
-                        <a:t>Suzuki et al., 2024 (82)</a:t>
-                      </a:r>
-                    </a:p>
-                  </a:txBody>
-                  <a:tcPr/>
-                </a:tc>
-                <a:tc>
-                  <a:txBody>
-                    <a:bodyPr/>
-                    <a:lstStyle/>
-                    <a:p>
-                      <a:pPr>
-                        <a:defRPr sz="1100" b="0">
-                          <a:latin typeface="Arial"/>
-                        </a:defRPr>
-                      </a:pPr>
-                      <a:r>
-                        <a:t>Human AA tissue</a:t>
-                      </a:r>
-                    </a:p>
-                  </a:txBody>
-                  <a:tcPr/>
-                </a:tc>
-                <a:tc>
-                  <a:txBody>
-                    <a:bodyPr/>
-                    <a:lstStyle/>
-                    <a:p>
-                      <a:pPr>
-                        <a:defRPr sz="1100" b="0">
-                          <a:latin typeface="Arial"/>
-                        </a:defRPr>
-                      </a:pPr>
-                      <a:r>
-                        <a:t>rhIL-15(1, 50 and 100 ng/ml)</a:t>
-                      </a:r>
-                    </a:p>
-                  </a:txBody>
-                  <a:tcPr/>
-                </a:tc>
-                <a:tc>
-                  <a:txBody>
-                    <a:bodyPr/>
-                    <a:lstStyle/>
-                    <a:p>
-                      <a:pPr>
-                        <a:defRPr sz="1100" b="0">
-                          <a:latin typeface="Arial"/>
-                        </a:defRPr>
-                      </a:pPr>
-                      <a:r>
-                        <a:t>IL-15 promotes hair follicles growth in </a:t>
-                      </a:r>
-                    </a:p>
-                  </a:txBody>
-                  <a:tcPr/>
-                </a:tc>
-              </a:tr>
-              <a:tr h="502920">
-                <a:tc>
-                  <a:txBody>
-                    <a:bodyPr/>
-                    <a:lstStyle/>
-                    <a:p>
-                      <a:pPr>
-                        <a:defRPr sz="1100" b="0">
-                          <a:latin typeface="Arial"/>
-                        </a:defRPr>
-                      </a:pPr>
-                      <a:r>
-                        <a:t>Seok et al., 2023 (75)</a:t>
-                      </a:r>
-                    </a:p>
-                  </a:txBody>
-                  <a:tcPr/>
-                </a:tc>
-                <a:tc>
-                  <a:txBody>
-                    <a:bodyPr/>
-                    <a:lstStyle/>
-                    <a:p>
-                      <a:pPr>
-                        <a:defRPr sz="1100" b="0">
-                          <a:latin typeface="Arial"/>
-                        </a:defRPr>
-                      </a:pPr>
-                      <a:r>
-                        <a:t>AA mouse model;cell culture</a:t>
-                      </a:r>
-                    </a:p>
-                  </a:txBody>
-                  <a:tcPr/>
-                </a:tc>
-                <a:tc>
-                  <a:txBody>
-                    <a:bodyPr/>
-                    <a:lstStyle/>
-                    <a:p>
-                      <a:pPr>
-                        <a:defRPr sz="1100" b="0">
-                          <a:latin typeface="Arial"/>
-                        </a:defRPr>
-                      </a:pPr>
-                      <a:r>
-                        <a:t>IL-15</a:t>
-                      </a:r>
-                    </a:p>
-                  </a:txBody>
-                  <a:tcPr/>
-                </a:tc>
-                <a:tc>
-                  <a:txBody>
-                    <a:bodyPr/>
-                    <a:lstStyle/>
-                    <a:p>
-                      <a:pPr>
-                        <a:defRPr sz="1100" b="0">
-                          <a:latin typeface="Arial"/>
-                        </a:defRPr>
-                      </a:pPr>
-                      <a:r>
-                        <a:t>IL-15 promotes the production of a new s</a:t>
-                      </a:r>
-                    </a:p>
-                  </a:txBody>
-                  <a:tcPr/>
-                </a:tc>
-              </a:tr>
-            </a:tbl>
-          </a:graphicData>
-        </a:graphic>
-      </p:graphicFrame>
-    </p:spTree>
-  </p:cSld>
-  <p:clrMapOvr>
-    <a:masterClrMapping/>
-  </p:clrMapOvr>
-</p:sld>
-</file>
-
-<file path=ppt/slides/slide5.xml><?xml version="1.0" encoding="utf-8"?>
 <p:sld xmlns:a="http://schemas.openxmlformats.org/drawingml/2006/main" xmlns:p="http://schemas.openxmlformats.org/presentationml/2006/main" xmlns:r="http://schemas.openxmlformats.org/officeDocument/2006/relationships">
   <p:cSld>
     <p:bg>
@@ -4930,7 +4445,7 @@
                 </a:solidFill>
                 <a:latin typeface="Arial"/>
               </a:rPr>
-              <a:t>Moreover, cytokine-based therapeutic strategies utilizing IL-2 or IL-15 have the capacity to expand effector T cell and NK cells, thereby offering a viable alternative immunotherapeutic approach for cancer treatment.</a:t>
+              <a:t>The collapse of the immunological privilege of hair follicles and activation of cytotoxic T-cell pathways, regulated by metabolic, psychological, and environmental variables, cause this disorder.</a:t>
             </a:r>
           </a:p>
         </p:txBody>
@@ -4943,7 +4458,7 @@
 </p:sld>
 </file>
 
-<file path=ppt/slides/slide6.xml><?xml version="1.0" encoding="utf-8"?>
+<file path=ppt/slides/slide5.xml><?xml version="1.0" encoding="utf-8"?>
 <p:sld xmlns:a="http://schemas.openxmlformats.org/drawingml/2006/main" xmlns:p="http://schemas.openxmlformats.org/presentationml/2006/main" xmlns:r="http://schemas.openxmlformats.org/officeDocument/2006/relationships">
   <p:cSld>
     <p:bg>
@@ -5072,7 +4587,7 @@
 </p:sld>
 </file>
 
-<file path=ppt/slides/slide7.xml><?xml version="1.0" encoding="utf-8"?>
+<file path=ppt/slides/slide6.xml><?xml version="1.0" encoding="utf-8"?>
 <p:sld xmlns:a="http://schemas.openxmlformats.org/drawingml/2006/main" xmlns:p="http://schemas.openxmlformats.org/presentationml/2006/main" xmlns:r="http://schemas.openxmlformats.org/officeDocument/2006/relationships">
   <p:cSld>
     <p:bg>
@@ -5133,7 +4648,7 @@
 </p:sld>
 </file>
 
-<file path=ppt/slides/slide8.xml><?xml version="1.0" encoding="utf-8"?>
+<file path=ppt/slides/slide7.xml><?xml version="1.0" encoding="utf-8"?>
 <p:sld xmlns:a="http://schemas.openxmlformats.org/drawingml/2006/main" xmlns:p="http://schemas.openxmlformats.org/presentationml/2006/main" xmlns:r="http://schemas.openxmlformats.org/officeDocument/2006/relationships">
   <p:cSld>
     <p:bg>
@@ -5217,9 +4732,9 @@
                 <a:latin typeface="Arial"/>
               </a:rPr>
               <a:t>[출처]
-논문: IL-15 in alopecia areata: the immune tolerance mechanistic insights and translational perspectives
-게재: Frontiers in medicine
-원문: https://pubmed.ncbi.nlm.nih.gov/42707815/
+논문: Understanding Alopecia Areata: An Integrative Review of Causes, Mechanisms, and Management Strategies
+게재: Recent advances in inflammation &amp; allergy drug discovery
+원문: https://pubmed.ncbi.nlm.nih.gov/42706968/
 [이미지 출처]
 - Male pattern baldness.jpg / Originally uploaded by Lkinkade (Transferred by XenonX3) / CC BY-SA 2.5
   https://commons.wikimedia.org/wiki/File:Male_pattern_baldness.jpg
@@ -5228,11 +4743,6 @@
 ※ CC BY-SA 이미지가 포함되어 있습니다. 저작자 표시가 필수이며,
   동일조건변경허락(ShareAlike) 조항이 영상 전체에 적용될 수 있으니
   상업적 이용 시 해당 이미지를 교체하는 편이 안전합니다.
-[논문 본문 그림·표]
-- PubMed Central PMC13548128 (재사용 가능 라이선스)
-  https://www.ncbi.nlm.nih.gov/pmc/articles/PMC13548128/
-  · Table 1
-  ※ 오픈액세스 논문의 그림·표이며, 위 원문 출처를 함께 표기하세요.
 </a:t>
             </a:r>
           </a:p>

--- a/pwa/data/latest/slides.pptx
+++ b/pwa/data/latest/slides.pptx
@@ -513,7 +513,7 @@
           </a:p>
           <a:p>
             <a:r>
-              <a:t>대본: JAK 억제제 오늘 나온 최신 연구를 정리했습니다</a:t>
+              <a:t>대본: 90% 이 숫자, 탈모 연구가 새로 내놨습니다</a:t>
             </a:r>
           </a:p>
           <a:p>
@@ -593,7 +593,7 @@
           </a:p>
           <a:p>
             <a:r>
-              <a:t>대본: 《Journal of the American Academy of Dermatology》 - Pediatric Alopecia Areata and JAK Inhibitors: Bridging the Gap Between Evidence and Practice</a:t>
+              <a:t>대본: 《Journal of the American Academy of Dermatology》 - Dose optimization of deuruxolitinib in adults with alopecia areata: A phase 2 randomized trial</a:t>
             </a:r>
           </a:p>
           <a:p>
@@ -673,7 +673,7 @@
           </a:p>
           <a:p>
             <a:r>
-              <a:t>대본: Alopecia areata (AA) is a chronic immune-mediated disorder characterized by nonscarring hair loss that frequently begins in childhood and is associated with substantial psychosocial burden.</a:t>
+              <a:t>대본: Objective: To evaluate the efficacy and safety of the Janus kinase 1/2 inhibitor deuruxolitinib dosed 8 mg twice daily (BID) or 16 mg once daily (QD) in adults with severe AA.</a:t>
             </a:r>
           </a:p>
           <a:p>
@@ -753,7 +753,7 @@
           </a:p>
           <a:p>
             <a:r>
-              <a:t>대본: Therapeutic options for pediatric AA remain limited, particularly for patients with extensive or treatment-resistant disease.</a:t>
+              <a:t>대본: Methods: In this phase 2 study (NCT03811912), patients were randomized to deuruxolitinib 8 mg BID or 16 mg QD.</a:t>
             </a:r>
           </a:p>
           <a:p>
@@ -3997,7 +3997,7 @@
                 </a:solidFill>
                 <a:latin typeface="Arial"/>
               </a:rPr>
-              <a:t>JAK 억제제</a:t>
+              <a:t>90%</a:t>
             </a:r>
           </a:p>
         </p:txBody>
@@ -4032,7 +4032,7 @@
                 </a:solidFill>
                 <a:latin typeface="Arial"/>
               </a:rPr>
-              <a:t>오늘 나온 최신 연구를 정리했습니다</a:t>
+              <a:t>이 숫자, 탈모 연구가 새로 내놨습니다</a:t>
             </a:r>
           </a:p>
         </p:txBody>
@@ -4152,7 +4152,7 @@
                 </a:solidFill>
                 <a:latin typeface="Arial"/>
               </a:rPr>
-              <a:t>Pediatric Alopecia Areata and JAK Inhibitors: Bridging the Gap Between Evidence and Practice</a:t>
+              <a:t>Dose optimization of deuruxolitinib in adults with alopecia areata: A phase 2 randomized trial</a:t>
             </a:r>
           </a:p>
         </p:txBody>
@@ -4316,7 +4316,7 @@
                 </a:solidFill>
                 <a:latin typeface="Arial"/>
               </a:rPr>
-              <a:t>Alopecia areata (AA) is a chronic immune-mediated disorder characterized by nonscarring hair loss that frequently begins in childhood and is associated with substantial psychosocial burden.</a:t>
+              <a:t>Objective: To evaluate the efficacy and safety of the Janus kinase 1/2 inhibitor deuruxolitinib dosed 8 mg twice daily (BID) or 16 mg once daily (QD) in adults with severe AA.</a:t>
             </a:r>
           </a:p>
         </p:txBody>
@@ -4445,7 +4445,7 @@
                 </a:solidFill>
                 <a:latin typeface="Arial"/>
               </a:rPr>
-              <a:t>Therapeutic options for pediatric AA remain limited, particularly for patients with extensive or treatment-resistant disease.</a:t>
+              <a:t>Methods: In this phase 2 study (NCT03811912), patients were randomized to deuruxolitinib 8 mg BID or 16 mg QD.</a:t>
             </a:r>
           </a:p>
         </p:txBody>
@@ -4732,9 +4732,9 @@
                 <a:latin typeface="Arial"/>
               </a:rPr>
               <a:t>[출처]
-논문: Pediatric Alopecia Areata and JAK Inhibitors: Bridging the Gap Between Evidence and Practice
+논문: Dose optimization of deuruxolitinib in adults with alopecia areata: A phase 2 randomized trial
 게재: Journal of the American Academy of Dermatology
-원문: https://pubmed.ncbi.nlm.nih.gov/42727783/
+원문: https://pubmed.ncbi.nlm.nih.gov/42727780/
 [이미지 출처]
 - Male pattern baldness.jpg / Originally uploaded by Lkinkade (Transferred by XenonX3) / CC BY-SA 2.5
   https://commons.wikimedia.org/wiki/File:Male_pattern_baldness.jpg

--- a/pwa/data/latest/slides.pptx
+++ b/pwa/data/latest/slides.pptx
@@ -12,6 +12,7 @@
     <p:sldId id="260" r:id="rId12"/>
     <p:sldId id="261" r:id="rId13"/>
     <p:sldId id="262" r:id="rId14"/>
+    <p:sldId id="263" r:id="rId15"/>
   </p:sldIdLst>
   <p:sldSz cx="5559552" cy="9875520" type="screen4x3"/>
   <p:notesSz cx="6858000" cy="9144000"/>
@@ -513,7 +514,7 @@
           </a:p>
           <a:p>
             <a:r>
-              <a:t>대본: 90% 이 숫자, 탈모 연구가 새로 내놨습니다</a:t>
+              <a:t>대본: 모발 재생 오늘 나온 최신 연구를 정리했습니다</a:t>
             </a:r>
           </a:p>
           <a:p>
@@ -593,7 +594,7 @@
           </a:p>
           <a:p>
             <a:r>
-              <a:t>대본: 《Journal of the American Academy of Dermatology》 - Dose optimization of deuruxolitinib in adults with alopecia areata: A phase 2 randomized trial</a:t>
+              <a:t>대본: 《The Journal of investigative dermatology》 - Contact hypersensitivity promotes hair regeneration through SPP1-secreting macrophages</a:t>
             </a:r>
           </a:p>
           <a:p>
@@ -673,7 +674,7 @@
           </a:p>
           <a:p>
             <a:r>
-              <a:t>대본: Objective: To evaluate the efficacy and safety of the Janus kinase 1/2 inhibitor deuruxolitinib dosed 8 mg twice daily (BID) or 16 mg once daily (QD) in adults with severe AA.</a:t>
+              <a:t>대본: Allergic contact dermatitis, or contact hypersensitivity (CHS), is a pathological adaptive immune response that paradoxically induces hair regeneration, yet its underlying mechanisms remain unclear.</a:t>
             </a:r>
           </a:p>
           <a:p>
@@ -753,7 +754,7 @@
           </a:p>
           <a:p>
             <a:r>
-              <a:t>대본: Methods: In this phase 2 study (NCT03811912), patients were randomized to deuruxolitinib 8 mg BID or 16 mg QD.</a:t>
+              <a:t>대본: We integrated high-resolution spatial transcriptomics and single-cell RNA sequencing to map the intricate interactions between immune cells, stroma, and hair follicles during CHS-induced hair growth in mice.</a:t>
             </a:r>
           </a:p>
           <a:p>
@@ -919,6 +920,81 @@
           <a:p>
             <a:r>
               <a:t>연출 노트: 원문 링크는 고정 댓글로 안내.</a:t>
+            </a:r>
+          </a:p>
+        </p:txBody>
+      </p:sp>
+      <p:sp>
+        <p:nvSpPr>
+          <p:cNvPr id="4" name="Slide Number Placeholder 3"/>
+          <p:cNvSpPr>
+            <a:spLocks noGrp="1"/>
+          </p:cNvSpPr>
+          <p:nvPr>
+            <p:ph type="sldNum" idx="5" sz="quarter"/>
+          </p:nvPr>
+        </p:nvSpPr>
+        <p:spPr/>
+      </p:sp>
+    </p:spTree>
+  </p:cSld>
+  <p:clrMapOvr>
+    <a:masterClrMapping/>
+  </p:clrMapOvr>
+</p:notes>
+</file>
+
+<file path=ppt/notesSlides/notesSlide7.xml><?xml version="1.0" encoding="utf-8"?>
+<p:notes xmlns:a="http://schemas.openxmlformats.org/drawingml/2006/main" xmlns:p="http://schemas.openxmlformats.org/presentationml/2006/main" xmlns:r="http://schemas.openxmlformats.org/officeDocument/2006/relationships">
+  <p:cSld>
+    <p:spTree>
+      <p:nvGrpSpPr>
+        <p:cNvPr id="1" name=""/>
+        <p:cNvGrpSpPr/>
+        <p:nvPr/>
+      </p:nvGrpSpPr>
+      <p:grpSpPr>
+        <a:xfrm>
+          <a:off x="0" y="0"/>
+          <a:ext cx="0" cy="0"/>
+          <a:chOff x="0" y="0"/>
+          <a:chExt cx="0" cy="0"/>
+        </a:xfrm>
+      </p:grpSpPr>
+      <p:sp>
+        <p:nvSpPr>
+          <p:cNvPr id="2" name="Slide Image Placeholder 1"/>
+          <p:cNvSpPr>
+            <a:spLocks noGrp="1"/>
+          </p:cNvSpPr>
+          <p:nvPr>
+            <p:ph type="sldImg" idx="2"/>
+          </p:nvPr>
+        </p:nvSpPr>
+        <p:spPr/>
+      </p:sp>
+      <p:sp>
+        <p:nvSpPr>
+          <p:cNvPr id="3" name="Notes Placeholder 2"/>
+          <p:cNvSpPr>
+            <a:spLocks noGrp="1"/>
+          </p:cNvSpPr>
+          <p:nvPr>
+            <p:ph type="body" idx="3" sz="quarter"/>
+          </p:nvPr>
+        </p:nvSpPr>
+        <p:spPr/>
+        <p:txBody>
+          <a:bodyPr/>
+          <a:lstStyle/>
+          <a:p>
+            <a:r>
+              <a:t>편집 참고용 슬라이드입니다. 영상에는 쓰지 않아도 됩니다.</a:t>
+            </a:r>
+          </a:p>
+          <a:p>
+            <a:r>
+              <a:t>원문 영어 문장을 그대로 발췌했으므로 번역·검수 후 사용하세요.</a:t>
             </a:r>
           </a:p>
         </p:txBody>
@@ -3962,7 +4038,7 @@
                 </a:solidFill>
                 <a:latin typeface="Arial"/>
               </a:rPr>
-              <a:t>JOURNAL OF THE AMERICAN ACADEMY OF DERMA</a:t>
+              <a:t>THE JOURNAL OF INVESTIGATIVE DERMATOLOGY</a:t>
             </a:r>
           </a:p>
         </p:txBody>
@@ -3997,7 +4073,7 @@
                 </a:solidFill>
                 <a:latin typeface="Arial"/>
               </a:rPr>
-              <a:t>90%</a:t>
+              <a:t>모발 재생</a:t>
             </a:r>
           </a:p>
         </p:txBody>
@@ -4032,7 +4108,7 @@
                 </a:solidFill>
                 <a:latin typeface="Arial"/>
               </a:rPr>
-              <a:t>이 숫자, 탈모 연구가 새로 내놨습니다</a:t>
+              <a:t>오늘 나온 최신 연구를 정리했습니다</a:t>
             </a:r>
           </a:p>
         </p:txBody>
@@ -4152,7 +4228,7 @@
                 </a:solidFill>
                 <a:latin typeface="Arial"/>
               </a:rPr>
-              <a:t>Dose optimization of deuruxolitinib in adults with alopecia areata: A phase 2 randomized trial</a:t>
+              <a:t>Contact hypersensitivity promotes hair regeneration through SPP1-secreting macrophages</a:t>
             </a:r>
           </a:p>
         </p:txBody>
@@ -4187,7 +4263,7 @@
                 </a:solidFill>
                 <a:latin typeface="Arial"/>
               </a:rPr>
-              <a:t>Journal of the American Academy of Dermatology  ·  2026 Sep 11</a:t>
+              <a:t>The Journal of investigative dermatology  ·  2026 Sep 11</a:t>
             </a:r>
           </a:p>
         </p:txBody>
@@ -4316,7 +4392,7 @@
                 </a:solidFill>
                 <a:latin typeface="Arial"/>
               </a:rPr>
-              <a:t>Objective: To evaluate the efficacy and safety of the Janus kinase 1/2 inhibitor deuruxolitinib dosed 8 mg twice daily (BID) or 16 mg once daily (QD) in adults with severe AA.</a:t>
+              <a:t>Allergic contact dermatitis, or contact hypersensitivity (CHS), is a pathological adaptive immune response that paradoxically induces hair regeneration, yet its underlying mechanisms remain unclear.</a:t>
             </a:r>
           </a:p>
         </p:txBody>
@@ -4445,7 +4521,7 @@
                 </a:solidFill>
                 <a:latin typeface="Arial"/>
               </a:rPr>
-              <a:t>Methods: In this phase 2 study (NCT03811912), patients were randomized to deuruxolitinib 8 mg BID or 16 mg QD.</a:t>
+              <a:t>We integrated high-resolution spatial transcriptomics and single-cell RNA sequencing to map the intricate interactions between immune cells, stroma, and hair follicles during CHS-induced hair growth in mice.</a:t>
             </a:r>
           </a:p>
         </p:txBody>
@@ -4674,6 +4750,144 @@
         </p:nvSpPr>
         <p:spPr>
           <a:xfrm>
+            <a:off x="365760" y="457200"/>
+            <a:ext cx="4828032" cy="457200"/>
+          </a:xfrm>
+          <a:prstGeom prst="rect">
+            <a:avLst/>
+          </a:prstGeom>
+          <a:noFill/>
+        </p:spPr>
+        <p:txBody>
+          <a:bodyPr wrap="square" anchor="ctr">
+            <a:spAutoFit/>
+          </a:bodyPr>
+          <a:lstStyle/>
+          <a:p>
+            <a:pPr algn="l"/>
+            <a:r>
+              <a:rPr sz="1600" b="1">
+                <a:solidFill>
+                  <a:srgbClr val="FF6B6B"/>
+                </a:solidFill>
+                <a:latin typeface="Arial"/>
+              </a:rPr>
+              <a:t>본문 요약 (편집용)</a:t>
+            </a:r>
+          </a:p>
+        </p:txBody>
+      </p:sp>
+      <p:sp>
+        <p:nvSpPr>
+          <p:cNvPr id="3" name="TextBox 2"/>
+          <p:cNvSpPr txBox="1"/>
+          <p:nvPr/>
+        </p:nvSpPr>
+        <p:spPr>
+          <a:xfrm>
+            <a:off x="365760" y="1097280"/>
+            <a:ext cx="4828032" cy="457200"/>
+          </a:xfrm>
+          <a:prstGeom prst="rect">
+            <a:avLst/>
+          </a:prstGeom>
+          <a:noFill/>
+        </p:spPr>
+        <p:txBody>
+          <a:bodyPr wrap="square" anchor="t">
+            <a:spAutoFit/>
+          </a:bodyPr>
+          <a:lstStyle/>
+          <a:p>
+            <a:pPr algn="l"/>
+            <a:r>
+              <a:rPr sz="1300" b="1">
+                <a:solidFill>
+                  <a:srgbClr val="FFFFFF"/>
+                </a:solidFill>
+                <a:latin typeface="Arial"/>
+              </a:rPr>
+              <a:t>◆ 초록 요약 — Abstract</a:t>
+            </a:r>
+          </a:p>
+        </p:txBody>
+      </p:sp>
+      <p:sp>
+        <p:nvSpPr>
+          <p:cNvPr id="4" name="TextBox 3"/>
+          <p:cNvSpPr txBox="1"/>
+          <p:nvPr/>
+        </p:nvSpPr>
+        <p:spPr>
+          <a:xfrm>
+            <a:off x="457200" y="1600200"/>
+            <a:ext cx="4736592" cy="3566160"/>
+          </a:xfrm>
+          <a:prstGeom prst="rect">
+            <a:avLst/>
+          </a:prstGeom>
+          <a:noFill/>
+        </p:spPr>
+        <p:txBody>
+          <a:bodyPr wrap="square" anchor="t">
+            <a:spAutoFit/>
+          </a:bodyPr>
+          <a:lstStyle/>
+          <a:p>
+            <a:pPr algn="l"/>
+            <a:r>
+              <a:rPr sz="1000" b="0">
+                <a:solidFill>
+                  <a:srgbClr val="D5D8EA"/>
+                </a:solidFill>
+                <a:latin typeface="Arial"/>
+              </a:rPr>
+              <a:t>· Allergic contact dermatitis, or contact hypersensitivity (CHS), is a pathological adaptive immune response that paradoxically induces hair regeneration, yet its underlying mechanisms remain unclear.
+· We integrated high-resolution spatial transcriptomics and single-cell RNA sequencing to map the intricate interactions between immune cells, stroma, and hair follicles during CHS-induced hair growth in mice.
+· Among all immunocytes, macrophages underwent the most prominent compositional and functional remodeling.
+· We resolved five transcriptionally distinct macrophage subsets, with contact hypersensitivity driving a shift from homeostatic antigen-presenting cells toward a pro-inflammatory CD14+SPP1+ population.
+· Trajectory analysis revealed divergent differentiation paths under homeostatic versus allergic conditions, highlighting the plasticity of skin macrophages.
+· Mechanistically, CD14+SPP1+ macrophages secreted SPP1 (osteopontin), which engaged CD44 on hair follicle stem cells to activate PI3K-AKT signaling and trigger their proliferation.
+· Notably, canonical pro-inflammatory cytokine signaling through TNF-α and IL-1 was dispensable for this process, underscoring the specificity of the SPP1-CD44 axis in immune-mediated hair regeneration.
+· These findings reveal a macrophage-dependent mechanism of immune-mediated hair regeneration, offering therapeutic insights into immune-stem cell crosstalk.</a:t>
+            </a:r>
+          </a:p>
+        </p:txBody>
+      </p:sp>
+    </p:spTree>
+  </p:cSld>
+  <p:clrMapOvr>
+    <a:masterClrMapping/>
+  </p:clrMapOvr>
+</p:sld>
+</file>
+
+<file path=ppt/slides/slide8.xml><?xml version="1.0" encoding="utf-8"?>
+<p:sld xmlns:a="http://schemas.openxmlformats.org/drawingml/2006/main" xmlns:p="http://schemas.openxmlformats.org/presentationml/2006/main" xmlns:r="http://schemas.openxmlformats.org/officeDocument/2006/relationships">
+  <p:cSld>
+    <p:bg>
+      <p:bgPr>
+        <a:solidFill>
+          <a:srgbClr val="12142A"/>
+        </a:solidFill>
+        <a:effectLst/>
+      </p:bgPr>
+    </p:bg>
+    <p:spTree>
+      <p:nvGrpSpPr>
+        <p:cNvPr id="1" name=""/>
+        <p:cNvGrpSpPr/>
+        <p:nvPr/>
+      </p:nvGrpSpPr>
+      <p:grpSpPr/>
+      <p:sp>
+        <p:nvSpPr>
+          <p:cNvPr id="2" name="TextBox 1"/>
+          <p:cNvSpPr txBox="1"/>
+          <p:nvPr/>
+        </p:nvSpPr>
+        <p:spPr>
+          <a:xfrm>
             <a:off x="365760" y="731520"/>
             <a:ext cx="4828032" cy="548640"/>
           </a:xfrm>
@@ -4732,9 +4946,9 @@
                 <a:latin typeface="Arial"/>
               </a:rPr>
               <a:t>[출처]
-논문: Dose optimization of deuruxolitinib in adults with alopecia areata: A phase 2 randomized trial
-게재: Journal of the American Academy of Dermatology
-원문: https://pubmed.ncbi.nlm.nih.gov/42727780/
+논문: Contact hypersensitivity promotes hair regeneration through SPP1-secreting macrophages
+게재: The Journal of investigative dermatology
+원문: https://pubmed.ncbi.nlm.nih.gov/42727722/
 [이미지 출처]
 - Male pattern baldness.jpg / Originally uploaded by Lkinkade (Transferred by XenonX3) / CC BY-SA 2.5
   https://commons.wikimedia.org/wiki/File:Male_pattern_baldness.jpg

--- a/pwa/data/latest/slides.pptx
+++ b/pwa/data/latest/slides.pptx
@@ -13,6 +13,7 @@
     <p:sldId id="261" r:id="rId13"/>
     <p:sldId id="262" r:id="rId14"/>
     <p:sldId id="263" r:id="rId15"/>
+    <p:sldId id="264" r:id="rId16"/>
   </p:sldIdLst>
   <p:sldSz cx="5559552" cy="9875520" type="screen4x3"/>
   <p:notesSz cx="6858000" cy="9144000"/>
@@ -514,7 +515,7 @@
           </a:p>
           <a:p>
             <a:r>
-              <a:t>대본: 모발 재생 오늘 나온 최신 연구를 정리했습니다</a:t>
+              <a:t>대본: 오늘의 논문 Plant physiology and biochemistry에 실린 새 연구입니다</a:t>
             </a:r>
           </a:p>
           <a:p>
@@ -594,7 +595,7 @@
           </a:p>
           <a:p>
             <a:r>
-              <a:t>대본: 《The Journal of investigative dermatology》 - Contact hypersensitivity promotes hair regeneration through SPP1-secreting macrophages</a:t>
+              <a:t>대본: 《Plant physiology and biochemistry : PPB》 - Enhanced drought tolerance in Arabidopsis thaliana is mediated by Pseudomonas sp. M25 linked to root hair growth</a:t>
             </a:r>
           </a:p>
           <a:p>
@@ -674,7 +675,7 @@
           </a:p>
           <a:p>
             <a:r>
-              <a:t>대본: Allergic contact dermatitis, or contact hypersensitivity (CHS), is a pathological adaptive immune response that paradoxically induces hair regeneration, yet its underlying mechanisms remain unclear.</a:t>
+              <a:t>대본: Plants establish intimate associations with rhizosphere microorganisms that profoundly influence their growth, development, and stress resilience.</a:t>
             </a:r>
           </a:p>
           <a:p>
@@ -754,7 +755,7 @@
           </a:p>
           <a:p>
             <a:r>
-              <a:t>대본: We integrated high-resolution spatial transcriptomics and single-cell RNA sequencing to map the intricate interactions between immune cells, stroma, and hair follicles during CHS-induced hair growth in mice.</a:t>
+              <a:t>대본: Among these, plant-growth-promoting rhizobacteria (PGPR) enhance nutrient acquisition, modulate phytohormone homeostasis and reshape root system architecture, thereby improving plant fitness.</a:t>
             </a:r>
           </a:p>
           <a:p>
@@ -945,6 +946,81 @@
 </file>
 
 <file path=ppt/notesSlides/notesSlide7.xml><?xml version="1.0" encoding="utf-8"?>
+<p:notes xmlns:a="http://schemas.openxmlformats.org/drawingml/2006/main" xmlns:p="http://schemas.openxmlformats.org/presentationml/2006/main" xmlns:r="http://schemas.openxmlformats.org/officeDocument/2006/relationships">
+  <p:cSld>
+    <p:spTree>
+      <p:nvGrpSpPr>
+        <p:cNvPr id="1" name=""/>
+        <p:cNvGrpSpPr/>
+        <p:nvPr/>
+      </p:nvGrpSpPr>
+      <p:grpSpPr>
+        <a:xfrm>
+          <a:off x="0" y="0"/>
+          <a:ext cx="0" cy="0"/>
+          <a:chOff x="0" y="0"/>
+          <a:chExt cx="0" cy="0"/>
+        </a:xfrm>
+      </p:grpSpPr>
+      <p:sp>
+        <p:nvSpPr>
+          <p:cNvPr id="2" name="Slide Image Placeholder 1"/>
+          <p:cNvSpPr>
+            <a:spLocks noGrp="1"/>
+          </p:cNvSpPr>
+          <p:nvPr>
+            <p:ph type="sldImg" idx="2"/>
+          </p:nvPr>
+        </p:nvSpPr>
+        <p:spPr/>
+      </p:sp>
+      <p:sp>
+        <p:nvSpPr>
+          <p:cNvPr id="3" name="Notes Placeholder 2"/>
+          <p:cNvSpPr>
+            <a:spLocks noGrp="1"/>
+          </p:cNvSpPr>
+          <p:nvPr>
+            <p:ph type="body" idx="3" sz="quarter"/>
+          </p:nvPr>
+        </p:nvSpPr>
+        <p:spPr/>
+        <p:txBody>
+          <a:bodyPr/>
+          <a:lstStyle/>
+          <a:p>
+            <a:r>
+              <a:t>편집 참고용 슬라이드입니다. 영상에는 쓰지 않아도 됩니다.</a:t>
+            </a:r>
+          </a:p>
+          <a:p>
+            <a:r>
+              <a:t>원문 영어 문장을 그대로 발췌했으므로 번역·검수 후 사용하세요.</a:t>
+            </a:r>
+          </a:p>
+        </p:txBody>
+      </p:sp>
+      <p:sp>
+        <p:nvSpPr>
+          <p:cNvPr id="4" name="Slide Number Placeholder 3"/>
+          <p:cNvSpPr>
+            <a:spLocks noGrp="1"/>
+          </p:cNvSpPr>
+          <p:nvPr>
+            <p:ph type="sldNum" idx="5" sz="quarter"/>
+          </p:nvPr>
+        </p:nvSpPr>
+        <p:spPr/>
+      </p:sp>
+    </p:spTree>
+  </p:cSld>
+  <p:clrMapOvr>
+    <a:masterClrMapping/>
+  </p:clrMapOvr>
+</p:notes>
+</file>
+
+<file path=ppt/notesSlides/notesSlide8.xml><?xml version="1.0" encoding="utf-8"?>
 <p:notes xmlns:a="http://schemas.openxmlformats.org/drawingml/2006/main" xmlns:p="http://schemas.openxmlformats.org/presentationml/2006/main" xmlns:r="http://schemas.openxmlformats.org/officeDocument/2006/relationships">
   <p:cSld>
     <p:spTree>
@@ -4038,7 +4114,7 @@
                 </a:solidFill>
                 <a:latin typeface="Arial"/>
               </a:rPr>
-              <a:t>THE JOURNAL OF INVESTIGATIVE DERMATOLOGY</a:t>
+              <a:t>PLANT PHYSIOLOGY AND BIOCHEMISTRY : PPB</a:t>
             </a:r>
           </a:p>
         </p:txBody>
@@ -4073,7 +4149,7 @@
                 </a:solidFill>
                 <a:latin typeface="Arial"/>
               </a:rPr>
-              <a:t>모발 재생</a:t>
+              <a:t>오늘의 논문</a:t>
             </a:r>
           </a:p>
         </p:txBody>
@@ -4108,7 +4184,7 @@
                 </a:solidFill>
                 <a:latin typeface="Arial"/>
               </a:rPr>
-              <a:t>오늘 나온 최신 연구를 정리했습니다</a:t>
+              <a:t>Plant physiology and biochemistry에 실린 새 연구입니다</a:t>
             </a:r>
           </a:p>
         </p:txBody>
@@ -4143,7 +4219,7 @@
                 </a:solidFill>
                 <a:latin typeface="Arial"/>
               </a:rPr>
-              <a:t>2026 Sep 11  |  매일 아침 탈모 연구 한 편</a:t>
+              <a:t>2026 Sep 7  |  매일 아침 탈모 연구 한 편</a:t>
             </a:r>
           </a:p>
         </p:txBody>
@@ -4228,7 +4304,7 @@
                 </a:solidFill>
                 <a:latin typeface="Arial"/>
               </a:rPr>
-              <a:t>Contact hypersensitivity promotes hair regeneration through SPP1-secreting macrophages</a:t>
+              <a:t>Enhanced drought tolerance in Arabidopsis thaliana is mediated by Pseudomonas sp. M25 linked to root hair growth</a:t>
             </a:r>
           </a:p>
         </p:txBody>
@@ -4263,7 +4339,7 @@
                 </a:solidFill>
                 <a:latin typeface="Arial"/>
               </a:rPr>
-              <a:t>The Journal of investigative dermatology  ·  2026 Sep 11</a:t>
+              <a:t>Plant physiology and biochemistry : PPB  ·  2026 Sep 7</a:t>
             </a:r>
           </a:p>
         </p:txBody>
@@ -4392,7 +4468,7 @@
                 </a:solidFill>
                 <a:latin typeface="Arial"/>
               </a:rPr>
-              <a:t>Allergic contact dermatitis, or contact hypersensitivity (CHS), is a pathological adaptive immune response that paradoxically induces hair regeneration, yet its underlying mechanisms remain unclear.</a:t>
+              <a:t>Plants establish intimate associations with rhizosphere microorganisms that profoundly influence their growth, development, and stress resilience.</a:t>
             </a:r>
           </a:p>
         </p:txBody>
@@ -4521,7 +4597,7 @@
                 </a:solidFill>
                 <a:latin typeface="Arial"/>
               </a:rPr>
-              <a:t>We integrated high-resolution spatial transcriptomics and single-cell RNA sequencing to map the intricate interactions between immune cells, stroma, and hair follicles during CHS-induced hair growth in mice.</a:t>
+              <a:t>Among these, plant-growth-promoting rhizobacteria (PGPR) enhance nutrient acquisition, modulate phytohormone homeostasis and reshape root system architecture, thereby improving plant fitness.</a:t>
             </a:r>
           </a:p>
         </p:txBody>
@@ -4807,7 +4883,7 @@
                 </a:solidFill>
                 <a:latin typeface="Arial"/>
               </a:rPr>
-              <a:t>◆ 초록 요약 — Abstract</a:t>
+              <a:t>◆ 배경 — Background (자동 구분)</a:t>
             </a:r>
           </a:p>
         </p:txBody>
@@ -4842,14 +4918,83 @@
                 </a:solidFill>
                 <a:latin typeface="Arial"/>
               </a:rPr>
-              <a:t>· Allergic contact dermatitis, or contact hypersensitivity (CHS), is a pathological adaptive immune response that paradoxically induces hair regeneration, yet its underlying mechanisms remain unclear.
-· We integrated high-resolution spatial transcriptomics and single-cell RNA sequencing to map the intricate interactions between immune cells, stroma, and hair follicles during CHS-induced hair growth in mice.
-· Among all immunocytes, macrophages underwent the most prominent compositional and functional remodeling.
-· We resolved five transcriptionally distinct macrophage subsets, with contact hypersensitivity driving a shift from homeostatic antigen-presenting cells toward a pro-inflammatory CD14+SPP1+ population.
-· Trajectory analysis revealed divergent differentiation paths under homeostatic versus allergic conditions, highlighting the plasticity of skin macrophages.
-· Mechanistically, CD14+SPP1+ macrophages secreted SPP1 (osteopontin), which engaged CD44 on hair follicle stem cells to activate PI3K-AKT signaling and trigger their proliferation.
-· Notably, canonical pro-inflammatory cytokine signaling through TNF-α and IL-1 was dispensable for this process, underscoring the specificity of the SPP1-CD44 axis in immune-mediated hair regeneration.
-· These findings reveal a macrophage-dependent mechanism of immune-mediated hair regeneration, offering therapeutic insights into immune-stem cell crosstalk.</a:t>
+              <a:t>· Plants establish intimate associations with rhizosphere microorganisms that profoundly influence their growth, development, and stress resilience.
+· Among these, plant-growth-promoting rhizobacteria (PGPR) enhance nutrient acquisition, modulate phytohormone homeostasis and reshape root system architecture, thereby improving plant fitness.
+· Despite extensive evidence supporting their beneficial effects, the molecular and cellular mechanisms underlying microbe-driven modulation of specific root traits remain incompletely understood.</a:t>
+            </a:r>
+          </a:p>
+        </p:txBody>
+      </p:sp>
+      <p:sp>
+        <p:nvSpPr>
+          <p:cNvPr id="5" name="TextBox 4"/>
+          <p:cNvSpPr txBox="1"/>
+          <p:nvPr/>
+        </p:nvSpPr>
+        <p:spPr>
+          <a:xfrm>
+            <a:off x="365760" y="5303520"/>
+            <a:ext cx="4828032" cy="457200"/>
+          </a:xfrm>
+          <a:prstGeom prst="rect">
+            <a:avLst/>
+          </a:prstGeom>
+          <a:noFill/>
+        </p:spPr>
+        <p:txBody>
+          <a:bodyPr wrap="square" anchor="t">
+            <a:spAutoFit/>
+          </a:bodyPr>
+          <a:lstStyle/>
+          <a:p>
+            <a:pPr algn="l"/>
+            <a:r>
+              <a:rPr sz="1300" b="1">
+                <a:solidFill>
+                  <a:srgbClr val="FFFFFF"/>
+                </a:solidFill>
+                <a:latin typeface="Arial"/>
+              </a:rPr>
+              <a:t>◆ 주요 결과 — Results (자동 구분)</a:t>
+            </a:r>
+          </a:p>
+        </p:txBody>
+      </p:sp>
+      <p:sp>
+        <p:nvSpPr>
+          <p:cNvPr id="6" name="TextBox 5"/>
+          <p:cNvSpPr txBox="1"/>
+          <p:nvPr/>
+        </p:nvSpPr>
+        <p:spPr>
+          <a:xfrm>
+            <a:off x="457200" y="5806440"/>
+            <a:ext cx="4736592" cy="3566160"/>
+          </a:xfrm>
+          <a:prstGeom prst="rect">
+            <a:avLst/>
+          </a:prstGeom>
+          <a:noFill/>
+        </p:spPr>
+        <p:txBody>
+          <a:bodyPr wrap="square" anchor="t">
+            <a:spAutoFit/>
+          </a:bodyPr>
+          <a:lstStyle/>
+          <a:p>
+            <a:pPr algn="l"/>
+            <a:r>
+              <a:rPr sz="1000" b="0">
+                <a:solidFill>
+                  <a:srgbClr val="D5D8EA"/>
+                </a:solidFill>
+                <a:latin typeface="Arial"/>
+              </a:rPr>
+              <a:t>· Through extensive phenotypic investigation, we established that Pseudomonas sp.
+· M25, a previously described PGPR strain, produces a significant increase in leaf relative water content and evapotranspiration of Arabidopsis thaliana without impacting on rosette growth or photosynthetic parameters.
+· Inoculation with M25 leads to enhanced drought tolerance, and this is associated not with changes in root architecture but with a marked increase in root hair (RH) abundance and length.
+· The stimulation of RH development by this Pseudomonas strain is based on the genetic requirement for RH-related basic helix-loop-helix family transcription factors, including ROOT HAIR DEFECTIVE 6 (RHD6) and RHD6-LIKE 1 (RSL1), which regulate RH development via RHD6-LIKE 4 (RSL4) and RHD6-LIKE 2 (RSL2).
+· M25 can partially circumvent the lack of RHD6 but requires RSL1 and the downstream transcription factors RSL2 and RSL4 to induce RH growth.</a:t>
             </a:r>
           </a:p>
         </p:txBody>
@@ -4888,6 +5033,137 @@
         </p:nvSpPr>
         <p:spPr>
           <a:xfrm>
+            <a:off x="365760" y="457200"/>
+            <a:ext cx="4828032" cy="457200"/>
+          </a:xfrm>
+          <a:prstGeom prst="rect">
+            <a:avLst/>
+          </a:prstGeom>
+          <a:noFill/>
+        </p:spPr>
+        <p:txBody>
+          <a:bodyPr wrap="square" anchor="ctr">
+            <a:spAutoFit/>
+          </a:bodyPr>
+          <a:lstStyle/>
+          <a:p>
+            <a:pPr algn="l"/>
+            <a:r>
+              <a:rPr sz="1600" b="1">
+                <a:solidFill>
+                  <a:srgbClr val="FF6B6B"/>
+                </a:solidFill>
+                <a:latin typeface="Arial"/>
+              </a:rPr>
+              <a:t>본문 요약 (편집용)</a:t>
+            </a:r>
+          </a:p>
+        </p:txBody>
+      </p:sp>
+      <p:sp>
+        <p:nvSpPr>
+          <p:cNvPr id="3" name="TextBox 2"/>
+          <p:cNvSpPr txBox="1"/>
+          <p:nvPr/>
+        </p:nvSpPr>
+        <p:spPr>
+          <a:xfrm>
+            <a:off x="365760" y="1097280"/>
+            <a:ext cx="4828032" cy="457200"/>
+          </a:xfrm>
+          <a:prstGeom prst="rect">
+            <a:avLst/>
+          </a:prstGeom>
+          <a:noFill/>
+        </p:spPr>
+        <p:txBody>
+          <a:bodyPr wrap="square" anchor="t">
+            <a:spAutoFit/>
+          </a:bodyPr>
+          <a:lstStyle/>
+          <a:p>
+            <a:pPr algn="l"/>
+            <a:r>
+              <a:rPr sz="1300" b="1">
+                <a:solidFill>
+                  <a:srgbClr val="FFFFFF"/>
+                </a:solidFill>
+                <a:latin typeface="Arial"/>
+              </a:rPr>
+              <a:t>◆ 결론 — Conclusion (자동 구분)</a:t>
+            </a:r>
+          </a:p>
+        </p:txBody>
+      </p:sp>
+      <p:sp>
+        <p:nvSpPr>
+          <p:cNvPr id="4" name="TextBox 3"/>
+          <p:cNvSpPr txBox="1"/>
+          <p:nvPr/>
+        </p:nvSpPr>
+        <p:spPr>
+          <a:xfrm>
+            <a:off x="457200" y="1600200"/>
+            <a:ext cx="4736592" cy="3566160"/>
+          </a:xfrm>
+          <a:prstGeom prst="rect">
+            <a:avLst/>
+          </a:prstGeom>
+          <a:noFill/>
+        </p:spPr>
+        <p:txBody>
+          <a:bodyPr wrap="square" anchor="t">
+            <a:spAutoFit/>
+          </a:bodyPr>
+          <a:lstStyle/>
+          <a:p>
+            <a:pPr algn="l"/>
+            <a:r>
+              <a:rPr sz="1000" b="0">
+                <a:solidFill>
+                  <a:srgbClr val="D5D8EA"/>
+                </a:solidFill>
+                <a:latin typeface="Arial"/>
+              </a:rPr>
+              <a:t>· These findings indicate that this bacterium can circumvent RHD6 to activate RSL4, which subsequently promotes RH growth.</a:t>
+            </a:r>
+          </a:p>
+        </p:txBody>
+      </p:sp>
+    </p:spTree>
+  </p:cSld>
+  <p:clrMapOvr>
+    <a:masterClrMapping/>
+  </p:clrMapOvr>
+</p:sld>
+</file>
+
+<file path=ppt/slides/slide9.xml><?xml version="1.0" encoding="utf-8"?>
+<p:sld xmlns:a="http://schemas.openxmlformats.org/drawingml/2006/main" xmlns:p="http://schemas.openxmlformats.org/presentationml/2006/main" xmlns:r="http://schemas.openxmlformats.org/officeDocument/2006/relationships">
+  <p:cSld>
+    <p:bg>
+      <p:bgPr>
+        <a:solidFill>
+          <a:srgbClr val="12142A"/>
+        </a:solidFill>
+        <a:effectLst/>
+      </p:bgPr>
+    </p:bg>
+    <p:spTree>
+      <p:nvGrpSpPr>
+        <p:cNvPr id="1" name=""/>
+        <p:cNvGrpSpPr/>
+        <p:nvPr/>
+      </p:nvGrpSpPr>
+      <p:grpSpPr/>
+      <p:sp>
+        <p:nvSpPr>
+          <p:cNvPr id="2" name="TextBox 1"/>
+          <p:cNvSpPr txBox="1"/>
+          <p:nvPr/>
+        </p:nvSpPr>
+        <p:spPr>
+          <a:xfrm>
             <a:off x="365760" y="731520"/>
             <a:ext cx="4828032" cy="548640"/>
           </a:xfrm>
@@ -4946,9 +5222,9 @@
                 <a:latin typeface="Arial"/>
               </a:rPr>
               <a:t>[출처]
-논문: Contact hypersensitivity promotes hair regeneration through SPP1-secreting macrophages
-게재: The Journal of investigative dermatology
-원문: https://pubmed.ncbi.nlm.nih.gov/42727722/
+논문: Enhanced drought tolerance in Arabidopsis thaliana is mediated by Pseudomonas sp. M25 linked to root hair growth
+게재: Plant physiology and biochemistry : PPB
+원문: https://pubmed.ncbi.nlm.nih.gov/42727487/
 [이미지 출처]
 - Male pattern baldness.jpg / Originally uploaded by Lkinkade (Transferred by XenonX3) / CC BY-SA 2.5
   https://commons.wikimedia.org/wiki/File:Male_pattern_baldness.jpg

--- a/pwa/data/latest/slides.pptx
+++ b/pwa/data/latest/slides.pptx
@@ -11,9 +11,6 @@
     <p:sldId id="259" r:id="rId11"/>
     <p:sldId id="260" r:id="rId12"/>
     <p:sldId id="261" r:id="rId13"/>
-    <p:sldId id="262" r:id="rId14"/>
-    <p:sldId id="263" r:id="rId15"/>
-    <p:sldId id="264" r:id="rId16"/>
   </p:sldIdLst>
   <p:sldSz cx="5559552" cy="9875520" type="screen4x3"/>
   <p:notesSz cx="6858000" cy="9144000"/>
@@ -515,7 +512,7 @@
           </a:p>
           <a:p>
             <a:r>
-              <a:t>대본: 오늘의 논문 Plant physiology and biochemistry에 실린 새 연구입니다</a:t>
+              <a:t>대본: 탈모 뉴스 오늘 나온 소식을 3줄로 정리했습니다</a:t>
             </a:r>
           </a:p>
           <a:p>
@@ -595,7 +592,7 @@
           </a:p>
           <a:p>
             <a:r>
-              <a:t>대본: 《Plant physiology and biochemistry : PPB》 - Enhanced drought tolerance in Arabidopsis thaliana is mediated by Pseudomonas sp. M25 linked to root hair growth</a:t>
+              <a:t>대본: [에이피알] 에이피알, 고주파 미세천공 기술 기반 탈모 치료 효능 연구 국제 학술지 게재 - 에이피알 공식 블로그</a:t>
             </a:r>
           </a:p>
           <a:p>
@@ -675,7 +672,7 @@
           </a:p>
           <a:p>
             <a:r>
-              <a:t>대본: Plants establish intimate associations with rhizosphere microorganisms that profoundly influence their growth, development, and stress resilience.</a:t>
+              <a:t>대본: [에이피알] 에이피알, 고주파 미세천공 기술 기반 탈모 치료 효능 연구 국제 학술지 게재&amp;nbsp;&amp;nbsp;에이피알 공식 블로그</a:t>
             </a:r>
           </a:p>
           <a:p>
@@ -750,17 +747,17 @@
           <a:lstStyle/>
           <a:p>
             <a:r>
-              <a:t>[key_finding_2] 약 10초</a:t>
-            </a:r>
-          </a:p>
-          <a:p>
-            <a:r>
-              <a:t>대본: Among these, plant-growth-promoting rhizobacteria (PGPR) enhance nutrient acquisition, modulate phytohormone homeostasis and reshape root system architecture, thereby improving plant fitness.</a:t>
-            </a:r>
-          </a:p>
-          <a:p>
-            <a:r>
-              <a:t>연출 노트: 핵심 포인트 2.</a:t>
+              <a:t>[my_take] 약 10초</a:t>
+            </a:r>
+          </a:p>
+          <a:p>
+            <a:r>
+              <a:t>대본: 탈모 연구, 매일 쉽게 정리해드립니다 🙂</a:t>
+            </a:r>
+          </a:p>
+          <a:p>
+            <a:r>
+              <a:t>연출 노트: 본인 사진 + 코멘트. 문구를 직접 바꿔 쓰세요.</a:t>
             </a:r>
           </a:p>
         </p:txBody>
@@ -830,247 +827,17 @@
           <a:lstStyle/>
           <a:p>
             <a:r>
-              <a:t>[my_take] 약 10초</a:t>
-            </a:r>
-          </a:p>
-          <a:p>
-            <a:r>
-              <a:t>대본: 탈모 연구, 매일 쉽게 정리해드립니다 🙂</a:t>
-            </a:r>
-          </a:p>
-          <a:p>
-            <a:r>
-              <a:t>연출 노트: 본인 사진 + 코멘트. 문구를 직접 바꿔 쓰세요.</a:t>
-            </a:r>
-          </a:p>
-        </p:txBody>
-      </p:sp>
-      <p:sp>
-        <p:nvSpPr>
-          <p:cNvPr id="4" name="Slide Number Placeholder 3"/>
-          <p:cNvSpPr>
-            <a:spLocks noGrp="1"/>
-          </p:cNvSpPr>
-          <p:nvPr>
-            <p:ph type="sldNum" idx="5" sz="quarter"/>
-          </p:nvPr>
-        </p:nvSpPr>
-        <p:spPr/>
-      </p:sp>
-    </p:spTree>
-  </p:cSld>
-  <p:clrMapOvr>
-    <a:masterClrMapping/>
-  </p:clrMapOvr>
-</p:notes>
-</file>
-
-<file path=ppt/notesSlides/notesSlide6.xml><?xml version="1.0" encoding="utf-8"?>
-<p:notes xmlns:a="http://schemas.openxmlformats.org/drawingml/2006/main" xmlns:p="http://schemas.openxmlformats.org/presentationml/2006/main" xmlns:r="http://schemas.openxmlformats.org/officeDocument/2006/relationships">
-  <p:cSld>
-    <p:spTree>
-      <p:nvGrpSpPr>
-        <p:cNvPr id="1" name=""/>
-        <p:cNvGrpSpPr/>
-        <p:nvPr/>
-      </p:nvGrpSpPr>
-      <p:grpSpPr>
-        <a:xfrm>
-          <a:off x="0" y="0"/>
-          <a:ext cx="0" cy="0"/>
-          <a:chOff x="0" y="0"/>
-          <a:chExt cx="0" cy="0"/>
-        </a:xfrm>
-      </p:grpSpPr>
-      <p:sp>
-        <p:nvSpPr>
-          <p:cNvPr id="2" name="Slide Image Placeholder 1"/>
-          <p:cNvSpPr>
-            <a:spLocks noGrp="1"/>
-          </p:cNvSpPr>
-          <p:nvPr>
-            <p:ph type="sldImg" idx="2"/>
-          </p:nvPr>
-        </p:nvSpPr>
-        <p:spPr/>
-      </p:sp>
-      <p:sp>
-        <p:nvSpPr>
-          <p:cNvPr id="3" name="Notes Placeholder 2"/>
-          <p:cNvSpPr>
-            <a:spLocks noGrp="1"/>
-          </p:cNvSpPr>
-          <p:nvPr>
-            <p:ph type="body" idx="3" sz="quarter"/>
-          </p:nvPr>
-        </p:nvSpPr>
-        <p:spPr/>
-        <p:txBody>
-          <a:bodyPr/>
-          <a:lstStyle/>
-          <a:p>
-            <a:r>
               <a:t>[cta] 약 8초</a:t>
             </a:r>
           </a:p>
           <a:p>
             <a:r>
-              <a:t>대본: 더 자세한 내용은 원문 링크에서 확인하세요. 매일 새로운 탈모 연구, 팔로우하고 놓치지 마세요!</a:t>
+              <a:t>대본: 원문은 링크에서 확인하세요. 매일 새로운 탈모 소식, 놓치지 마세요!</a:t>
             </a:r>
           </a:p>
           <a:p>
             <a:r>
               <a:t>연출 노트: 원문 링크는 고정 댓글로 안내.</a:t>
-            </a:r>
-          </a:p>
-        </p:txBody>
-      </p:sp>
-      <p:sp>
-        <p:nvSpPr>
-          <p:cNvPr id="4" name="Slide Number Placeholder 3"/>
-          <p:cNvSpPr>
-            <a:spLocks noGrp="1"/>
-          </p:cNvSpPr>
-          <p:nvPr>
-            <p:ph type="sldNum" idx="5" sz="quarter"/>
-          </p:nvPr>
-        </p:nvSpPr>
-        <p:spPr/>
-      </p:sp>
-    </p:spTree>
-  </p:cSld>
-  <p:clrMapOvr>
-    <a:masterClrMapping/>
-  </p:clrMapOvr>
-</p:notes>
-</file>
-
-<file path=ppt/notesSlides/notesSlide7.xml><?xml version="1.0" encoding="utf-8"?>
-<p:notes xmlns:a="http://schemas.openxmlformats.org/drawingml/2006/main" xmlns:p="http://schemas.openxmlformats.org/presentationml/2006/main" xmlns:r="http://schemas.openxmlformats.org/officeDocument/2006/relationships">
-  <p:cSld>
-    <p:spTree>
-      <p:nvGrpSpPr>
-        <p:cNvPr id="1" name=""/>
-        <p:cNvGrpSpPr/>
-        <p:nvPr/>
-      </p:nvGrpSpPr>
-      <p:grpSpPr>
-        <a:xfrm>
-          <a:off x="0" y="0"/>
-          <a:ext cx="0" cy="0"/>
-          <a:chOff x="0" y="0"/>
-          <a:chExt cx="0" cy="0"/>
-        </a:xfrm>
-      </p:grpSpPr>
-      <p:sp>
-        <p:nvSpPr>
-          <p:cNvPr id="2" name="Slide Image Placeholder 1"/>
-          <p:cNvSpPr>
-            <a:spLocks noGrp="1"/>
-          </p:cNvSpPr>
-          <p:nvPr>
-            <p:ph type="sldImg" idx="2"/>
-          </p:nvPr>
-        </p:nvSpPr>
-        <p:spPr/>
-      </p:sp>
-      <p:sp>
-        <p:nvSpPr>
-          <p:cNvPr id="3" name="Notes Placeholder 2"/>
-          <p:cNvSpPr>
-            <a:spLocks noGrp="1"/>
-          </p:cNvSpPr>
-          <p:nvPr>
-            <p:ph type="body" idx="3" sz="quarter"/>
-          </p:nvPr>
-        </p:nvSpPr>
-        <p:spPr/>
-        <p:txBody>
-          <a:bodyPr/>
-          <a:lstStyle/>
-          <a:p>
-            <a:r>
-              <a:t>편집 참고용 슬라이드입니다. 영상에는 쓰지 않아도 됩니다.</a:t>
-            </a:r>
-          </a:p>
-          <a:p>
-            <a:r>
-              <a:t>원문 영어 문장을 그대로 발췌했으므로 번역·검수 후 사용하세요.</a:t>
-            </a:r>
-          </a:p>
-        </p:txBody>
-      </p:sp>
-      <p:sp>
-        <p:nvSpPr>
-          <p:cNvPr id="4" name="Slide Number Placeholder 3"/>
-          <p:cNvSpPr>
-            <a:spLocks noGrp="1"/>
-          </p:cNvSpPr>
-          <p:nvPr>
-            <p:ph type="sldNum" idx="5" sz="quarter"/>
-          </p:nvPr>
-        </p:nvSpPr>
-        <p:spPr/>
-      </p:sp>
-    </p:spTree>
-  </p:cSld>
-  <p:clrMapOvr>
-    <a:masterClrMapping/>
-  </p:clrMapOvr>
-</p:notes>
-</file>
-
-<file path=ppt/notesSlides/notesSlide8.xml><?xml version="1.0" encoding="utf-8"?>
-<p:notes xmlns:a="http://schemas.openxmlformats.org/drawingml/2006/main" xmlns:p="http://schemas.openxmlformats.org/presentationml/2006/main" xmlns:r="http://schemas.openxmlformats.org/officeDocument/2006/relationships">
-  <p:cSld>
-    <p:spTree>
-      <p:nvGrpSpPr>
-        <p:cNvPr id="1" name=""/>
-        <p:cNvGrpSpPr/>
-        <p:nvPr/>
-      </p:nvGrpSpPr>
-      <p:grpSpPr>
-        <a:xfrm>
-          <a:off x="0" y="0"/>
-          <a:ext cx="0" cy="0"/>
-          <a:chOff x="0" y="0"/>
-          <a:chExt cx="0" cy="0"/>
-        </a:xfrm>
-      </p:grpSpPr>
-      <p:sp>
-        <p:nvSpPr>
-          <p:cNvPr id="2" name="Slide Image Placeholder 1"/>
-          <p:cNvSpPr>
-            <a:spLocks noGrp="1"/>
-          </p:cNvSpPr>
-          <p:nvPr>
-            <p:ph type="sldImg" idx="2"/>
-          </p:nvPr>
-        </p:nvSpPr>
-        <p:spPr/>
-      </p:sp>
-      <p:sp>
-        <p:nvSpPr>
-          <p:cNvPr id="3" name="Notes Placeholder 2"/>
-          <p:cNvSpPr>
-            <a:spLocks noGrp="1"/>
-          </p:cNvSpPr>
-          <p:nvPr>
-            <p:ph type="body" idx="3" sz="quarter"/>
-          </p:nvPr>
-        </p:nvSpPr>
-        <p:spPr/>
-        <p:txBody>
-          <a:bodyPr/>
-          <a:lstStyle/>
-          <a:p>
-            <a:r>
-              <a:t>편집 참고용 슬라이드입니다. 영상에는 쓰지 않아도 됩니다.</a:t>
-            </a:r>
-          </a:p>
-          <a:p>
-            <a:r>
-              <a:t>원문 영어 문장을 그대로 발췌했으므로 번역·검수 후 사용하세요.</a:t>
             </a:r>
           </a:p>
         </p:txBody>
@@ -4114,7 +3881,7 @@
                 </a:solidFill>
                 <a:latin typeface="Arial"/>
               </a:rPr>
-              <a:t>PLANT PHYSIOLOGY AND BIOCHEMISTRY : PPB</a:t>
+              <a:t>에이피알 공식 블로그</a:t>
             </a:r>
           </a:p>
         </p:txBody>
@@ -4149,7 +3916,7 @@
                 </a:solidFill>
                 <a:latin typeface="Arial"/>
               </a:rPr>
-              <a:t>오늘의 논문</a:t>
+              <a:t>탈모 뉴스</a:t>
             </a:r>
           </a:p>
         </p:txBody>
@@ -4184,7 +3951,7 @@
                 </a:solidFill>
                 <a:latin typeface="Arial"/>
               </a:rPr>
-              <a:t>Plant physiology and biochemistry에 실린 새 연구입니다</a:t>
+              <a:t>오늘 나온 소식을 3줄로 정리했습니다</a:t>
             </a:r>
           </a:p>
         </p:txBody>
@@ -4219,7 +3986,7 @@
                 </a:solidFill>
                 <a:latin typeface="Arial"/>
               </a:rPr>
-              <a:t>2026 Sep 7  |  매일 아침 탈모 연구 한 편</a:t>
+              <a:t>Sat, 12 Sep 2026 23:08:16 GMT  |  매일 아침 탈모 연구 한 편</a:t>
             </a:r>
           </a:p>
         </p:txBody>
@@ -4304,7 +4071,7 @@
                 </a:solidFill>
                 <a:latin typeface="Arial"/>
               </a:rPr>
-              <a:t>Enhanced drought tolerance in Arabidopsis thaliana is mediated by Pseudomonas sp. M25 linked to root hair growth</a:t>
+              <a:t>[에이피알] 에이피알, 고주파 미세천공 기술 기반 탈모 치료 효능 연구 국제 학술지 게재 - 에이피알 공식 블로그</a:t>
             </a:r>
           </a:p>
         </p:txBody>
@@ -4339,7 +4106,7 @@
                 </a:solidFill>
                 <a:latin typeface="Arial"/>
               </a:rPr>
-              <a:t>Plant physiology and biochemistry : PPB  ·  2026 Sep 7</a:t>
+              <a:t>  ·  Sat, 12 Sep 2026 23:08:16 GMT</a:t>
             </a:r>
           </a:p>
         </p:txBody>
@@ -4468,7 +4235,7 @@
                 </a:solidFill>
                 <a:latin typeface="Arial"/>
               </a:rPr>
-              <a:t>Plants establish intimate associations with rhizosphere microorganisms that profoundly influence their growth, development, and stress resilience.</a:t>
+              <a:t>[에이피알] 에이피알, 고주파 미세천공 기술 기반 탈모 치료 효능 연구 국제 학술지 게재&amp;nbsp;&amp;nbsp;에이피알 공식 블로그</a:t>
             </a:r>
           </a:p>
         </p:txBody>
@@ -4482,135 +4249,6 @@
 </file>
 
 <file path=ppt/slides/slide4.xml><?xml version="1.0" encoding="utf-8"?>
-<p:sld xmlns:a="http://schemas.openxmlformats.org/drawingml/2006/main" xmlns:p="http://schemas.openxmlformats.org/presentationml/2006/main" xmlns:r="http://schemas.openxmlformats.org/officeDocument/2006/relationships">
-  <p:cSld>
-    <p:bg>
-      <p:bgPr>
-        <a:solidFill>
-          <a:srgbClr val="1B1F3B"/>
-        </a:solidFill>
-        <a:effectLst/>
-      </p:bgPr>
-    </p:bg>
-    <p:spTree>
-      <p:nvGrpSpPr>
-        <p:cNvPr id="1" name=""/>
-        <p:cNvGrpSpPr/>
-        <p:nvPr/>
-      </p:nvGrpSpPr>
-      <p:grpSpPr/>
-      <p:pic>
-        <p:nvPicPr>
-          <p:cNvPr id="2" name="Picture 1" descr="topic_2.jpg"/>
-          <p:cNvPicPr>
-            <a:picLocks noChangeAspect="1"/>
-          </p:cNvPicPr>
-          <p:nvPr/>
-        </p:nvPicPr>
-        <p:blipFill>
-          <a:blip r:embed="rId2"/>
-          <a:stretch>
-            <a:fillRect/>
-          </a:stretch>
-        </p:blipFill>
-        <p:spPr>
-          <a:xfrm>
-            <a:off x="-923544" y="0"/>
-            <a:ext cx="7406640" cy="9875520"/>
-          </a:xfrm>
-          <a:prstGeom prst="rect">
-            <a:avLst/>
-          </a:prstGeom>
-        </p:spPr>
-      </p:pic>
-      <p:sp>
-        <p:nvSpPr>
-          <p:cNvPr id="3" name="Rectangle 2"/>
-          <p:cNvSpPr/>
-          <p:nvPr/>
-        </p:nvSpPr>
-        <p:spPr>
-          <a:xfrm>
-            <a:off x="0" y="6122822"/>
-            <a:ext cx="5559552" cy="3752698"/>
-          </a:xfrm>
-          <a:prstGeom prst="rect">
-            <a:avLst/>
-          </a:prstGeom>
-          <a:solidFill>
-            <a:srgbClr val="000000"/>
-          </a:solidFill>
-          <a:ln>
-            <a:noFill/>
-          </a:ln>
-          <a:effectLst/>
-        </p:spPr>
-        <p:style>
-          <a:lnRef idx="1">
-            <a:schemeClr val="accent1"/>
-          </a:lnRef>
-          <a:fillRef idx="3">
-            <a:schemeClr val="accent1"/>
-          </a:fillRef>
-          <a:effectRef idx="2">
-            <a:schemeClr val="accent1"/>
-          </a:effectRef>
-          <a:fontRef idx="minor">
-            <a:schemeClr val="lt1"/>
-          </a:fontRef>
-        </p:style>
-        <p:txBody>
-          <a:bodyPr rtlCol="0" anchor="ctr"/>
-          <a:lstStyle/>
-          <a:p>
-            <a:pPr algn="ctr"/>
-          </a:p>
-        </p:txBody>
-      </p:sp>
-      <p:sp>
-        <p:nvSpPr>
-          <p:cNvPr id="4" name="TextBox 3"/>
-          <p:cNvSpPr txBox="1"/>
-          <p:nvPr/>
-        </p:nvSpPr>
-        <p:spPr>
-          <a:xfrm>
-            <a:off x="365760" y="6400800"/>
-            <a:ext cx="4828032" cy="2926080"/>
-          </a:xfrm>
-          <a:prstGeom prst="rect">
-            <a:avLst/>
-          </a:prstGeom>
-          <a:noFill/>
-        </p:spPr>
-        <p:txBody>
-          <a:bodyPr wrap="square" anchor="ctr">
-            <a:spAutoFit/>
-          </a:bodyPr>
-          <a:lstStyle/>
-          <a:p>
-            <a:pPr algn="ctr"/>
-            <a:r>
-              <a:rPr sz="2200" b="1">
-                <a:solidFill>
-                  <a:srgbClr val="FFFFFF"/>
-                </a:solidFill>
-                <a:latin typeface="Arial"/>
-              </a:rPr>
-              <a:t>Among these, plant-growth-promoting rhizobacteria (PGPR) enhance nutrient acquisition, modulate phytohormone homeostasis and reshape root system architecture, thereby improving plant fitness.</a:t>
-            </a:r>
-          </a:p>
-        </p:txBody>
-      </p:sp>
-    </p:spTree>
-  </p:cSld>
-  <p:clrMapOvr>
-    <a:masterClrMapping/>
-  </p:clrMapOvr>
-</p:sld>
-</file>
-
-<file path=ppt/slides/slide5.xml><?xml version="1.0" encoding="utf-8"?>
 <p:sld xmlns:a="http://schemas.openxmlformats.org/drawingml/2006/main" xmlns:p="http://schemas.openxmlformats.org/presentationml/2006/main" xmlns:r="http://schemas.openxmlformats.org/officeDocument/2006/relationships">
   <p:cSld>
     <p:bg>
@@ -4739,7 +4377,7 @@
 </p:sld>
 </file>
 
-<file path=ppt/slides/slide6.xml><?xml version="1.0" encoding="utf-8"?>
+<file path=ppt/slides/slide5.xml><?xml version="1.0" encoding="utf-8"?>
 <p:sld xmlns:a="http://schemas.openxmlformats.org/drawingml/2006/main" xmlns:p="http://schemas.openxmlformats.org/presentationml/2006/main" xmlns:r="http://schemas.openxmlformats.org/officeDocument/2006/relationships">
   <p:cSld>
     <p:bg>
@@ -4787,7 +4425,7 @@
                 </a:solidFill>
                 <a:latin typeface="Arial"/>
               </a:rPr>
-              <a:t>더 자세한 내용은 원문 링크에서 확인하세요. 매일 새로운 탈모 연구, 팔로우하고 놓치지 마세요!</a:t>
+              <a:t>원문은 링크에서 확인하세요. 매일 새로운 탈모 소식, 놓치지 마세요!</a:t>
             </a:r>
           </a:p>
         </p:txBody>
@@ -4800,7 +4438,7 @@
 </p:sld>
 </file>
 
-<file path=ppt/slides/slide7.xml><?xml version="1.0" encoding="utf-8"?>
+<file path=ppt/slides/slide6.xml><?xml version="1.0" encoding="utf-8"?>
 <p:sld xmlns:a="http://schemas.openxmlformats.org/drawingml/2006/main" xmlns:p="http://schemas.openxmlformats.org/presentationml/2006/main" xmlns:r="http://schemas.openxmlformats.org/officeDocument/2006/relationships">
   <p:cSld>
     <p:bg>
@@ -4826,344 +4464,6 @@
         </p:nvSpPr>
         <p:spPr>
           <a:xfrm>
-            <a:off x="365760" y="457200"/>
-            <a:ext cx="4828032" cy="457200"/>
-          </a:xfrm>
-          <a:prstGeom prst="rect">
-            <a:avLst/>
-          </a:prstGeom>
-          <a:noFill/>
-        </p:spPr>
-        <p:txBody>
-          <a:bodyPr wrap="square" anchor="ctr">
-            <a:spAutoFit/>
-          </a:bodyPr>
-          <a:lstStyle/>
-          <a:p>
-            <a:pPr algn="l"/>
-            <a:r>
-              <a:rPr sz="1600" b="1">
-                <a:solidFill>
-                  <a:srgbClr val="FF6B6B"/>
-                </a:solidFill>
-                <a:latin typeface="Arial"/>
-              </a:rPr>
-              <a:t>본문 요약 (편집용)</a:t>
-            </a:r>
-          </a:p>
-        </p:txBody>
-      </p:sp>
-      <p:sp>
-        <p:nvSpPr>
-          <p:cNvPr id="3" name="TextBox 2"/>
-          <p:cNvSpPr txBox="1"/>
-          <p:nvPr/>
-        </p:nvSpPr>
-        <p:spPr>
-          <a:xfrm>
-            <a:off x="365760" y="1097280"/>
-            <a:ext cx="4828032" cy="457200"/>
-          </a:xfrm>
-          <a:prstGeom prst="rect">
-            <a:avLst/>
-          </a:prstGeom>
-          <a:noFill/>
-        </p:spPr>
-        <p:txBody>
-          <a:bodyPr wrap="square" anchor="t">
-            <a:spAutoFit/>
-          </a:bodyPr>
-          <a:lstStyle/>
-          <a:p>
-            <a:pPr algn="l"/>
-            <a:r>
-              <a:rPr sz="1300" b="1">
-                <a:solidFill>
-                  <a:srgbClr val="FFFFFF"/>
-                </a:solidFill>
-                <a:latin typeface="Arial"/>
-              </a:rPr>
-              <a:t>◆ 배경 — Background (자동 구분)</a:t>
-            </a:r>
-          </a:p>
-        </p:txBody>
-      </p:sp>
-      <p:sp>
-        <p:nvSpPr>
-          <p:cNvPr id="4" name="TextBox 3"/>
-          <p:cNvSpPr txBox="1"/>
-          <p:nvPr/>
-        </p:nvSpPr>
-        <p:spPr>
-          <a:xfrm>
-            <a:off x="457200" y="1600200"/>
-            <a:ext cx="4736592" cy="3566160"/>
-          </a:xfrm>
-          <a:prstGeom prst="rect">
-            <a:avLst/>
-          </a:prstGeom>
-          <a:noFill/>
-        </p:spPr>
-        <p:txBody>
-          <a:bodyPr wrap="square" anchor="t">
-            <a:spAutoFit/>
-          </a:bodyPr>
-          <a:lstStyle/>
-          <a:p>
-            <a:pPr algn="l"/>
-            <a:r>
-              <a:rPr sz="1000" b="0">
-                <a:solidFill>
-                  <a:srgbClr val="D5D8EA"/>
-                </a:solidFill>
-                <a:latin typeface="Arial"/>
-              </a:rPr>
-              <a:t>· Plants establish intimate associations with rhizosphere microorganisms that profoundly influence their growth, development, and stress resilience.
-· Among these, plant-growth-promoting rhizobacteria (PGPR) enhance nutrient acquisition, modulate phytohormone homeostasis and reshape root system architecture, thereby improving plant fitness.
-· Despite extensive evidence supporting their beneficial effects, the molecular and cellular mechanisms underlying microbe-driven modulation of specific root traits remain incompletely understood.</a:t>
-            </a:r>
-          </a:p>
-        </p:txBody>
-      </p:sp>
-      <p:sp>
-        <p:nvSpPr>
-          <p:cNvPr id="5" name="TextBox 4"/>
-          <p:cNvSpPr txBox="1"/>
-          <p:nvPr/>
-        </p:nvSpPr>
-        <p:spPr>
-          <a:xfrm>
-            <a:off x="365760" y="5303520"/>
-            <a:ext cx="4828032" cy="457200"/>
-          </a:xfrm>
-          <a:prstGeom prst="rect">
-            <a:avLst/>
-          </a:prstGeom>
-          <a:noFill/>
-        </p:spPr>
-        <p:txBody>
-          <a:bodyPr wrap="square" anchor="t">
-            <a:spAutoFit/>
-          </a:bodyPr>
-          <a:lstStyle/>
-          <a:p>
-            <a:pPr algn="l"/>
-            <a:r>
-              <a:rPr sz="1300" b="1">
-                <a:solidFill>
-                  <a:srgbClr val="FFFFFF"/>
-                </a:solidFill>
-                <a:latin typeface="Arial"/>
-              </a:rPr>
-              <a:t>◆ 주요 결과 — Results (자동 구분)</a:t>
-            </a:r>
-          </a:p>
-        </p:txBody>
-      </p:sp>
-      <p:sp>
-        <p:nvSpPr>
-          <p:cNvPr id="6" name="TextBox 5"/>
-          <p:cNvSpPr txBox="1"/>
-          <p:nvPr/>
-        </p:nvSpPr>
-        <p:spPr>
-          <a:xfrm>
-            <a:off x="457200" y="5806440"/>
-            <a:ext cx="4736592" cy="3566160"/>
-          </a:xfrm>
-          <a:prstGeom prst="rect">
-            <a:avLst/>
-          </a:prstGeom>
-          <a:noFill/>
-        </p:spPr>
-        <p:txBody>
-          <a:bodyPr wrap="square" anchor="t">
-            <a:spAutoFit/>
-          </a:bodyPr>
-          <a:lstStyle/>
-          <a:p>
-            <a:pPr algn="l"/>
-            <a:r>
-              <a:rPr sz="1000" b="0">
-                <a:solidFill>
-                  <a:srgbClr val="D5D8EA"/>
-                </a:solidFill>
-                <a:latin typeface="Arial"/>
-              </a:rPr>
-              <a:t>· Through extensive phenotypic investigation, we established that Pseudomonas sp.
-· M25, a previously described PGPR strain, produces a significant increase in leaf relative water content and evapotranspiration of Arabidopsis thaliana without impacting on rosette growth or photosynthetic parameters.
-· Inoculation with M25 leads to enhanced drought tolerance, and this is associated not with changes in root architecture but with a marked increase in root hair (RH) abundance and length.
-· The stimulation of RH development by this Pseudomonas strain is based on the genetic requirement for RH-related basic helix-loop-helix family transcription factors, including ROOT HAIR DEFECTIVE 6 (RHD6) and RHD6-LIKE 1 (RSL1), which regulate RH development via RHD6-LIKE 4 (RSL4) and RHD6-LIKE 2 (RSL2).
-· M25 can partially circumvent the lack of RHD6 but requires RSL1 and the downstream transcription factors RSL2 and RSL4 to induce RH growth.</a:t>
-            </a:r>
-          </a:p>
-        </p:txBody>
-      </p:sp>
-    </p:spTree>
-  </p:cSld>
-  <p:clrMapOvr>
-    <a:masterClrMapping/>
-  </p:clrMapOvr>
-</p:sld>
-</file>
-
-<file path=ppt/slides/slide8.xml><?xml version="1.0" encoding="utf-8"?>
-<p:sld xmlns:a="http://schemas.openxmlformats.org/drawingml/2006/main" xmlns:p="http://schemas.openxmlformats.org/presentationml/2006/main" xmlns:r="http://schemas.openxmlformats.org/officeDocument/2006/relationships">
-  <p:cSld>
-    <p:bg>
-      <p:bgPr>
-        <a:solidFill>
-          <a:srgbClr val="12142A"/>
-        </a:solidFill>
-        <a:effectLst/>
-      </p:bgPr>
-    </p:bg>
-    <p:spTree>
-      <p:nvGrpSpPr>
-        <p:cNvPr id="1" name=""/>
-        <p:cNvGrpSpPr/>
-        <p:nvPr/>
-      </p:nvGrpSpPr>
-      <p:grpSpPr/>
-      <p:sp>
-        <p:nvSpPr>
-          <p:cNvPr id="2" name="TextBox 1"/>
-          <p:cNvSpPr txBox="1"/>
-          <p:nvPr/>
-        </p:nvSpPr>
-        <p:spPr>
-          <a:xfrm>
-            <a:off x="365760" y="457200"/>
-            <a:ext cx="4828032" cy="457200"/>
-          </a:xfrm>
-          <a:prstGeom prst="rect">
-            <a:avLst/>
-          </a:prstGeom>
-          <a:noFill/>
-        </p:spPr>
-        <p:txBody>
-          <a:bodyPr wrap="square" anchor="ctr">
-            <a:spAutoFit/>
-          </a:bodyPr>
-          <a:lstStyle/>
-          <a:p>
-            <a:pPr algn="l"/>
-            <a:r>
-              <a:rPr sz="1600" b="1">
-                <a:solidFill>
-                  <a:srgbClr val="FF6B6B"/>
-                </a:solidFill>
-                <a:latin typeface="Arial"/>
-              </a:rPr>
-              <a:t>본문 요약 (편집용)</a:t>
-            </a:r>
-          </a:p>
-        </p:txBody>
-      </p:sp>
-      <p:sp>
-        <p:nvSpPr>
-          <p:cNvPr id="3" name="TextBox 2"/>
-          <p:cNvSpPr txBox="1"/>
-          <p:nvPr/>
-        </p:nvSpPr>
-        <p:spPr>
-          <a:xfrm>
-            <a:off x="365760" y="1097280"/>
-            <a:ext cx="4828032" cy="457200"/>
-          </a:xfrm>
-          <a:prstGeom prst="rect">
-            <a:avLst/>
-          </a:prstGeom>
-          <a:noFill/>
-        </p:spPr>
-        <p:txBody>
-          <a:bodyPr wrap="square" anchor="t">
-            <a:spAutoFit/>
-          </a:bodyPr>
-          <a:lstStyle/>
-          <a:p>
-            <a:pPr algn="l"/>
-            <a:r>
-              <a:rPr sz="1300" b="1">
-                <a:solidFill>
-                  <a:srgbClr val="FFFFFF"/>
-                </a:solidFill>
-                <a:latin typeface="Arial"/>
-              </a:rPr>
-              <a:t>◆ 결론 — Conclusion (자동 구분)</a:t>
-            </a:r>
-          </a:p>
-        </p:txBody>
-      </p:sp>
-      <p:sp>
-        <p:nvSpPr>
-          <p:cNvPr id="4" name="TextBox 3"/>
-          <p:cNvSpPr txBox="1"/>
-          <p:nvPr/>
-        </p:nvSpPr>
-        <p:spPr>
-          <a:xfrm>
-            <a:off x="457200" y="1600200"/>
-            <a:ext cx="4736592" cy="3566160"/>
-          </a:xfrm>
-          <a:prstGeom prst="rect">
-            <a:avLst/>
-          </a:prstGeom>
-          <a:noFill/>
-        </p:spPr>
-        <p:txBody>
-          <a:bodyPr wrap="square" anchor="t">
-            <a:spAutoFit/>
-          </a:bodyPr>
-          <a:lstStyle/>
-          <a:p>
-            <a:pPr algn="l"/>
-            <a:r>
-              <a:rPr sz="1000" b="0">
-                <a:solidFill>
-                  <a:srgbClr val="D5D8EA"/>
-                </a:solidFill>
-                <a:latin typeface="Arial"/>
-              </a:rPr>
-              <a:t>· These findings indicate that this bacterium can circumvent RHD6 to activate RSL4, which subsequently promotes RH growth.</a:t>
-            </a:r>
-          </a:p>
-        </p:txBody>
-      </p:sp>
-    </p:spTree>
-  </p:cSld>
-  <p:clrMapOvr>
-    <a:masterClrMapping/>
-  </p:clrMapOvr>
-</p:sld>
-</file>
-
-<file path=ppt/slides/slide9.xml><?xml version="1.0" encoding="utf-8"?>
-<p:sld xmlns:a="http://schemas.openxmlformats.org/drawingml/2006/main" xmlns:p="http://schemas.openxmlformats.org/presentationml/2006/main" xmlns:r="http://schemas.openxmlformats.org/officeDocument/2006/relationships">
-  <p:cSld>
-    <p:bg>
-      <p:bgPr>
-        <a:solidFill>
-          <a:srgbClr val="12142A"/>
-        </a:solidFill>
-        <a:effectLst/>
-      </p:bgPr>
-    </p:bg>
-    <p:spTree>
-      <p:nvGrpSpPr>
-        <p:cNvPr id="1" name=""/>
-        <p:cNvGrpSpPr/>
-        <p:nvPr/>
-      </p:nvGrpSpPr>
-      <p:grpSpPr/>
-      <p:sp>
-        <p:nvSpPr>
-          <p:cNvPr id="2" name="TextBox 1"/>
-          <p:cNvSpPr txBox="1"/>
-          <p:nvPr/>
-        </p:nvSpPr>
-        <p:spPr>
-          <a:xfrm>
             <a:off x="365760" y="731520"/>
             <a:ext cx="4828032" cy="548640"/>
           </a:xfrm>
@@ -5222,9 +4522,9 @@
                 <a:latin typeface="Arial"/>
               </a:rPr>
               <a:t>[출처]
-논문: Enhanced drought tolerance in Arabidopsis thaliana is mediated by Pseudomonas sp. M25 linked to root hair growth
-게재: Plant physiology and biochemistry : PPB
-원문: https://pubmed.ncbi.nlm.nih.gov/42727487/
+논문: [에이피알] 에이피알, 고주파 미세천공 기술 기반 탈모 치료 효능 연구 국제 학술지 게재 - 에이피알 공식 블로그
+게재: 에이피알 공식 블로그
+원문: https://news.google.com/rss/articles/CBMiVkFVX3lxTE1JOUNhZmMySXp6dFpKZC1ZU3ZGdmtXVExtMVlyWlU2Y2FWa3BRQWREek9mY3pKTWhkZXNPSm04cjdhVVVUZXZzNTZEeU1UVnZ1MGJPTDRn?oc=5
 [이미지 출처]
 - Male pattern baldness.jpg / Originally uploaded by Lkinkade (Transferred by XenonX3) / CC BY-SA 2.5
   https://commons.wikimedia.org/wiki/File:Male_pattern_baldness.jpg

--- a/pwa/data/latest/slides.pptx
+++ b/pwa/data/latest/slides.pptx
@@ -11,6 +11,9 @@
     <p:sldId id="259" r:id="rId11"/>
     <p:sldId id="260" r:id="rId12"/>
     <p:sldId id="261" r:id="rId13"/>
+    <p:sldId id="262" r:id="rId14"/>
+    <p:sldId id="263" r:id="rId15"/>
+    <p:sldId id="264" r:id="rId16"/>
   </p:sldIdLst>
   <p:sldSz cx="5559552" cy="9875520" type="screen4x3"/>
   <p:notesSz cx="6858000" cy="9144000"/>
@@ -512,7 +515,7 @@
           </a:p>
           <a:p>
             <a:r>
-              <a:t>대본: 탈모 뉴스 오늘 나온 소식을 3줄로 정리했습니다</a:t>
+              <a:t>대본: 줄기세포 오늘 나온 최신 연구를 정리했습니다</a:t>
             </a:r>
           </a:p>
           <a:p>
@@ -592,7 +595,7 @@
           </a:p>
           <a:p>
             <a:r>
-              <a:t>대본: [에이피알] 에이피알, 고주파 미세천공 기술 기반 탈모 치료 효능 연구 국제 학술지 게재 - 에이피알 공식 블로그</a:t>
+              <a:t>대본: 《Cell communication and signaling : CCS》 - Aging of hair follicle stem cells and their niche: mechanisms and regenerative therapeutic strategies</a:t>
             </a:r>
           </a:p>
           <a:p>
@@ -672,7 +675,7 @@
           </a:p>
           <a:p>
             <a:r>
-              <a:t>대본: [에이피알] 에이피알, 고주파 미세천공 기술 기반 탈모 치료 효능 연구 국제 학술지 게재&amp;nbsp;&amp;nbsp;에이피알 공식 블로그</a:t>
+              <a:t>대본: Hair follicles (HFs) are vital skin appendages that perform fundamental functions including protection, thermoregulation, and sensation.</a:t>
             </a:r>
           </a:p>
           <a:p>
@@ -747,17 +750,17 @@
           <a:lstStyle/>
           <a:p>
             <a:r>
-              <a:t>[my_take] 약 10초</a:t>
-            </a:r>
-          </a:p>
-          <a:p>
-            <a:r>
-              <a:t>대본: 탈모 연구, 매일 쉽게 정리해드립니다 🙂</a:t>
-            </a:r>
-          </a:p>
-          <a:p>
-            <a:r>
-              <a:t>연출 노트: 본인 사진 + 코멘트. 문구를 직접 바꿔 쓰세요.</a:t>
+              <a:t>[key_finding_2] 약 10초</a:t>
+            </a:r>
+          </a:p>
+          <a:p>
+            <a:r>
+              <a:t>대본: Orchestrated by hair follicle stem cells (HFSCs), HFs undergo cyclic regeneration throughout the lifespan.</a:t>
+            </a:r>
+          </a:p>
+          <a:p>
+            <a:r>
+              <a:t>연출 노트: 핵심 포인트 2.</a:t>
             </a:r>
           </a:p>
         </p:txBody>
@@ -827,17 +830,247 @@
           <a:lstStyle/>
           <a:p>
             <a:r>
+              <a:t>[my_take] 약 10초</a:t>
+            </a:r>
+          </a:p>
+          <a:p>
+            <a:r>
+              <a:t>대본: 탈모 연구, 매일 쉽게 정리해드립니다 🙂</a:t>
+            </a:r>
+          </a:p>
+          <a:p>
+            <a:r>
+              <a:t>연출 노트: 본인 사진 + 코멘트. 문구를 직접 바꿔 쓰세요.</a:t>
+            </a:r>
+          </a:p>
+        </p:txBody>
+      </p:sp>
+      <p:sp>
+        <p:nvSpPr>
+          <p:cNvPr id="4" name="Slide Number Placeholder 3"/>
+          <p:cNvSpPr>
+            <a:spLocks noGrp="1"/>
+          </p:cNvSpPr>
+          <p:nvPr>
+            <p:ph type="sldNum" idx="5" sz="quarter"/>
+          </p:nvPr>
+        </p:nvSpPr>
+        <p:spPr/>
+      </p:sp>
+    </p:spTree>
+  </p:cSld>
+  <p:clrMapOvr>
+    <a:masterClrMapping/>
+  </p:clrMapOvr>
+</p:notes>
+</file>
+
+<file path=ppt/notesSlides/notesSlide6.xml><?xml version="1.0" encoding="utf-8"?>
+<p:notes xmlns:a="http://schemas.openxmlformats.org/drawingml/2006/main" xmlns:p="http://schemas.openxmlformats.org/presentationml/2006/main" xmlns:r="http://schemas.openxmlformats.org/officeDocument/2006/relationships">
+  <p:cSld>
+    <p:spTree>
+      <p:nvGrpSpPr>
+        <p:cNvPr id="1" name=""/>
+        <p:cNvGrpSpPr/>
+        <p:nvPr/>
+      </p:nvGrpSpPr>
+      <p:grpSpPr>
+        <a:xfrm>
+          <a:off x="0" y="0"/>
+          <a:ext cx="0" cy="0"/>
+          <a:chOff x="0" y="0"/>
+          <a:chExt cx="0" cy="0"/>
+        </a:xfrm>
+      </p:grpSpPr>
+      <p:sp>
+        <p:nvSpPr>
+          <p:cNvPr id="2" name="Slide Image Placeholder 1"/>
+          <p:cNvSpPr>
+            <a:spLocks noGrp="1"/>
+          </p:cNvSpPr>
+          <p:nvPr>
+            <p:ph type="sldImg" idx="2"/>
+          </p:nvPr>
+        </p:nvSpPr>
+        <p:spPr/>
+      </p:sp>
+      <p:sp>
+        <p:nvSpPr>
+          <p:cNvPr id="3" name="Notes Placeholder 2"/>
+          <p:cNvSpPr>
+            <a:spLocks noGrp="1"/>
+          </p:cNvSpPr>
+          <p:nvPr>
+            <p:ph type="body" idx="3" sz="quarter"/>
+          </p:nvPr>
+        </p:nvSpPr>
+        <p:spPr/>
+        <p:txBody>
+          <a:bodyPr/>
+          <a:lstStyle/>
+          <a:p>
+            <a:r>
               <a:t>[cta] 약 8초</a:t>
             </a:r>
           </a:p>
           <a:p>
             <a:r>
-              <a:t>대본: 원문은 링크에서 확인하세요. 매일 새로운 탈모 소식, 놓치지 마세요!</a:t>
+              <a:t>대본: 더 자세한 내용은 원문 링크에서 확인하세요. 매일 새로운 탈모 연구, 팔로우하고 놓치지 마세요!</a:t>
             </a:r>
           </a:p>
           <a:p>
             <a:r>
               <a:t>연출 노트: 원문 링크는 고정 댓글로 안내.</a:t>
+            </a:r>
+          </a:p>
+        </p:txBody>
+      </p:sp>
+      <p:sp>
+        <p:nvSpPr>
+          <p:cNvPr id="4" name="Slide Number Placeholder 3"/>
+          <p:cNvSpPr>
+            <a:spLocks noGrp="1"/>
+          </p:cNvSpPr>
+          <p:nvPr>
+            <p:ph type="sldNum" idx="5" sz="quarter"/>
+          </p:nvPr>
+        </p:nvSpPr>
+        <p:spPr/>
+      </p:sp>
+    </p:spTree>
+  </p:cSld>
+  <p:clrMapOvr>
+    <a:masterClrMapping/>
+  </p:clrMapOvr>
+</p:notes>
+</file>
+
+<file path=ppt/notesSlides/notesSlide7.xml><?xml version="1.0" encoding="utf-8"?>
+<p:notes xmlns:a="http://schemas.openxmlformats.org/drawingml/2006/main" xmlns:p="http://schemas.openxmlformats.org/presentationml/2006/main" xmlns:r="http://schemas.openxmlformats.org/officeDocument/2006/relationships">
+  <p:cSld>
+    <p:spTree>
+      <p:nvGrpSpPr>
+        <p:cNvPr id="1" name=""/>
+        <p:cNvGrpSpPr/>
+        <p:nvPr/>
+      </p:nvGrpSpPr>
+      <p:grpSpPr>
+        <a:xfrm>
+          <a:off x="0" y="0"/>
+          <a:ext cx="0" cy="0"/>
+          <a:chOff x="0" y="0"/>
+          <a:chExt cx="0" cy="0"/>
+        </a:xfrm>
+      </p:grpSpPr>
+      <p:sp>
+        <p:nvSpPr>
+          <p:cNvPr id="2" name="Slide Image Placeholder 1"/>
+          <p:cNvSpPr>
+            <a:spLocks noGrp="1"/>
+          </p:cNvSpPr>
+          <p:nvPr>
+            <p:ph type="sldImg" idx="2"/>
+          </p:nvPr>
+        </p:nvSpPr>
+        <p:spPr/>
+      </p:sp>
+      <p:sp>
+        <p:nvSpPr>
+          <p:cNvPr id="3" name="Notes Placeholder 2"/>
+          <p:cNvSpPr>
+            <a:spLocks noGrp="1"/>
+          </p:cNvSpPr>
+          <p:nvPr>
+            <p:ph type="body" idx="3" sz="quarter"/>
+          </p:nvPr>
+        </p:nvSpPr>
+        <p:spPr/>
+        <p:txBody>
+          <a:bodyPr/>
+          <a:lstStyle/>
+          <a:p>
+            <a:r>
+              <a:t>편집 참고용 슬라이드입니다. 영상에는 쓰지 않아도 됩니다.</a:t>
+            </a:r>
+          </a:p>
+          <a:p>
+            <a:r>
+              <a:t>원문 영어 문장을 그대로 발췌했으므로 번역·검수 후 사용하세요.</a:t>
+            </a:r>
+          </a:p>
+        </p:txBody>
+      </p:sp>
+      <p:sp>
+        <p:nvSpPr>
+          <p:cNvPr id="4" name="Slide Number Placeholder 3"/>
+          <p:cNvSpPr>
+            <a:spLocks noGrp="1"/>
+          </p:cNvSpPr>
+          <p:nvPr>
+            <p:ph type="sldNum" idx="5" sz="quarter"/>
+          </p:nvPr>
+        </p:nvSpPr>
+        <p:spPr/>
+      </p:sp>
+    </p:spTree>
+  </p:cSld>
+  <p:clrMapOvr>
+    <a:masterClrMapping/>
+  </p:clrMapOvr>
+</p:notes>
+</file>
+
+<file path=ppt/notesSlides/notesSlide8.xml><?xml version="1.0" encoding="utf-8"?>
+<p:notes xmlns:a="http://schemas.openxmlformats.org/drawingml/2006/main" xmlns:p="http://schemas.openxmlformats.org/presentationml/2006/main" xmlns:r="http://schemas.openxmlformats.org/officeDocument/2006/relationships">
+  <p:cSld>
+    <p:spTree>
+      <p:nvGrpSpPr>
+        <p:cNvPr id="1" name=""/>
+        <p:cNvGrpSpPr/>
+        <p:nvPr/>
+      </p:nvGrpSpPr>
+      <p:grpSpPr>
+        <a:xfrm>
+          <a:off x="0" y="0"/>
+          <a:ext cx="0" cy="0"/>
+          <a:chOff x="0" y="0"/>
+          <a:chExt cx="0" cy="0"/>
+        </a:xfrm>
+      </p:grpSpPr>
+      <p:sp>
+        <p:nvSpPr>
+          <p:cNvPr id="2" name="Slide Image Placeholder 1"/>
+          <p:cNvSpPr>
+            <a:spLocks noGrp="1"/>
+          </p:cNvSpPr>
+          <p:nvPr>
+            <p:ph type="sldImg" idx="2"/>
+          </p:nvPr>
+        </p:nvSpPr>
+        <p:spPr/>
+      </p:sp>
+      <p:sp>
+        <p:nvSpPr>
+          <p:cNvPr id="3" name="Notes Placeholder 2"/>
+          <p:cNvSpPr>
+            <a:spLocks noGrp="1"/>
+          </p:cNvSpPr>
+          <p:nvPr>
+            <p:ph type="body" idx="3" sz="quarter"/>
+          </p:nvPr>
+        </p:nvSpPr>
+        <p:spPr/>
+        <p:txBody>
+          <a:bodyPr/>
+          <a:lstStyle/>
+          <a:p>
+            <a:r>
+              <a:t>편집 참고용 슬라이드입니다. 영상에는 쓰지 않아도 됩니다.</a:t>
+            </a:r>
+          </a:p>
+          <a:p>
+            <a:r>
+              <a:t>원문 영어 문장을 그대로 발췌했으므로 번역·검수 후 사용하세요.</a:t>
             </a:r>
           </a:p>
         </p:txBody>
@@ -3881,7 +4114,7 @@
                 </a:solidFill>
                 <a:latin typeface="Arial"/>
               </a:rPr>
-              <a:t>에이피알 공식 블로그</a:t>
+              <a:t>CELL COMMUNICATION AND SIGNALING : CCS</a:t>
             </a:r>
           </a:p>
         </p:txBody>
@@ -3916,7 +4149,7 @@
                 </a:solidFill>
                 <a:latin typeface="Arial"/>
               </a:rPr>
-              <a:t>탈모 뉴스</a:t>
+              <a:t>줄기세포</a:t>
             </a:r>
           </a:p>
         </p:txBody>
@@ -3951,7 +4184,7 @@
                 </a:solidFill>
                 <a:latin typeface="Arial"/>
               </a:rPr>
-              <a:t>오늘 나온 소식을 3줄로 정리했습니다</a:t>
+              <a:t>오늘 나온 최신 연구를 정리했습니다</a:t>
             </a:r>
           </a:p>
         </p:txBody>
@@ -3986,7 +4219,7 @@
                 </a:solidFill>
                 <a:latin typeface="Arial"/>
               </a:rPr>
-              <a:t>Sat, 12 Sep 2026 23:08:16 GMT  |  매일 아침 탈모 연구 한 편</a:t>
+              <a:t>2026 Jul 27  |  매일 아침 탈모 연구 한 편</a:t>
             </a:r>
           </a:p>
         </p:txBody>
@@ -4071,7 +4304,7 @@
                 </a:solidFill>
                 <a:latin typeface="Arial"/>
               </a:rPr>
-              <a:t>[에이피알] 에이피알, 고주파 미세천공 기술 기반 탈모 치료 효능 연구 국제 학술지 게재 - 에이피알 공식 블로그</a:t>
+              <a:t>Aging of hair follicle stem cells and their niche: mechanisms and regenerative therapeutic strategies</a:t>
             </a:r>
           </a:p>
         </p:txBody>
@@ -4106,7 +4339,7 @@
                 </a:solidFill>
                 <a:latin typeface="Arial"/>
               </a:rPr>
-              <a:t>  ·  Sat, 12 Sep 2026 23:08:16 GMT</a:t>
+              <a:t>Cell communication and signaling : CCS  ·  2026 Jul 27</a:t>
             </a:r>
           </a:p>
         </p:txBody>
@@ -4235,7 +4468,7 @@
                 </a:solidFill>
                 <a:latin typeface="Arial"/>
               </a:rPr>
-              <a:t>[에이피알] 에이피알, 고주파 미세천공 기술 기반 탈모 치료 효능 연구 국제 학술지 게재&amp;nbsp;&amp;nbsp;에이피알 공식 블로그</a:t>
+              <a:t>Hair follicles (HFs) are vital skin appendages that perform fundamental functions including protection, thermoregulation, and sensation.</a:t>
             </a:r>
           </a:p>
         </p:txBody>
@@ -4249,6 +4482,135 @@
 </file>
 
 <file path=ppt/slides/slide4.xml><?xml version="1.0" encoding="utf-8"?>
+<p:sld xmlns:a="http://schemas.openxmlformats.org/drawingml/2006/main" xmlns:p="http://schemas.openxmlformats.org/presentationml/2006/main" xmlns:r="http://schemas.openxmlformats.org/officeDocument/2006/relationships">
+  <p:cSld>
+    <p:bg>
+      <p:bgPr>
+        <a:solidFill>
+          <a:srgbClr val="1B1F3B"/>
+        </a:solidFill>
+        <a:effectLst/>
+      </p:bgPr>
+    </p:bg>
+    <p:spTree>
+      <p:nvGrpSpPr>
+        <p:cNvPr id="1" name=""/>
+        <p:cNvGrpSpPr/>
+        <p:nvPr/>
+      </p:nvGrpSpPr>
+      <p:grpSpPr/>
+      <p:pic>
+        <p:nvPicPr>
+          <p:cNvPr id="2" name="Picture 1" descr="topic_2.jpg"/>
+          <p:cNvPicPr>
+            <a:picLocks noChangeAspect="1"/>
+          </p:cNvPicPr>
+          <p:nvPr/>
+        </p:nvPicPr>
+        <p:blipFill>
+          <a:blip r:embed="rId2"/>
+          <a:stretch>
+            <a:fillRect/>
+          </a:stretch>
+        </p:blipFill>
+        <p:spPr>
+          <a:xfrm>
+            <a:off x="-923544" y="0"/>
+            <a:ext cx="7406640" cy="9875520"/>
+          </a:xfrm>
+          <a:prstGeom prst="rect">
+            <a:avLst/>
+          </a:prstGeom>
+        </p:spPr>
+      </p:pic>
+      <p:sp>
+        <p:nvSpPr>
+          <p:cNvPr id="3" name="Rectangle 2"/>
+          <p:cNvSpPr/>
+          <p:nvPr/>
+        </p:nvSpPr>
+        <p:spPr>
+          <a:xfrm>
+            <a:off x="0" y="6122822"/>
+            <a:ext cx="5559552" cy="3752698"/>
+          </a:xfrm>
+          <a:prstGeom prst="rect">
+            <a:avLst/>
+          </a:prstGeom>
+          <a:solidFill>
+            <a:srgbClr val="000000"/>
+          </a:solidFill>
+          <a:ln>
+            <a:noFill/>
+          </a:ln>
+          <a:effectLst/>
+        </p:spPr>
+        <p:style>
+          <a:lnRef idx="1">
+            <a:schemeClr val="accent1"/>
+          </a:lnRef>
+          <a:fillRef idx="3">
+            <a:schemeClr val="accent1"/>
+          </a:fillRef>
+          <a:effectRef idx="2">
+            <a:schemeClr val="accent1"/>
+          </a:effectRef>
+          <a:fontRef idx="minor">
+            <a:schemeClr val="lt1"/>
+          </a:fontRef>
+        </p:style>
+        <p:txBody>
+          <a:bodyPr rtlCol="0" anchor="ctr"/>
+          <a:lstStyle/>
+          <a:p>
+            <a:pPr algn="ctr"/>
+          </a:p>
+        </p:txBody>
+      </p:sp>
+      <p:sp>
+        <p:nvSpPr>
+          <p:cNvPr id="4" name="TextBox 3"/>
+          <p:cNvSpPr txBox="1"/>
+          <p:nvPr/>
+        </p:nvSpPr>
+        <p:spPr>
+          <a:xfrm>
+            <a:off x="365760" y="6400800"/>
+            <a:ext cx="4828032" cy="2926080"/>
+          </a:xfrm>
+          <a:prstGeom prst="rect">
+            <a:avLst/>
+          </a:prstGeom>
+          <a:noFill/>
+        </p:spPr>
+        <p:txBody>
+          <a:bodyPr wrap="square" anchor="ctr">
+            <a:spAutoFit/>
+          </a:bodyPr>
+          <a:lstStyle/>
+          <a:p>
+            <a:pPr algn="ctr"/>
+            <a:r>
+              <a:rPr sz="2200" b="1">
+                <a:solidFill>
+                  <a:srgbClr val="FFFFFF"/>
+                </a:solidFill>
+                <a:latin typeface="Arial"/>
+              </a:rPr>
+              <a:t>Orchestrated by hair follicle stem cells (HFSCs), HFs undergo cyclic regeneration throughout the lifespan.</a:t>
+            </a:r>
+          </a:p>
+        </p:txBody>
+      </p:sp>
+    </p:spTree>
+  </p:cSld>
+  <p:clrMapOvr>
+    <a:masterClrMapping/>
+  </p:clrMapOvr>
+</p:sld>
+</file>
+
+<file path=ppt/slides/slide5.xml><?xml version="1.0" encoding="utf-8"?>
 <p:sld xmlns:a="http://schemas.openxmlformats.org/drawingml/2006/main" xmlns:p="http://schemas.openxmlformats.org/presentationml/2006/main" xmlns:r="http://schemas.openxmlformats.org/officeDocument/2006/relationships">
   <p:cSld>
     <p:bg>
@@ -4377,7 +4739,7 @@
 </p:sld>
 </file>
 
-<file path=ppt/slides/slide5.xml><?xml version="1.0" encoding="utf-8"?>
+<file path=ppt/slides/slide6.xml><?xml version="1.0" encoding="utf-8"?>
 <p:sld xmlns:a="http://schemas.openxmlformats.org/drawingml/2006/main" xmlns:p="http://schemas.openxmlformats.org/presentationml/2006/main" xmlns:r="http://schemas.openxmlformats.org/officeDocument/2006/relationships">
   <p:cSld>
     <p:bg>
@@ -4425,7 +4787,7 @@
                 </a:solidFill>
                 <a:latin typeface="Arial"/>
               </a:rPr>
-              <a:t>원문은 링크에서 확인하세요. 매일 새로운 탈모 소식, 놓치지 마세요!</a:t>
+              <a:t>더 자세한 내용은 원문 링크에서 확인하세요. 매일 새로운 탈모 연구, 팔로우하고 놓치지 마세요!</a:t>
             </a:r>
           </a:p>
         </p:txBody>
@@ -4438,7 +4800,7 @@
 </p:sld>
 </file>
 
-<file path=ppt/slides/slide6.xml><?xml version="1.0" encoding="utf-8"?>
+<file path=ppt/slides/slide7.xml><?xml version="1.0" encoding="utf-8"?>
 <p:sld xmlns:a="http://schemas.openxmlformats.org/drawingml/2006/main" xmlns:p="http://schemas.openxmlformats.org/presentationml/2006/main" xmlns:r="http://schemas.openxmlformats.org/officeDocument/2006/relationships">
   <p:cSld>
     <p:bg>
@@ -4464,6 +4826,413 @@
         </p:nvSpPr>
         <p:spPr>
           <a:xfrm>
+            <a:off x="365760" y="457200"/>
+            <a:ext cx="4828032" cy="457200"/>
+          </a:xfrm>
+          <a:prstGeom prst="rect">
+            <a:avLst/>
+          </a:prstGeom>
+          <a:noFill/>
+        </p:spPr>
+        <p:txBody>
+          <a:bodyPr wrap="square" anchor="ctr">
+            <a:spAutoFit/>
+          </a:bodyPr>
+          <a:lstStyle/>
+          <a:p>
+            <a:pPr algn="l"/>
+            <a:r>
+              <a:rPr sz="1600" b="1">
+                <a:solidFill>
+                  <a:srgbClr val="FF6B6B"/>
+                </a:solidFill>
+                <a:latin typeface="Arial"/>
+              </a:rPr>
+              <a:t>본문 요약 (편집용)</a:t>
+            </a:r>
+          </a:p>
+        </p:txBody>
+      </p:sp>
+      <p:sp>
+        <p:nvSpPr>
+          <p:cNvPr id="3" name="TextBox 2"/>
+          <p:cNvSpPr txBox="1"/>
+          <p:nvPr/>
+        </p:nvSpPr>
+        <p:spPr>
+          <a:xfrm>
+            <a:off x="365760" y="1097280"/>
+            <a:ext cx="4828032" cy="457200"/>
+          </a:xfrm>
+          <a:prstGeom prst="rect">
+            <a:avLst/>
+          </a:prstGeom>
+          <a:noFill/>
+        </p:spPr>
+        <p:txBody>
+          <a:bodyPr wrap="square" anchor="t">
+            <a:spAutoFit/>
+          </a:bodyPr>
+          <a:lstStyle/>
+          <a:p>
+            <a:pPr algn="l"/>
+            <a:r>
+              <a:rPr sz="1300" b="1">
+                <a:solidFill>
+                  <a:srgbClr val="FFFFFF"/>
+                </a:solidFill>
+                <a:latin typeface="Arial"/>
+              </a:rPr>
+              <a:t>◆ 배경 — Background (자동 구분)</a:t>
+            </a:r>
+          </a:p>
+        </p:txBody>
+      </p:sp>
+      <p:sp>
+        <p:nvSpPr>
+          <p:cNvPr id="4" name="TextBox 3"/>
+          <p:cNvSpPr txBox="1"/>
+          <p:nvPr/>
+        </p:nvSpPr>
+        <p:spPr>
+          <a:xfrm>
+            <a:off x="457200" y="1600200"/>
+            <a:ext cx="4736592" cy="3566160"/>
+          </a:xfrm>
+          <a:prstGeom prst="rect">
+            <a:avLst/>
+          </a:prstGeom>
+          <a:noFill/>
+        </p:spPr>
+        <p:txBody>
+          <a:bodyPr wrap="square" anchor="t">
+            <a:spAutoFit/>
+          </a:bodyPr>
+          <a:lstStyle/>
+          <a:p>
+            <a:pPr algn="l"/>
+            <a:r>
+              <a:rPr sz="1000" b="0">
+                <a:solidFill>
+                  <a:srgbClr val="D5D8EA"/>
+                </a:solidFill>
+                <a:latin typeface="Arial"/>
+              </a:rPr>
+              <a:t>· Hair follicles (HFs) are vital skin appendages that perform fundamental functions including protection, thermoregulation, and sensation.
+· Orchestrated by hair follicle stem cells (HFSCs), HFs undergo cyclic regeneration throughout the lifespan.
+· However, during chronological aging, this mini-organ experiences progressive physiological decline, clinically characterized by a marked reduction in hair density and hair graying due to pigmentation dysfunction.</a:t>
+            </a:r>
+          </a:p>
+        </p:txBody>
+      </p:sp>
+      <p:sp>
+        <p:nvSpPr>
+          <p:cNvPr id="5" name="TextBox 4"/>
+          <p:cNvSpPr txBox="1"/>
+          <p:nvPr/>
+        </p:nvSpPr>
+        <p:spPr>
+          <a:xfrm>
+            <a:off x="365760" y="5303520"/>
+            <a:ext cx="4828032" cy="457200"/>
+          </a:xfrm>
+          <a:prstGeom prst="rect">
+            <a:avLst/>
+          </a:prstGeom>
+          <a:noFill/>
+        </p:spPr>
+        <p:txBody>
+          <a:bodyPr wrap="square" anchor="t">
+            <a:spAutoFit/>
+          </a:bodyPr>
+          <a:lstStyle/>
+          <a:p>
+            <a:pPr algn="l"/>
+            <a:r>
+              <a:rPr sz="1300" b="1">
+                <a:solidFill>
+                  <a:srgbClr val="FFFFFF"/>
+                </a:solidFill>
+                <a:latin typeface="Arial"/>
+              </a:rPr>
+              <a:t>◆ 연구 방법 — Methods (자동 구분)</a:t>
+            </a:r>
+          </a:p>
+        </p:txBody>
+      </p:sp>
+      <p:sp>
+        <p:nvSpPr>
+          <p:cNvPr id="6" name="TextBox 5"/>
+          <p:cNvSpPr txBox="1"/>
+          <p:nvPr/>
+        </p:nvSpPr>
+        <p:spPr>
+          <a:xfrm>
+            <a:off x="457200" y="5806440"/>
+            <a:ext cx="4736592" cy="3566160"/>
+          </a:xfrm>
+          <a:prstGeom prst="rect">
+            <a:avLst/>
+          </a:prstGeom>
+          <a:noFill/>
+        </p:spPr>
+        <p:txBody>
+          <a:bodyPr wrap="square" anchor="t">
+            <a:spAutoFit/>
+          </a:bodyPr>
+          <a:lstStyle/>
+          <a:p>
+            <a:pPr algn="l"/>
+            <a:r>
+              <a:rPr sz="1000" b="0">
+                <a:solidFill>
+                  <a:srgbClr val="D5D8EA"/>
+                </a:solidFill>
+                <a:latin typeface="Arial"/>
+              </a:rPr>
+              <a:t>· In this review, we delineate the dynamic anatomical changes throughout the hair growth cycle and describe the alterations of HFSCs during aging.</a:t>
+            </a:r>
+          </a:p>
+        </p:txBody>
+      </p:sp>
+    </p:spTree>
+  </p:cSld>
+  <p:clrMapOvr>
+    <a:masterClrMapping/>
+  </p:clrMapOvr>
+</p:sld>
+</file>
+
+<file path=ppt/slides/slide8.xml><?xml version="1.0" encoding="utf-8"?>
+<p:sld xmlns:a="http://schemas.openxmlformats.org/drawingml/2006/main" xmlns:p="http://schemas.openxmlformats.org/presentationml/2006/main" xmlns:r="http://schemas.openxmlformats.org/officeDocument/2006/relationships">
+  <p:cSld>
+    <p:bg>
+      <p:bgPr>
+        <a:solidFill>
+          <a:srgbClr val="12142A"/>
+        </a:solidFill>
+        <a:effectLst/>
+      </p:bgPr>
+    </p:bg>
+    <p:spTree>
+      <p:nvGrpSpPr>
+        <p:cNvPr id="1" name=""/>
+        <p:cNvGrpSpPr/>
+        <p:nvPr/>
+      </p:nvGrpSpPr>
+      <p:grpSpPr/>
+      <p:sp>
+        <p:nvSpPr>
+          <p:cNvPr id="2" name="TextBox 1"/>
+          <p:cNvSpPr txBox="1"/>
+          <p:nvPr/>
+        </p:nvSpPr>
+        <p:spPr>
+          <a:xfrm>
+            <a:off x="365760" y="457200"/>
+            <a:ext cx="4828032" cy="457200"/>
+          </a:xfrm>
+          <a:prstGeom prst="rect">
+            <a:avLst/>
+          </a:prstGeom>
+          <a:noFill/>
+        </p:spPr>
+        <p:txBody>
+          <a:bodyPr wrap="square" anchor="ctr">
+            <a:spAutoFit/>
+          </a:bodyPr>
+          <a:lstStyle/>
+          <a:p>
+            <a:pPr algn="l"/>
+            <a:r>
+              <a:rPr sz="1600" b="1">
+                <a:solidFill>
+                  <a:srgbClr val="FF6B6B"/>
+                </a:solidFill>
+                <a:latin typeface="Arial"/>
+              </a:rPr>
+              <a:t>본문 요약 (편집용)</a:t>
+            </a:r>
+          </a:p>
+        </p:txBody>
+      </p:sp>
+      <p:sp>
+        <p:nvSpPr>
+          <p:cNvPr id="3" name="TextBox 2"/>
+          <p:cNvSpPr txBox="1"/>
+          <p:nvPr/>
+        </p:nvSpPr>
+        <p:spPr>
+          <a:xfrm>
+            <a:off x="365760" y="1097280"/>
+            <a:ext cx="4828032" cy="457200"/>
+          </a:xfrm>
+          <a:prstGeom prst="rect">
+            <a:avLst/>
+          </a:prstGeom>
+          <a:noFill/>
+        </p:spPr>
+        <p:txBody>
+          <a:bodyPr wrap="square" anchor="t">
+            <a:spAutoFit/>
+          </a:bodyPr>
+          <a:lstStyle/>
+          <a:p>
+            <a:pPr algn="l"/>
+            <a:r>
+              <a:rPr sz="1300" b="1">
+                <a:solidFill>
+                  <a:srgbClr val="FFFFFF"/>
+                </a:solidFill>
+                <a:latin typeface="Arial"/>
+              </a:rPr>
+              <a:t>◆ 주요 결과 — Results (자동 구분)</a:t>
+            </a:r>
+          </a:p>
+        </p:txBody>
+      </p:sp>
+      <p:sp>
+        <p:nvSpPr>
+          <p:cNvPr id="4" name="TextBox 3"/>
+          <p:cNvSpPr txBox="1"/>
+          <p:nvPr/>
+        </p:nvSpPr>
+        <p:spPr>
+          <a:xfrm>
+            <a:off x="457200" y="1600200"/>
+            <a:ext cx="4736592" cy="3566160"/>
+          </a:xfrm>
+          <a:prstGeom prst="rect">
+            <a:avLst/>
+          </a:prstGeom>
+          <a:noFill/>
+        </p:spPr>
+        <p:txBody>
+          <a:bodyPr wrap="square" anchor="t">
+            <a:spAutoFit/>
+          </a:bodyPr>
+          <a:lstStyle/>
+          <a:p>
+            <a:pPr algn="l"/>
+            <a:r>
+              <a:rPr sz="1000" b="0">
+                <a:solidFill>
+                  <a:srgbClr val="D5D8EA"/>
+                </a:solidFill>
+                <a:latin typeface="Arial"/>
+              </a:rPr>
+              <a:t>· This aging process involves HFSC exhaustion accompanied by diminished regenerative potential and differentiation capacity, leading to degenerative changes in the bulge architecture.
+· Concurrently, the niche supporting HFSC homeostasis undergoes multi-dimensional and systemic degradation.
+· This niche deterioration disrupts the delicate balance between HFSC quiescence and activation, further impeding hair regeneration.
+· We specifically focus on the mechanisms underlying the multi-dimensional degradation of the HFSC niche at tissue, cellular, and molecular levels.</a:t>
+            </a:r>
+          </a:p>
+        </p:txBody>
+      </p:sp>
+      <p:sp>
+        <p:nvSpPr>
+          <p:cNvPr id="5" name="TextBox 4"/>
+          <p:cNvSpPr txBox="1"/>
+          <p:nvPr/>
+        </p:nvSpPr>
+        <p:spPr>
+          <a:xfrm>
+            <a:off x="365760" y="5303520"/>
+            <a:ext cx="4828032" cy="457200"/>
+          </a:xfrm>
+          <a:prstGeom prst="rect">
+            <a:avLst/>
+          </a:prstGeom>
+          <a:noFill/>
+        </p:spPr>
+        <p:txBody>
+          <a:bodyPr wrap="square" anchor="t">
+            <a:spAutoFit/>
+          </a:bodyPr>
+          <a:lstStyle/>
+          <a:p>
+            <a:pPr algn="l"/>
+            <a:r>
+              <a:rPr sz="1300" b="1">
+                <a:solidFill>
+                  <a:srgbClr val="FFFFFF"/>
+                </a:solidFill>
+                <a:latin typeface="Arial"/>
+              </a:rPr>
+              <a:t>◆ 결론 — Conclusion (자동 구분)</a:t>
+            </a:r>
+          </a:p>
+        </p:txBody>
+      </p:sp>
+      <p:sp>
+        <p:nvSpPr>
+          <p:cNvPr id="6" name="TextBox 5"/>
+          <p:cNvSpPr txBox="1"/>
+          <p:nvPr/>
+        </p:nvSpPr>
+        <p:spPr>
+          <a:xfrm>
+            <a:off x="457200" y="5806440"/>
+            <a:ext cx="4736592" cy="3566160"/>
+          </a:xfrm>
+          <a:prstGeom prst="rect">
+            <a:avLst/>
+          </a:prstGeom>
+          <a:noFill/>
+        </p:spPr>
+        <p:txBody>
+          <a:bodyPr wrap="square" anchor="t">
+            <a:spAutoFit/>
+          </a:bodyPr>
+          <a:lstStyle/>
+          <a:p>
+            <a:pPr algn="l"/>
+            <a:r>
+              <a:rPr sz="1000" b="0">
+                <a:solidFill>
+                  <a:srgbClr val="D5D8EA"/>
+                </a:solidFill>
+                <a:latin typeface="Arial"/>
+              </a:rPr>
+              <a:t>· Furthermore, we discuss various therapeutic strategies aimed at ameliorating HF aging, offering potential insights for future clinical translation in hair regeneration.</a:t>
+            </a:r>
+          </a:p>
+        </p:txBody>
+      </p:sp>
+    </p:spTree>
+  </p:cSld>
+  <p:clrMapOvr>
+    <a:masterClrMapping/>
+  </p:clrMapOvr>
+</p:sld>
+</file>
+
+<file path=ppt/slides/slide9.xml><?xml version="1.0" encoding="utf-8"?>
+<p:sld xmlns:a="http://schemas.openxmlformats.org/drawingml/2006/main" xmlns:p="http://schemas.openxmlformats.org/presentationml/2006/main" xmlns:r="http://schemas.openxmlformats.org/officeDocument/2006/relationships">
+  <p:cSld>
+    <p:bg>
+      <p:bgPr>
+        <a:solidFill>
+          <a:srgbClr val="12142A"/>
+        </a:solidFill>
+        <a:effectLst/>
+      </p:bgPr>
+    </p:bg>
+    <p:spTree>
+      <p:nvGrpSpPr>
+        <p:cNvPr id="1" name=""/>
+        <p:cNvGrpSpPr/>
+        <p:nvPr/>
+      </p:nvGrpSpPr>
+      <p:grpSpPr/>
+      <p:sp>
+        <p:nvSpPr>
+          <p:cNvPr id="2" name="TextBox 1"/>
+          <p:cNvSpPr txBox="1"/>
+          <p:nvPr/>
+        </p:nvSpPr>
+        <p:spPr>
+          <a:xfrm>
             <a:off x="365760" y="731520"/>
             <a:ext cx="4828032" cy="548640"/>
           </a:xfrm>
@@ -4522,9 +5291,9 @@
                 <a:latin typeface="Arial"/>
               </a:rPr>
               <a:t>[출처]
-논문: [에이피알] 에이피알, 고주파 미세천공 기술 기반 탈모 치료 효능 연구 국제 학술지 게재 - 에이피알 공식 블로그
-게재: 에이피알 공식 블로그
-원문: https://news.google.com/rss/articles/CBMiVkFVX3lxTE1JOUNhZmMySXp6dFpKZC1ZU3ZGdmtXVExtMVlyWlU2Y2FWa3BRQWREek9mY3pKTWhkZXNPSm04cjdhVVVUZXZzNTZEeU1UVnZ1MGJPTDRn?oc=5
+논문: Aging of hair follicle stem cells and their niche: mechanisms and regenerative therapeutic strategies
+게재: Cell communication and signaling : CCS
+원문: https://pubmed.ncbi.nlm.nih.gov/42723052/
 [이미지 출처]
 - Male pattern baldness.jpg / Originally uploaded by Lkinkade (Transferred by XenonX3) / CC BY-SA 2.5
   https://commons.wikimedia.org/wiki/File:Male_pattern_baldness.jpg
